--- a/slides/aula4.pptx
+++ b/slides/aula4.pptx
@@ -24,9 +24,16 @@
     <p:sldId id="272" r:id="rId18"/>
     <p:sldId id="273" r:id="rId19"/>
     <p:sldId id="274" r:id="rId20"/>
+    <p:sldId id="275" r:id="rId21"/>
+    <p:sldId id="276" r:id="rId22"/>
+    <p:sldId id="277" r:id="rId23"/>
+    <p:sldId id="278" r:id="rId24"/>
+    <p:sldId id="279" r:id="rId25"/>
+    <p:sldId id="280" r:id="rId26"/>
+    <p:sldId id="281" r:id="rId27"/>
   </p:sldIdLst>
   <p:notesMasterIdLst>
-    <p:notesMasterId r:id="rId21"/>
+    <p:notesMasterId r:id="rId28"/>
   </p:notesMasterIdLst>
   <p:sldSz cx="9144000" cy="5143500"/>
   <p:notesSz cx="5143500" cy="9144000"/>
@@ -1512,6 +1519,622 @@
             <a:fld id="{F7021451-1387-4CA6-816F-3879F97B5CBC}" type="slidenum">
               <a:rPr lang="en-US"/>
               <a:t>2</a:t>
+            </a:fld>
+            <a:endParaRPr lang="en-US"/>
+          </a:p>
+        </p:txBody>
+      </p:sp>
+    </p:spTree>
+    <p:extLst>
+      <p:ext uri="{BB962C8B-B14F-4D97-AF65-F5344CB8AC3E}">
+        <p14:creationId xmlns:p14="http://schemas.microsoft.com/office/powerpoint/2010/main" val="1024086991"/>
+      </p:ext>
+    </p:extLst>
+  </p:cSld>
+  <p:clrMapOvr>
+    <a:masterClrMapping/>
+  </p:clrMapOvr>
+</p:notes>
+</file>
+
+<file path=ppt/notesSlides/notesSlide20.xml><?xml version="1.0" encoding="utf-8"?>
+<p:notes xmlns:a="http://schemas.openxmlformats.org/drawingml/2006/main" xmlns:r="http://schemas.openxmlformats.org/officeDocument/2006/relationships" xmlns:p="http://schemas.openxmlformats.org/presentationml/2006/main">
+  <p:cSld>
+    <p:spTree>
+      <p:nvGrpSpPr>
+        <p:cNvPr id="1" name=""/>
+        <p:cNvGrpSpPr/>
+        <p:nvPr/>
+      </p:nvGrpSpPr>
+      <p:grpSpPr>
+        <a:xfrm>
+          <a:off x="0" y="0"/>
+          <a:ext cx="0" cy="0"/>
+          <a:chOff x="0" y="0"/>
+          <a:chExt cx="0" cy="0"/>
+        </a:xfrm>
+      </p:grpSpPr>
+      <p:sp>
+        <p:nvSpPr>
+          <p:cNvPr id="2" name="Slide Image Placeholder 1"/>
+          <p:cNvSpPr>
+            <a:spLocks noGrp="1" noRot="1" noChangeAspect="1"/>
+          </p:cNvSpPr>
+          <p:nvPr>
+            <p:ph type="sldImg"/>
+          </p:nvPr>
+        </p:nvSpPr>
+        <p:spPr/>
+      </p:sp>
+      <p:sp>
+        <p:nvSpPr>
+          <p:cNvPr id="3" name="Notes Placeholder 2"/>
+          <p:cNvSpPr>
+            <a:spLocks noGrp="1"/>
+          </p:cNvSpPr>
+          <p:nvPr>
+            <p:ph type="body" idx="1"/>
+          </p:nvPr>
+        </p:nvSpPr>
+        <p:spPr/>
+        <p:txBody>
+          <a:bodyPr/>
+          <a:lstStyle/>
+          <a:p>
+            <a:r>
+              <a:rPr lang="en-US" dirty="0"/>
+              <a:t/>
+            </a:r>
+            <a:endParaRPr lang="en-US" dirty="0"/>
+          </a:p>
+        </p:txBody>
+      </p:sp>
+      <p:sp>
+        <p:nvSpPr>
+          <p:cNvPr id="4" name="Slide Number Placeholder 3"/>
+          <p:cNvSpPr>
+            <a:spLocks noGrp="1"/>
+          </p:cNvSpPr>
+          <p:nvPr>
+            <p:ph type="sldNum" sz="quarter" idx="10"/>
+          </p:nvPr>
+        </p:nvSpPr>
+        <p:spPr/>
+        <p:txBody>
+          <a:bodyPr/>
+          <a:lstStyle/>
+          <a:p>
+            <a:fld id="{F7021451-1387-4CA6-816F-3879F97B5CBC}" type="slidenum">
+              <a:rPr lang="en-US"/>
+              <a:t>20</a:t>
+            </a:fld>
+            <a:endParaRPr lang="en-US"/>
+          </a:p>
+        </p:txBody>
+      </p:sp>
+    </p:spTree>
+    <p:extLst>
+      <p:ext uri="{BB962C8B-B14F-4D97-AF65-F5344CB8AC3E}">
+        <p14:creationId xmlns:p14="http://schemas.microsoft.com/office/powerpoint/2010/main" val="1024086991"/>
+      </p:ext>
+    </p:extLst>
+  </p:cSld>
+  <p:clrMapOvr>
+    <a:masterClrMapping/>
+  </p:clrMapOvr>
+</p:notes>
+</file>
+
+<file path=ppt/notesSlides/notesSlide21.xml><?xml version="1.0" encoding="utf-8"?>
+<p:notes xmlns:a="http://schemas.openxmlformats.org/drawingml/2006/main" xmlns:r="http://schemas.openxmlformats.org/officeDocument/2006/relationships" xmlns:p="http://schemas.openxmlformats.org/presentationml/2006/main">
+  <p:cSld>
+    <p:spTree>
+      <p:nvGrpSpPr>
+        <p:cNvPr id="1" name=""/>
+        <p:cNvGrpSpPr/>
+        <p:nvPr/>
+      </p:nvGrpSpPr>
+      <p:grpSpPr>
+        <a:xfrm>
+          <a:off x="0" y="0"/>
+          <a:ext cx="0" cy="0"/>
+          <a:chOff x="0" y="0"/>
+          <a:chExt cx="0" cy="0"/>
+        </a:xfrm>
+      </p:grpSpPr>
+      <p:sp>
+        <p:nvSpPr>
+          <p:cNvPr id="2" name="Slide Image Placeholder 1"/>
+          <p:cNvSpPr>
+            <a:spLocks noGrp="1" noRot="1" noChangeAspect="1"/>
+          </p:cNvSpPr>
+          <p:nvPr>
+            <p:ph type="sldImg"/>
+          </p:nvPr>
+        </p:nvSpPr>
+        <p:spPr/>
+      </p:sp>
+      <p:sp>
+        <p:nvSpPr>
+          <p:cNvPr id="3" name="Notes Placeholder 2"/>
+          <p:cNvSpPr>
+            <a:spLocks noGrp="1"/>
+          </p:cNvSpPr>
+          <p:nvPr>
+            <p:ph type="body" idx="1"/>
+          </p:nvPr>
+        </p:nvSpPr>
+        <p:spPr/>
+        <p:txBody>
+          <a:bodyPr/>
+          <a:lstStyle/>
+          <a:p>
+            <a:r>
+              <a:rPr lang="en-US" dirty="0"/>
+              <a:t/>
+            </a:r>
+            <a:endParaRPr lang="en-US" dirty="0"/>
+          </a:p>
+        </p:txBody>
+      </p:sp>
+      <p:sp>
+        <p:nvSpPr>
+          <p:cNvPr id="4" name="Slide Number Placeholder 3"/>
+          <p:cNvSpPr>
+            <a:spLocks noGrp="1"/>
+          </p:cNvSpPr>
+          <p:nvPr>
+            <p:ph type="sldNum" sz="quarter" idx="10"/>
+          </p:nvPr>
+        </p:nvSpPr>
+        <p:spPr/>
+        <p:txBody>
+          <a:bodyPr/>
+          <a:lstStyle/>
+          <a:p>
+            <a:fld id="{F7021451-1387-4CA6-816F-3879F97B5CBC}" type="slidenum">
+              <a:rPr lang="en-US"/>
+              <a:t>21</a:t>
+            </a:fld>
+            <a:endParaRPr lang="en-US"/>
+          </a:p>
+        </p:txBody>
+      </p:sp>
+    </p:spTree>
+    <p:extLst>
+      <p:ext uri="{BB962C8B-B14F-4D97-AF65-F5344CB8AC3E}">
+        <p14:creationId xmlns:p14="http://schemas.microsoft.com/office/powerpoint/2010/main" val="1024086991"/>
+      </p:ext>
+    </p:extLst>
+  </p:cSld>
+  <p:clrMapOvr>
+    <a:masterClrMapping/>
+  </p:clrMapOvr>
+</p:notes>
+</file>
+
+<file path=ppt/notesSlides/notesSlide22.xml><?xml version="1.0" encoding="utf-8"?>
+<p:notes xmlns:a="http://schemas.openxmlformats.org/drawingml/2006/main" xmlns:r="http://schemas.openxmlformats.org/officeDocument/2006/relationships" xmlns:p="http://schemas.openxmlformats.org/presentationml/2006/main">
+  <p:cSld>
+    <p:spTree>
+      <p:nvGrpSpPr>
+        <p:cNvPr id="1" name=""/>
+        <p:cNvGrpSpPr/>
+        <p:nvPr/>
+      </p:nvGrpSpPr>
+      <p:grpSpPr>
+        <a:xfrm>
+          <a:off x="0" y="0"/>
+          <a:ext cx="0" cy="0"/>
+          <a:chOff x="0" y="0"/>
+          <a:chExt cx="0" cy="0"/>
+        </a:xfrm>
+      </p:grpSpPr>
+      <p:sp>
+        <p:nvSpPr>
+          <p:cNvPr id="2" name="Slide Image Placeholder 1"/>
+          <p:cNvSpPr>
+            <a:spLocks noGrp="1" noRot="1" noChangeAspect="1"/>
+          </p:cNvSpPr>
+          <p:nvPr>
+            <p:ph type="sldImg"/>
+          </p:nvPr>
+        </p:nvSpPr>
+        <p:spPr/>
+      </p:sp>
+      <p:sp>
+        <p:nvSpPr>
+          <p:cNvPr id="3" name="Notes Placeholder 2"/>
+          <p:cNvSpPr>
+            <a:spLocks noGrp="1"/>
+          </p:cNvSpPr>
+          <p:nvPr>
+            <p:ph type="body" idx="1"/>
+          </p:nvPr>
+        </p:nvSpPr>
+        <p:spPr/>
+        <p:txBody>
+          <a:bodyPr/>
+          <a:lstStyle/>
+          <a:p>
+            <a:r>
+              <a:rPr lang="en-US" dirty="0"/>
+              <a:t/>
+            </a:r>
+            <a:endParaRPr lang="en-US" dirty="0"/>
+          </a:p>
+        </p:txBody>
+      </p:sp>
+      <p:sp>
+        <p:nvSpPr>
+          <p:cNvPr id="4" name="Slide Number Placeholder 3"/>
+          <p:cNvSpPr>
+            <a:spLocks noGrp="1"/>
+          </p:cNvSpPr>
+          <p:nvPr>
+            <p:ph type="sldNum" sz="quarter" idx="10"/>
+          </p:nvPr>
+        </p:nvSpPr>
+        <p:spPr/>
+        <p:txBody>
+          <a:bodyPr/>
+          <a:lstStyle/>
+          <a:p>
+            <a:fld id="{F7021451-1387-4CA6-816F-3879F97B5CBC}" type="slidenum">
+              <a:rPr lang="en-US"/>
+              <a:t>22</a:t>
+            </a:fld>
+            <a:endParaRPr lang="en-US"/>
+          </a:p>
+        </p:txBody>
+      </p:sp>
+    </p:spTree>
+    <p:extLst>
+      <p:ext uri="{BB962C8B-B14F-4D97-AF65-F5344CB8AC3E}">
+        <p14:creationId xmlns:p14="http://schemas.microsoft.com/office/powerpoint/2010/main" val="1024086991"/>
+      </p:ext>
+    </p:extLst>
+  </p:cSld>
+  <p:clrMapOvr>
+    <a:masterClrMapping/>
+  </p:clrMapOvr>
+</p:notes>
+</file>
+
+<file path=ppt/notesSlides/notesSlide23.xml><?xml version="1.0" encoding="utf-8"?>
+<p:notes xmlns:a="http://schemas.openxmlformats.org/drawingml/2006/main" xmlns:r="http://schemas.openxmlformats.org/officeDocument/2006/relationships" xmlns:p="http://schemas.openxmlformats.org/presentationml/2006/main">
+  <p:cSld>
+    <p:spTree>
+      <p:nvGrpSpPr>
+        <p:cNvPr id="1" name=""/>
+        <p:cNvGrpSpPr/>
+        <p:nvPr/>
+      </p:nvGrpSpPr>
+      <p:grpSpPr>
+        <a:xfrm>
+          <a:off x="0" y="0"/>
+          <a:ext cx="0" cy="0"/>
+          <a:chOff x="0" y="0"/>
+          <a:chExt cx="0" cy="0"/>
+        </a:xfrm>
+      </p:grpSpPr>
+      <p:sp>
+        <p:nvSpPr>
+          <p:cNvPr id="2" name="Slide Image Placeholder 1"/>
+          <p:cNvSpPr>
+            <a:spLocks noGrp="1" noRot="1" noChangeAspect="1"/>
+          </p:cNvSpPr>
+          <p:nvPr>
+            <p:ph type="sldImg"/>
+          </p:nvPr>
+        </p:nvSpPr>
+        <p:spPr/>
+      </p:sp>
+      <p:sp>
+        <p:nvSpPr>
+          <p:cNvPr id="3" name="Notes Placeholder 2"/>
+          <p:cNvSpPr>
+            <a:spLocks noGrp="1"/>
+          </p:cNvSpPr>
+          <p:nvPr>
+            <p:ph type="body" idx="1"/>
+          </p:nvPr>
+        </p:nvSpPr>
+        <p:spPr/>
+        <p:txBody>
+          <a:bodyPr/>
+          <a:lstStyle/>
+          <a:p>
+            <a:r>
+              <a:rPr lang="en-US" dirty="0"/>
+              <a:t/>
+            </a:r>
+            <a:endParaRPr lang="en-US" dirty="0"/>
+          </a:p>
+        </p:txBody>
+      </p:sp>
+      <p:sp>
+        <p:nvSpPr>
+          <p:cNvPr id="4" name="Slide Number Placeholder 3"/>
+          <p:cNvSpPr>
+            <a:spLocks noGrp="1"/>
+          </p:cNvSpPr>
+          <p:nvPr>
+            <p:ph type="sldNum" sz="quarter" idx="10"/>
+          </p:nvPr>
+        </p:nvSpPr>
+        <p:spPr/>
+        <p:txBody>
+          <a:bodyPr/>
+          <a:lstStyle/>
+          <a:p>
+            <a:fld id="{F7021451-1387-4CA6-816F-3879F97B5CBC}" type="slidenum">
+              <a:rPr lang="en-US"/>
+              <a:t>23</a:t>
+            </a:fld>
+            <a:endParaRPr lang="en-US"/>
+          </a:p>
+        </p:txBody>
+      </p:sp>
+    </p:spTree>
+    <p:extLst>
+      <p:ext uri="{BB962C8B-B14F-4D97-AF65-F5344CB8AC3E}">
+        <p14:creationId xmlns:p14="http://schemas.microsoft.com/office/powerpoint/2010/main" val="1024086991"/>
+      </p:ext>
+    </p:extLst>
+  </p:cSld>
+  <p:clrMapOvr>
+    <a:masterClrMapping/>
+  </p:clrMapOvr>
+</p:notes>
+</file>
+
+<file path=ppt/notesSlides/notesSlide24.xml><?xml version="1.0" encoding="utf-8"?>
+<p:notes xmlns:a="http://schemas.openxmlformats.org/drawingml/2006/main" xmlns:r="http://schemas.openxmlformats.org/officeDocument/2006/relationships" xmlns:p="http://schemas.openxmlformats.org/presentationml/2006/main">
+  <p:cSld>
+    <p:spTree>
+      <p:nvGrpSpPr>
+        <p:cNvPr id="1" name=""/>
+        <p:cNvGrpSpPr/>
+        <p:nvPr/>
+      </p:nvGrpSpPr>
+      <p:grpSpPr>
+        <a:xfrm>
+          <a:off x="0" y="0"/>
+          <a:ext cx="0" cy="0"/>
+          <a:chOff x="0" y="0"/>
+          <a:chExt cx="0" cy="0"/>
+        </a:xfrm>
+      </p:grpSpPr>
+      <p:sp>
+        <p:nvSpPr>
+          <p:cNvPr id="2" name="Slide Image Placeholder 1"/>
+          <p:cNvSpPr>
+            <a:spLocks noGrp="1" noRot="1" noChangeAspect="1"/>
+          </p:cNvSpPr>
+          <p:nvPr>
+            <p:ph type="sldImg"/>
+          </p:nvPr>
+        </p:nvSpPr>
+        <p:spPr/>
+      </p:sp>
+      <p:sp>
+        <p:nvSpPr>
+          <p:cNvPr id="3" name="Notes Placeholder 2"/>
+          <p:cNvSpPr>
+            <a:spLocks noGrp="1"/>
+          </p:cNvSpPr>
+          <p:nvPr>
+            <p:ph type="body" idx="1"/>
+          </p:nvPr>
+        </p:nvSpPr>
+        <p:spPr/>
+        <p:txBody>
+          <a:bodyPr/>
+          <a:lstStyle/>
+          <a:p>
+            <a:r>
+              <a:rPr lang="en-US" dirty="0"/>
+              <a:t/>
+            </a:r>
+            <a:endParaRPr lang="en-US" dirty="0"/>
+          </a:p>
+        </p:txBody>
+      </p:sp>
+      <p:sp>
+        <p:nvSpPr>
+          <p:cNvPr id="4" name="Slide Number Placeholder 3"/>
+          <p:cNvSpPr>
+            <a:spLocks noGrp="1"/>
+          </p:cNvSpPr>
+          <p:nvPr>
+            <p:ph type="sldNum" sz="quarter" idx="10"/>
+          </p:nvPr>
+        </p:nvSpPr>
+        <p:spPr/>
+        <p:txBody>
+          <a:bodyPr/>
+          <a:lstStyle/>
+          <a:p>
+            <a:fld id="{F7021451-1387-4CA6-816F-3879F97B5CBC}" type="slidenum">
+              <a:rPr lang="en-US"/>
+              <a:t>24</a:t>
+            </a:fld>
+            <a:endParaRPr lang="en-US"/>
+          </a:p>
+        </p:txBody>
+      </p:sp>
+    </p:spTree>
+    <p:extLst>
+      <p:ext uri="{BB962C8B-B14F-4D97-AF65-F5344CB8AC3E}">
+        <p14:creationId xmlns:p14="http://schemas.microsoft.com/office/powerpoint/2010/main" val="1024086991"/>
+      </p:ext>
+    </p:extLst>
+  </p:cSld>
+  <p:clrMapOvr>
+    <a:masterClrMapping/>
+  </p:clrMapOvr>
+</p:notes>
+</file>
+
+<file path=ppt/notesSlides/notesSlide25.xml><?xml version="1.0" encoding="utf-8"?>
+<p:notes xmlns:a="http://schemas.openxmlformats.org/drawingml/2006/main" xmlns:r="http://schemas.openxmlformats.org/officeDocument/2006/relationships" xmlns:p="http://schemas.openxmlformats.org/presentationml/2006/main">
+  <p:cSld>
+    <p:spTree>
+      <p:nvGrpSpPr>
+        <p:cNvPr id="1" name=""/>
+        <p:cNvGrpSpPr/>
+        <p:nvPr/>
+      </p:nvGrpSpPr>
+      <p:grpSpPr>
+        <a:xfrm>
+          <a:off x="0" y="0"/>
+          <a:ext cx="0" cy="0"/>
+          <a:chOff x="0" y="0"/>
+          <a:chExt cx="0" cy="0"/>
+        </a:xfrm>
+      </p:grpSpPr>
+      <p:sp>
+        <p:nvSpPr>
+          <p:cNvPr id="2" name="Slide Image Placeholder 1"/>
+          <p:cNvSpPr>
+            <a:spLocks noGrp="1" noRot="1" noChangeAspect="1"/>
+          </p:cNvSpPr>
+          <p:nvPr>
+            <p:ph type="sldImg"/>
+          </p:nvPr>
+        </p:nvSpPr>
+        <p:spPr/>
+      </p:sp>
+      <p:sp>
+        <p:nvSpPr>
+          <p:cNvPr id="3" name="Notes Placeholder 2"/>
+          <p:cNvSpPr>
+            <a:spLocks noGrp="1"/>
+          </p:cNvSpPr>
+          <p:nvPr>
+            <p:ph type="body" idx="1"/>
+          </p:nvPr>
+        </p:nvSpPr>
+        <p:spPr/>
+        <p:txBody>
+          <a:bodyPr/>
+          <a:lstStyle/>
+          <a:p>
+            <a:r>
+              <a:rPr lang="en-US" dirty="0"/>
+              <a:t/>
+            </a:r>
+            <a:endParaRPr lang="en-US" dirty="0"/>
+          </a:p>
+        </p:txBody>
+      </p:sp>
+      <p:sp>
+        <p:nvSpPr>
+          <p:cNvPr id="4" name="Slide Number Placeholder 3"/>
+          <p:cNvSpPr>
+            <a:spLocks noGrp="1"/>
+          </p:cNvSpPr>
+          <p:nvPr>
+            <p:ph type="sldNum" sz="quarter" idx="10"/>
+          </p:nvPr>
+        </p:nvSpPr>
+        <p:spPr/>
+        <p:txBody>
+          <a:bodyPr/>
+          <a:lstStyle/>
+          <a:p>
+            <a:fld id="{F7021451-1387-4CA6-816F-3879F97B5CBC}" type="slidenum">
+              <a:rPr lang="en-US"/>
+              <a:t>25</a:t>
+            </a:fld>
+            <a:endParaRPr lang="en-US"/>
+          </a:p>
+        </p:txBody>
+      </p:sp>
+    </p:spTree>
+    <p:extLst>
+      <p:ext uri="{BB962C8B-B14F-4D97-AF65-F5344CB8AC3E}">
+        <p14:creationId xmlns:p14="http://schemas.microsoft.com/office/powerpoint/2010/main" val="1024086991"/>
+      </p:ext>
+    </p:extLst>
+  </p:cSld>
+  <p:clrMapOvr>
+    <a:masterClrMapping/>
+  </p:clrMapOvr>
+</p:notes>
+</file>
+
+<file path=ppt/notesSlides/notesSlide26.xml><?xml version="1.0" encoding="utf-8"?>
+<p:notes xmlns:a="http://schemas.openxmlformats.org/drawingml/2006/main" xmlns:r="http://schemas.openxmlformats.org/officeDocument/2006/relationships" xmlns:p="http://schemas.openxmlformats.org/presentationml/2006/main">
+  <p:cSld>
+    <p:spTree>
+      <p:nvGrpSpPr>
+        <p:cNvPr id="1" name=""/>
+        <p:cNvGrpSpPr/>
+        <p:nvPr/>
+      </p:nvGrpSpPr>
+      <p:grpSpPr>
+        <a:xfrm>
+          <a:off x="0" y="0"/>
+          <a:ext cx="0" cy="0"/>
+          <a:chOff x="0" y="0"/>
+          <a:chExt cx="0" cy="0"/>
+        </a:xfrm>
+      </p:grpSpPr>
+      <p:sp>
+        <p:nvSpPr>
+          <p:cNvPr id="2" name="Slide Image Placeholder 1"/>
+          <p:cNvSpPr>
+            <a:spLocks noGrp="1" noRot="1" noChangeAspect="1"/>
+          </p:cNvSpPr>
+          <p:nvPr>
+            <p:ph type="sldImg"/>
+          </p:nvPr>
+        </p:nvSpPr>
+        <p:spPr/>
+      </p:sp>
+      <p:sp>
+        <p:nvSpPr>
+          <p:cNvPr id="3" name="Notes Placeholder 2"/>
+          <p:cNvSpPr>
+            <a:spLocks noGrp="1"/>
+          </p:cNvSpPr>
+          <p:nvPr>
+            <p:ph type="body" idx="1"/>
+          </p:nvPr>
+        </p:nvSpPr>
+        <p:spPr/>
+        <p:txBody>
+          <a:bodyPr/>
+          <a:lstStyle/>
+          <a:p>
+            <a:r>
+              <a:rPr lang="en-US" dirty="0"/>
+              <a:t/>
+            </a:r>
+            <a:endParaRPr lang="en-US" dirty="0"/>
+          </a:p>
+        </p:txBody>
+      </p:sp>
+      <p:sp>
+        <p:nvSpPr>
+          <p:cNvPr id="4" name="Slide Number Placeholder 3"/>
+          <p:cNvSpPr>
+            <a:spLocks noGrp="1"/>
+          </p:cNvSpPr>
+          <p:nvPr>
+            <p:ph type="sldNum" sz="quarter" idx="10"/>
+          </p:nvPr>
+        </p:nvSpPr>
+        <p:spPr/>
+        <p:txBody>
+          <a:bodyPr/>
+          <a:lstStyle/>
+          <a:p>
+            <a:fld id="{F7021451-1387-4CA6-816F-3879F97B5CBC}" type="slidenum">
+              <a:rPr lang="en-US"/>
+              <a:t>26</a:t>
             </a:fld>
             <a:endParaRPr lang="en-US"/>
           </a:p>
@@ -2627,7 +3250,7 @@
                 <a:ea typeface="Arial" pitchFamily="34" charset="-122"/>
                 <a:cs typeface="Arial" pitchFamily="34" charset="-120"/>
               </a:rPr>
-              <a:t>Aula 4 — prompt, dados ou modelo? diagnóstico em produção real</a:t>
+              <a:t>Aula 4 — três falhas reais em produção, e o que cada uma ensinou</a:t>
             </a:r>
             <a:endParaRPr lang="en-US" sz="1600" dirty="0"/>
           </a:p>
@@ -2666,7 +3289,7 @@
                 <a:ea typeface="Arial" pitchFamily="34" charset="-122"/>
                 <a:cs typeface="Arial" pitchFamily="34" charset="-120"/>
               </a:rPr>
-              <a:t>Deploy ao vivo — master → PR #4 → PR #6 — chef.workshopee.com.br</a:t>
+              <a:t>Evidência preservada do Langfuse — Chef Caseiro, agosto de 2026</a:t>
             </a:r>
             <a:endParaRPr lang="en-US" sz="1100" dirty="0"/>
           </a:p>
@@ -2737,7 +3360,7 @@
                 <a:ea typeface="Arial" pitchFamily="34" charset="-122"/>
                 <a:cs typeface="Arial" pitchFamily="34" charset="-120"/>
               </a:rPr>
-              <a:t>VÍDEO 4.2</a:t>
+              <a:t>VÍDEO 4.2 — FALHA 3</a:t>
             </a:r>
             <a:endParaRPr lang="en-US" sz="1100" dirty="0"/>
           </a:p>
@@ -2776,7 +3399,7 @@
                 <a:ea typeface="Arial" pitchFamily="34" charset="-122"/>
                 <a:cs typeface="Arial" pitchFamily="34" charset="-120"/>
               </a:rPr>
-              <a:t>Prompt, dados ou modelo?</a:t>
+              <a:t>Onde a resposta foi cortada</a:t>
             </a:r>
             <a:endParaRPr lang="en-US" sz="2600" dirty="0"/>
           </a:p>
@@ -2845,7 +3468,7 @@
                 <a:ea typeface="Arial" pitchFamily="34" charset="-122"/>
                 <a:cs typeface="Arial" pitchFamily="34" charset="-120"/>
               </a:rPr>
-              <a:t>Episódios A e B: falha de canal — tratamento de erro e ausência de resposta.</a:t>
+              <a:t>A resposta termina assim: "Vou registrar o uso desses itens agora."</a:t>
             </a:r>
             <a:endParaRPr lang="en-US" sz="1500" dirty="0"/>
           </a:p>
@@ -2869,7 +3492,7 @@
                 <a:ea typeface="Arial" pitchFamily="34" charset="-122"/>
                 <a:cs typeface="Arial" pitchFamily="34" charset="-120"/>
               </a:rPr>
-              <a:t>Episódio C: falha de estado — o prompt e o modelo estão impecáveis.</a:t>
+              <a:t>E o bloco seguinte era a chamada da ferramenta que registra o uso.</a:t>
             </a:r>
             <a:endParaRPr lang="en-US" sz="1500" dirty="0"/>
           </a:p>
@@ -2893,7 +3516,31 @@
                 <a:ea typeface="Arial" pitchFamily="34" charset="-122"/>
                 <a:cs typeface="Arial" pitchFamily="34" charset="-120"/>
               </a:rPr>
-              <a:t>A refutação direta do reflexo "o problema é o prompt": aqui quem errou foi a camada determinística.</a:t>
+              <a:t>O modelo anunciou a ação e foi cortado no meio de executá-la.</a:t>
+            </a:r>
+            <a:endParaRPr lang="en-US" sz="1500" dirty="0"/>
+          </a:p>
+          <a:p>
+            <a:pPr marL="342900" indent="-342900">
+              <a:lnSpc>
+                <a:spcPct val="115000"/>
+              </a:lnSpc>
+              <a:spcAft>
+                <a:spcPts val="1000"/>
+              </a:spcAft>
+              <a:buSzPct val="100000"/>
+              <a:buChar char="•"/>
+            </a:pPr>
+            <a:r>
+              <a:rPr lang="en-US" sz="1500" dirty="0">
+                <a:solidFill>
+                  <a:srgbClr val="011676"/>
+                </a:solidFill>
+                <a:latin typeface="Arial" pitchFamily="34" charset="0"/>
+                <a:ea typeface="Arial" pitchFamily="34" charset="-122"/>
+                <a:cs typeface="Arial" pitchFamily="34" charset="-120"/>
+              </a:rPr>
+              <a:t>A chamada ficou órfã: emitida pela metade, sem o resultado correspondente.</a:t>
             </a:r>
             <a:endParaRPr lang="en-US" sz="1500" dirty="0"/>
           </a:p>
@@ -2954,7 +3601,7 @@
     <p:bg>
       <p:bgPr>
         <a:solidFill>
-          <a:srgbClr val="0429BC"/>
+          <a:srgbClr val="F4F5F6"/>
         </a:solidFill>
       </p:bgPr>
     </p:bg>
@@ -2980,8 +3627,8 @@
         </p:nvSpPr>
         <p:spPr>
           <a:xfrm>
-            <a:off x="502920" y="1554480"/>
-            <a:ext cx="1828800" cy="914400"/>
+            <a:off x="502920" y="365760"/>
+            <a:ext cx="8138160" cy="320040"/>
           </a:xfrm>
           <a:prstGeom prst="rect">
             <a:avLst/>
@@ -2997,19 +3644,17 @@
               <a:buNone/>
             </a:pPr>
             <a:r>
-              <a:rPr lang="en-US" sz="2000" b="1" dirty="0">
-                <a:solidFill>
-                  <a:srgbClr val="F4F5F6">
-                    <a:alpha val="80000"/>
-                  </a:srgbClr>
-                </a:solidFill>
-                <a:latin typeface="Consolas" pitchFamily="34" charset="0"/>
-                <a:ea typeface="Consolas" pitchFamily="34" charset="-122"/>
-                <a:cs typeface="Consolas" pitchFamily="34" charset="-120"/>
-              </a:rPr>
-              <a:t>4.3</a:t>
-            </a:r>
-            <a:endParaRPr lang="en-US" sz="2000" dirty="0"/>
+              <a:rPr lang="en-US" sz="1100" b="1" spc="150" kern="0" dirty="0">
+                <a:solidFill>
+                  <a:srgbClr val="0429BC"/>
+                </a:solidFill>
+                <a:latin typeface="Arial" pitchFamily="34" charset="0"/>
+                <a:ea typeface="Arial" pitchFamily="34" charset="-122"/>
+                <a:cs typeface="Arial" pitchFamily="34" charset="-120"/>
+              </a:rPr>
+              <a:t>VÍDEO 4.2 — FALHA 3</a:t>
+            </a:r>
+            <a:endParaRPr lang="en-US" sz="1100" dirty="0"/>
           </a:p>
         </p:txBody>
       </p:sp>
@@ -3021,8 +3666,8 @@
         </p:nvSpPr>
         <p:spPr>
           <a:xfrm>
-            <a:off x="502920" y="1965960"/>
-            <a:ext cx="8138160" cy="1280160"/>
+            <a:off x="502920" y="713232"/>
+            <a:ext cx="8138160" cy="640080"/>
           </a:xfrm>
           <a:prstGeom prst="rect">
             <a:avLst/>
@@ -3038,23 +3683,164 @@
               <a:buNone/>
             </a:pPr>
             <a:r>
-              <a:rPr lang="en-US" sz="3400" b="1" dirty="0">
-                <a:solidFill>
-                  <a:srgbClr val="F4F5F6"/>
-                </a:solidFill>
-                <a:latin typeface="Arial" pitchFamily="34" charset="0"/>
-                <a:ea typeface="Arial" pitchFamily="34" charset="-122"/>
-                <a:cs typeface="Arial" pitchFamily="34" charset="-120"/>
-              </a:rPr>
-              <a:t>Corrigindo antes do usuário</a:t>
-            </a:r>
-            <a:endParaRPr lang="en-US" sz="3400" dirty="0"/>
-          </a:p>
-        </p:txBody>
-      </p:sp>
-      <p:sp>
-        <p:nvSpPr>
-          <p:cNvPr id="4" name="Text 2"/>
+              <a:rPr lang="en-US" sz="2600" b="1" dirty="0">
+                <a:solidFill>
+                  <a:srgbClr val="010C53"/>
+                </a:solidFill>
+                <a:latin typeface="Arial" pitchFamily="34" charset="0"/>
+                <a:ea typeface="Arial" pitchFamily="34" charset="-122"/>
+                <a:cs typeface="Arial" pitchFamily="34" charset="-120"/>
+              </a:rPr>
+              <a:t>E a requisição seguinte morre</a:t>
+            </a:r>
+            <a:endParaRPr lang="en-US" sz="2600" dirty="0"/>
+          </a:p>
+        </p:txBody>
+      </p:sp>
+      <p:sp>
+        <p:nvSpPr>
+          <p:cNvPr id="4" name="Shape 2"/>
+          <p:cNvSpPr/>
+          <p:nvPr/>
+        </p:nvSpPr>
+        <p:spPr>
+          <a:xfrm>
+            <a:off x="502920" y="1371600"/>
+            <a:ext cx="8138160" cy="0"/>
+          </a:xfrm>
+          <a:prstGeom prst="line">
+            <a:avLst/>
+          </a:prstGeom>
+          <a:noFill/>
+          <a:ln w="19050">
+            <a:solidFill>
+              <a:srgbClr val="010C53"/>
+            </a:solidFill>
+            <a:prstDash val="solid"/>
+          </a:ln>
+        </p:spPr>
+      </p:sp>
+      <p:sp>
+        <p:nvSpPr>
+          <p:cNvPr id="5" name="Text 3"/>
+          <p:cNvSpPr/>
+          <p:nvPr/>
+        </p:nvSpPr>
+        <p:spPr>
+          <a:xfrm>
+            <a:off x="502920" y="1600200"/>
+            <a:ext cx="8138160" cy="3044952"/>
+          </a:xfrm>
+          <a:prstGeom prst="rect">
+            <a:avLst/>
+          </a:prstGeom>
+          <a:noFill/>
+          <a:ln/>
+        </p:spPr>
+        <p:txBody>
+          <a:bodyPr wrap="square" rtlCol="0" anchor="t"/>
+          <a:lstStyle/>
+          <a:p>
+            <a:pPr marL="342900" indent="-342900">
+              <a:lnSpc>
+                <a:spcPct val="115000"/>
+              </a:lnSpc>
+              <a:spcAft>
+                <a:spcPts val="1000"/>
+              </a:spcAft>
+              <a:buSzPct val="100000"/>
+              <a:buChar char="•"/>
+            </a:pPr>
+            <a:r>
+              <a:rPr lang="en-US" sz="1500" b="1" dirty="0">
+                <a:solidFill>
+                  <a:srgbClr val="011676"/>
+                </a:solidFill>
+                <a:latin typeface="Arial" pitchFamily="34" charset="0"/>
+                <a:ea typeface="Arial" pitchFamily="34" charset="-122"/>
+                <a:cs typeface="Arial" pitchFamily="34" charset="-120"/>
+              </a:rPr>
+              <a:t>400: tool_use ids were found without tool_result blocks immediately after: toolu_01HgWZ8...</a:t>
+            </a:r>
+            <a:endParaRPr lang="en-US" sz="1500" dirty="0"/>
+          </a:p>
+          <a:p>
+            <a:pPr marL="342900" indent="-342900">
+              <a:lnSpc>
+                <a:spcPct val="115000"/>
+              </a:lnSpc>
+              <a:spcAft>
+                <a:spcPts val="1000"/>
+              </a:spcAft>
+              <a:buSzPct val="100000"/>
+              <a:buChar char="•"/>
+            </a:pPr>
+            <a:r>
+              <a:rPr lang="en-US" sz="1500" dirty="0">
+                <a:solidFill>
+                  <a:srgbClr val="011676"/>
+                </a:solidFill>
+                <a:latin typeface="Arial" pitchFamily="34" charset="0"/>
+                <a:ea typeface="Arial" pitchFamily="34" charset="-122"/>
+                <a:cs typeface="Arial" pitchFamily="34" charset="-120"/>
+              </a:rPr>
+              <a:t>Isso começou cosmético: por semanas, só cortava uma frase no fim da resposta.</a:t>
+            </a:r>
+            <a:endParaRPr lang="en-US" sz="1500" dirty="0"/>
+          </a:p>
+          <a:p>
+            <a:pPr marL="342900" indent="-342900">
+              <a:lnSpc>
+                <a:spcPct val="115000"/>
+              </a:lnSpc>
+              <a:spcAft>
+                <a:spcPts val="1000"/>
+              </a:spcAft>
+              <a:buSzPct val="100000"/>
+              <a:buChar char="•"/>
+            </a:pPr>
+            <a:r>
+              <a:rPr lang="en-US" sz="1500" dirty="0">
+                <a:solidFill>
+                  <a:srgbClr val="011676"/>
+                </a:solidFill>
+                <a:latin typeface="Arial" pitchFamily="34" charset="0"/>
+                <a:ea typeface="Arial" pitchFamily="34" charset="-122"/>
+                <a:cs typeface="Arial" pitchFamily="34" charset="-120"/>
+              </a:rPr>
+              <a:t>A despensa cresceu, a entrada ficou maior, e o ponto do corte se moveu — até cair dentro da chamada.</a:t>
+            </a:r>
+            <a:endParaRPr lang="en-US" sz="1500" dirty="0"/>
+          </a:p>
+          <a:p>
+            <a:pPr marL="342900" indent="-342900">
+              <a:lnSpc>
+                <a:spcPct val="115000"/>
+              </a:lnSpc>
+              <a:spcAft>
+                <a:spcPts val="1000"/>
+              </a:spcAft>
+              <a:buSzPct val="100000"/>
+              <a:buChar char="•"/>
+            </a:pPr>
+            <a:r>
+              <a:rPr lang="en-US" sz="1500" b="1" dirty="0">
+                <a:solidFill>
+                  <a:srgbClr val="011676"/>
+                </a:solidFill>
+                <a:latin typeface="Arial" pitchFamily="34" charset="0"/>
+                <a:ea typeface="Arial" pitchFamily="34" charset="-122"/>
+                <a:cs typeface="Arial" pitchFamily="34" charset="-120"/>
+              </a:rPr>
+              <a:t>Mesmo código, mesma configuração. Só os dados mudaram de tamanho.</a:t>
+            </a:r>
+            <a:endParaRPr lang="en-US" sz="1500" dirty="0"/>
+          </a:p>
+        </p:txBody>
+      </p:sp>
+      <p:sp>
+        <p:nvSpPr>
+          <p:cNvPr id="6" name="Text 4"/>
           <p:cNvSpPr/>
           <p:nvPr/>
         </p:nvSpPr>
@@ -3158,7 +3944,7 @@
                 <a:ea typeface="Arial" pitchFamily="34" charset="-122"/>
                 <a:cs typeface="Arial" pitchFamily="34" charset="-120"/>
               </a:rPr>
-              <a:t>VÍDEO 4.3 — PR #4</a:t>
+              <a:t>VÍDEO 4.2</a:t>
             </a:r>
             <a:endParaRPr lang="en-US" sz="1100" dirty="0"/>
           </a:p>
@@ -3197,7 +3983,7 @@
                 <a:ea typeface="Arial" pitchFamily="34" charset="-122"/>
                 <a:cs typeface="Arial" pitchFamily="34" charset="-120"/>
               </a:rPr>
-              <a:t>O remendo honesto</a:t>
+              <a:t>Do caso isolado à prevalência</a:t>
             </a:r>
             <a:endParaRPr lang="en-US" sz="2600" dirty="0"/>
           </a:p>
@@ -3266,7 +4052,7 @@
                 <a:ea typeface="Arial" pitchFamily="34" charset="-122"/>
                 <a:cs typeface="Arial" pitchFamily="34" charset="-120"/>
               </a:rPr>
-              <a:t>detalharErro() desembrulha err.cause — "fetch failed" vira "fetch failed (causa: ENOTFOUND)".</a:t>
+              <a:t>O eval de integridade de execução deu 0,33 nas duas operações de geração.</a:t>
             </a:r>
             <a:endParaRPr lang="en-US" sz="1500" dirty="0"/>
           </a:p>
@@ -3290,7 +4076,7 @@
                 <a:ea typeface="Arial" pitchFamily="34" charset="-122"/>
                 <a:cs typeface="Arial" pitchFamily="34" charset="-120"/>
               </a:rPr>
-              <a:t>avisar() nunca derruba o fluxo — o envio do erro ganha try/catch próprio.</a:t>
+              <a:t>Dois de cada três traces estruturalmente quebrados.</a:t>
             </a:r>
             <a:endParaRPr lang="en-US" sz="1500" dirty="0"/>
           </a:p>
@@ -3306,7 +4092,7 @@
               <a:buChar char="•"/>
             </a:pPr>
             <a:r>
-              <a:rPr lang="en-US" sz="1500" b="1" dirty="0">
+              <a:rPr lang="en-US" sz="1500" dirty="0">
                 <a:solidFill>
                   <a:srgbClr val="011676"/>
                 </a:solidFill>
@@ -3314,7 +4100,7 @@
                 <a:ea typeface="Arial" pitchFamily="34" charset="-122"/>
                 <a:cs typeface="Arial" pitchFamily="34" charset="-120"/>
               </a:rPr>
-              <a:t>O bot passa a dizer: "ainda não sei ler foto de cupom, me manda o link do QR ou o texto".</a:t>
+              <a:t>Sem esse número: "um bug que eu vi uma vez". Com ele: um problema sistêmico.</a:t>
             </a:r>
             <a:endParaRPr lang="en-US" sz="1500" dirty="0"/>
           </a:p>
@@ -3330,7 +4116,7 @@
               <a:buChar char="•"/>
             </a:pPr>
             <a:r>
-              <a:rPr lang="en-US" sz="1500" dirty="0">
+              <a:rPr lang="en-US" sz="1500" b="1" dirty="0">
                 <a:solidFill>
                   <a:srgbClr val="011676"/>
                 </a:solidFill>
@@ -3338,7 +4124,7 @@
                 <a:ea typeface="Arial" pitchFamily="34" charset="-122"/>
                 <a:cs typeface="Arial" pitchFamily="34" charset="-120"/>
               </a:rPr>
-              <a:t>Admitir a limitação já é uma correção — o bug não era não saber ler, era não dizer.</a:t>
+              <a:t>O eval não deu a solução. Deu a dimensão — e é dimensão que justifica prioridade.</a:t>
             </a:r>
             <a:endParaRPr lang="en-US" sz="1500" dirty="0"/>
           </a:p>
@@ -3396,6 +4182,159 @@
 <file path=ppt/slides/slide13.xml><?xml version="1.0" encoding="utf-8"?>
 <p:sld xmlns:a="http://schemas.openxmlformats.org/drawingml/2006/main" xmlns:r="http://schemas.openxmlformats.org/officeDocument/2006/relationships" xmlns:p="http://schemas.openxmlformats.org/presentationml/2006/main">
   <p:cSld name="Slide 13">
+    <p:bg>
+      <p:bgPr>
+        <a:solidFill>
+          <a:srgbClr val="0429BC"/>
+        </a:solidFill>
+      </p:bgPr>
+    </p:bg>
+    <p:spTree>
+      <p:nvGrpSpPr>
+        <p:cNvPr id="1" name=""/>
+        <p:cNvGrpSpPr/>
+        <p:nvPr/>
+      </p:nvGrpSpPr>
+      <p:grpSpPr>
+        <a:xfrm>
+          <a:off x="0" y="0"/>
+          <a:ext cx="0" cy="0"/>
+          <a:chOff x="0" y="0"/>
+          <a:chExt cx="0" cy="0"/>
+        </a:xfrm>
+      </p:grpSpPr>
+      <p:sp>
+        <p:nvSpPr>
+          <p:cNvPr id="2" name="Text 0"/>
+          <p:cNvSpPr/>
+          <p:nvPr/>
+        </p:nvSpPr>
+        <p:spPr>
+          <a:xfrm>
+            <a:off x="502920" y="1554480"/>
+            <a:ext cx="1828800" cy="914400"/>
+          </a:xfrm>
+          <a:prstGeom prst="rect">
+            <a:avLst/>
+          </a:prstGeom>
+          <a:noFill/>
+          <a:ln/>
+        </p:spPr>
+        <p:txBody>
+          <a:bodyPr wrap="square" rtlCol="0" anchor="ctr"/>
+          <a:lstStyle/>
+          <a:p>
+            <a:pPr indent="0" marL="0">
+              <a:buNone/>
+            </a:pPr>
+            <a:r>
+              <a:rPr lang="en-US" sz="2000" b="1" dirty="0">
+                <a:solidFill>
+                  <a:srgbClr val="F4F5F6">
+                    <a:alpha val="80000"/>
+                  </a:srgbClr>
+                </a:solidFill>
+                <a:latin typeface="Consolas" pitchFamily="34" charset="0"/>
+                <a:ea typeface="Consolas" pitchFamily="34" charset="-122"/>
+                <a:cs typeface="Consolas" pitchFamily="34" charset="-120"/>
+              </a:rPr>
+              <a:t>4.3</a:t>
+            </a:r>
+            <a:endParaRPr lang="en-US" sz="2000" dirty="0"/>
+          </a:p>
+        </p:txBody>
+      </p:sp>
+      <p:sp>
+        <p:nvSpPr>
+          <p:cNvPr id="3" name="Text 1"/>
+          <p:cNvSpPr/>
+          <p:nvPr/>
+        </p:nvSpPr>
+        <p:spPr>
+          <a:xfrm>
+            <a:off x="502920" y="1965960"/>
+            <a:ext cx="8138160" cy="1280160"/>
+          </a:xfrm>
+          <a:prstGeom prst="rect">
+            <a:avLst/>
+          </a:prstGeom>
+          <a:noFill/>
+          <a:ln/>
+        </p:spPr>
+        <p:txBody>
+          <a:bodyPr wrap="square" rtlCol="0" anchor="ctr"/>
+          <a:lstStyle/>
+          <a:p>
+            <a:pPr indent="0" marL="0">
+              <a:buNone/>
+            </a:pPr>
+            <a:r>
+              <a:rPr lang="en-US" sz="3400" b="1" dirty="0">
+                <a:solidFill>
+                  <a:srgbClr val="F4F5F6"/>
+                </a:solidFill>
+                <a:latin typeface="Arial" pitchFamily="34" charset="0"/>
+                <a:ea typeface="Arial" pitchFamily="34" charset="-122"/>
+                <a:cs typeface="Arial" pitchFamily="34" charset="-120"/>
+              </a:rPr>
+              <a:t>Corrigindo antes do usuário</a:t>
+            </a:r>
+            <a:endParaRPr lang="en-US" sz="3400" dirty="0"/>
+          </a:p>
+        </p:txBody>
+      </p:sp>
+      <p:sp>
+        <p:nvSpPr>
+          <p:cNvPr id="4" name="Text 2"/>
+          <p:cNvSpPr/>
+          <p:nvPr/>
+        </p:nvSpPr>
+        <p:spPr>
+          <a:xfrm>
+            <a:off x="502920" y="4800600"/>
+            <a:ext cx="8138160" cy="274320"/>
+          </a:xfrm>
+          <a:prstGeom prst="rect">
+            <a:avLst/>
+          </a:prstGeom>
+          <a:noFill/>
+          <a:ln/>
+        </p:spPr>
+        <p:txBody>
+          <a:bodyPr wrap="square" rtlCol="0" anchor="ctr"/>
+          <a:lstStyle/>
+          <a:p>
+            <a:pPr indent="0" marL="0">
+              <a:buNone/>
+            </a:pPr>
+            <a:r>
+              <a:rPr lang="en-US" sz="900" dirty="0">
+                <a:solidFill>
+                  <a:srgbClr val="010C53">
+                    <a:alpha val="60000"/>
+                  </a:srgbClr>
+                </a:solidFill>
+                <a:latin typeface="Arial" pitchFamily="34" charset="0"/>
+                <a:ea typeface="Arial" pitchFamily="34" charset="-122"/>
+                <a:cs typeface="Arial" pitchFamily="34" charset="-120"/>
+              </a:rPr>
+              <a:t>Aula 4 — Detectar, diagnosticar e corrigir — Evals, observabilidade e conformidade</a:t>
+            </a:r>
+            <a:endParaRPr lang="en-US" sz="900" dirty="0"/>
+          </a:p>
+        </p:txBody>
+      </p:sp>
+    </p:spTree>
+  </p:cSld>
+  <p:clrMapOvr>
+    <a:masterClrMapping/>
+  </p:clrMapOvr>
+</p:sld>
+</file>
+
+<file path=ppt/slides/slide14.xml><?xml version="1.0" encoding="utf-8"?>
+<p:sld xmlns:a="http://schemas.openxmlformats.org/drawingml/2006/main" xmlns:r="http://schemas.openxmlformats.org/officeDocument/2006/relationships" xmlns:p="http://schemas.openxmlformats.org/presentationml/2006/main">
+  <p:cSld name="Slide 14">
     <p:bg>
       <p:bgPr>
         <a:solidFill>
@@ -3450,7 +4389,7 @@
                 <a:ea typeface="Arial" pitchFamily="34" charset="-122"/>
                 <a:cs typeface="Arial" pitchFamily="34" charset="-120"/>
               </a:rPr>
-              <a:t>VÍDEO 4.3 — PR #6</a:t>
+              <a:t>VÍDEO 4.3</a:t>
             </a:r>
             <a:endParaRPr lang="en-US" sz="1100" dirty="0"/>
           </a:p>
@@ -3489,7 +4428,7 @@
                 <a:ea typeface="Arial" pitchFamily="34" charset="-122"/>
                 <a:cs typeface="Arial" pitchFamily="34" charset="-120"/>
               </a:rPr>
-              <a:t>A capacidade nova: nota por foto</a:t>
+              <a:t>A correção mais modesta possível</a:t>
             </a:r>
             <a:endParaRPr lang="en-US" sz="2600" dirty="0"/>
           </a:p>
@@ -3558,7 +4497,7 @@
                 <a:ea typeface="Arial" pitchFamily="34" charset="-122"/>
                 <a:cs typeface="Arial" pitchFamily="34" charset="-120"/>
               </a:rPr>
-              <a:t>Ingestão de NFC-e pela URL do QR code — fetch da página pública da SEFAZ, HTML → texto.</a:t>
+              <a:t>Eu não ensinei o bot a ler foto. Ainda não.</a:t>
             </a:r>
             <a:endParaRPr lang="en-US" sz="1500" dirty="0"/>
           </a:p>
@@ -3574,7 +4513,7 @@
               <a:buChar char="•"/>
             </a:pPr>
             <a:r>
-              <a:rPr lang="en-US" sz="1500" dirty="0">
+              <a:rPr lang="en-US" sz="1500" b="1" dirty="0">
                 <a:solidFill>
                   <a:srgbClr val="011676"/>
                 </a:solidFill>
@@ -3582,7 +4521,7 @@
                 <a:ea typeface="Arial" pitchFamily="34" charset="-122"/>
                 <a:cs typeface="Arial" pitchFamily="34" charset="-120"/>
               </a:rPr>
-              <a:t>Cai no mesmo extrator LLM de nota-fiscal.js, estado-agnóstico de propósito.</a:t>
+              <a:t>Eu fiz ele dizer que não sabia.</a:t>
             </a:r>
             <a:endParaRPr lang="en-US" sz="1500" dirty="0"/>
           </a:p>
@@ -3598,7 +4537,7 @@
               <a:buChar char="•"/>
             </a:pPr>
             <a:r>
-              <a:rPr lang="en-US" sz="1500" b="1" dirty="0">
+              <a:rPr lang="en-US" sz="1500" dirty="0">
                 <a:solidFill>
                   <a:srgbClr val="011676"/>
                 </a:solidFill>
@@ -3606,168 +4545,39 @@
                 <a:ea typeface="Arial" pitchFamily="34" charset="-122"/>
                 <a:cs typeface="Arial" pitchFamily="34" charset="-120"/>
               </a:rPr>
-              <a:t>O desenho original (visão lê os 44 dígitos direto da foto) foi derrubado por teste — a SEFAZ-SP exige o hash que só existe dentro do QR.</a:t>
+              <a:t>"Ainda não sei ler foto de cupom — leitura por imagem é a próxima camada. Por enquanto me manda o link do QR code da nota, ou o texto dela."</a:t>
             </a:r>
             <a:endParaRPr lang="en-US" sz="1500" dirty="0"/>
           </a:p>
+          <a:p>
+            <a:pPr marL="342900" indent="-342900">
+              <a:lnSpc>
+                <a:spcPct val="115000"/>
+              </a:lnSpc>
+              <a:spcAft>
+                <a:spcPts val="1000"/>
+              </a:spcAft>
+              <a:buSzPct val="100000"/>
+              <a:buChar char="•"/>
+            </a:pPr>
+            <a:r>
+              <a:rPr lang="en-US" sz="1500" dirty="0">
+                <a:solidFill>
+                  <a:srgbClr val="011676"/>
+                </a:solidFill>
+                <a:latin typeface="Arial" pitchFamily="34" charset="0"/>
+                <a:ea typeface="Arial" pitchFamily="34" charset="-122"/>
+                <a:cs typeface="Arial" pitchFamily="34" charset="-120"/>
+              </a:rPr>
+              <a:t>A capacidade técnica é exatamente a mesma nos dois casos.</a:t>
+            </a:r>
+            <a:endParaRPr lang="en-US" sz="1500" dirty="0"/>
+          </a:p>
         </p:txBody>
       </p:sp>
       <p:sp>
         <p:nvSpPr>
           <p:cNvPr id="6" name="Text 4"/>
-          <p:cNvSpPr/>
-          <p:nvPr/>
-        </p:nvSpPr>
-        <p:spPr>
-          <a:xfrm>
-            <a:off x="502920" y="4800600"/>
-            <a:ext cx="8138160" cy="274320"/>
-          </a:xfrm>
-          <a:prstGeom prst="rect">
-            <a:avLst/>
-          </a:prstGeom>
-          <a:noFill/>
-          <a:ln/>
-        </p:spPr>
-        <p:txBody>
-          <a:bodyPr wrap="square" rtlCol="0" anchor="ctr"/>
-          <a:lstStyle/>
-          <a:p>
-            <a:pPr indent="0" marL="0">
-              <a:buNone/>
-            </a:pPr>
-            <a:r>
-              <a:rPr lang="en-US" sz="900" dirty="0">
-                <a:solidFill>
-                  <a:srgbClr val="010C53">
-                    <a:alpha val="60000"/>
-                  </a:srgbClr>
-                </a:solidFill>
-                <a:latin typeface="Arial" pitchFamily="34" charset="0"/>
-                <a:ea typeface="Arial" pitchFamily="34" charset="-122"/>
-                <a:cs typeface="Arial" pitchFamily="34" charset="-120"/>
-              </a:rPr>
-              <a:t>Aula 4 — Detectar, diagnosticar e corrigir — Evals, observabilidade e conformidade</a:t>
-            </a:r>
-            <a:endParaRPr lang="en-US" sz="900" dirty="0"/>
-          </a:p>
-        </p:txBody>
-      </p:sp>
-    </p:spTree>
-  </p:cSld>
-  <p:clrMapOvr>
-    <a:masterClrMapping/>
-  </p:clrMapOvr>
-</p:sld>
-</file>
-
-<file path=ppt/slides/slide14.xml><?xml version="1.0" encoding="utf-8"?>
-<p:sld xmlns:a="http://schemas.openxmlformats.org/drawingml/2006/main" xmlns:r="http://schemas.openxmlformats.org/officeDocument/2006/relationships" xmlns:p="http://schemas.openxmlformats.org/presentationml/2006/main">
-  <p:cSld name="Slide 14">
-    <p:bg>
-      <p:bgPr>
-        <a:solidFill>
-          <a:srgbClr val="0429BC"/>
-        </a:solidFill>
-      </p:bgPr>
-    </p:bg>
-    <p:spTree>
-      <p:nvGrpSpPr>
-        <p:cNvPr id="1" name=""/>
-        <p:cNvGrpSpPr/>
-        <p:nvPr/>
-      </p:nvGrpSpPr>
-      <p:grpSpPr>
-        <a:xfrm>
-          <a:off x="0" y="0"/>
-          <a:ext cx="0" cy="0"/>
-          <a:chOff x="0" y="0"/>
-          <a:chExt cx="0" cy="0"/>
-        </a:xfrm>
-      </p:grpSpPr>
-      <p:sp>
-        <p:nvSpPr>
-          <p:cNvPr id="2" name="Text 0"/>
-          <p:cNvSpPr/>
-          <p:nvPr/>
-        </p:nvSpPr>
-        <p:spPr>
-          <a:xfrm>
-            <a:off x="502920" y="1554480"/>
-            <a:ext cx="1828800" cy="914400"/>
-          </a:xfrm>
-          <a:prstGeom prst="rect">
-            <a:avLst/>
-          </a:prstGeom>
-          <a:noFill/>
-          <a:ln/>
-        </p:spPr>
-        <p:txBody>
-          <a:bodyPr wrap="square" rtlCol="0" anchor="ctr"/>
-          <a:lstStyle/>
-          <a:p>
-            <a:pPr indent="0" marL="0">
-              <a:buNone/>
-            </a:pPr>
-            <a:r>
-              <a:rPr lang="en-US" sz="2000" b="1" dirty="0">
-                <a:solidFill>
-                  <a:srgbClr val="F4F5F6">
-                    <a:alpha val="80000"/>
-                  </a:srgbClr>
-                </a:solidFill>
-                <a:latin typeface="Consolas" pitchFamily="34" charset="0"/>
-                <a:ea typeface="Consolas" pitchFamily="34" charset="-122"/>
-                <a:cs typeface="Consolas" pitchFamily="34" charset="-120"/>
-              </a:rPr>
-              <a:t>4.4</a:t>
-            </a:r>
-            <a:endParaRPr lang="en-US" sz="2000" dirty="0"/>
-          </a:p>
-        </p:txBody>
-      </p:sp>
-      <p:sp>
-        <p:nvSpPr>
-          <p:cNvPr id="3" name="Text 1"/>
-          <p:cNvSpPr/>
-          <p:nvPr/>
-        </p:nvSpPr>
-        <p:spPr>
-          <a:xfrm>
-            <a:off x="502920" y="1965960"/>
-            <a:ext cx="8138160" cy="1280160"/>
-          </a:xfrm>
-          <a:prstGeom prst="rect">
-            <a:avLst/>
-          </a:prstGeom>
-          <a:noFill/>
-          <a:ln/>
-        </p:spPr>
-        <p:txBody>
-          <a:bodyPr wrap="square" rtlCol="0" anchor="ctr"/>
-          <a:lstStyle/>
-          <a:p>
-            <a:pPr indent="0" marL="0">
-              <a:buNone/>
-            </a:pPr>
-            <a:r>
-              <a:rPr lang="en-US" sz="3400" b="1" dirty="0">
-                <a:solidFill>
-                  <a:srgbClr val="F4F5F6"/>
-                </a:solidFill>
-                <a:latin typeface="Arial" pitchFamily="34" charset="0"/>
-                <a:ea typeface="Arial" pitchFamily="34" charset="-122"/>
-                <a:cs typeface="Arial" pitchFamily="34" charset="-120"/>
-              </a:rPr>
-              <a:t>Simulando o ciclo completo</a:t>
-            </a:r>
-            <a:endParaRPr lang="en-US" sz="3400" dirty="0"/>
-          </a:p>
-        </p:txBody>
-      </p:sp>
-      <p:sp>
-        <p:nvSpPr>
-          <p:cNvPr id="4" name="Text 2"/>
           <p:cNvSpPr/>
           <p:nvPr/>
         </p:nvSpPr>
@@ -3871,7 +4681,7 @@
                 <a:ea typeface="Arial" pitchFamily="34" charset="-122"/>
                 <a:cs typeface="Arial" pitchFamily="34" charset="-120"/>
               </a:rPr>
-              <a:t>VÍDEO 4.4</a:t>
+              <a:t>VÍDEO 4.3</a:t>
             </a:r>
             <a:endParaRPr lang="en-US" sz="1100" dirty="0"/>
           </a:p>
@@ -3910,132 +4720,1065 @@
                 <a:ea typeface="Arial" pitchFamily="34" charset="-122"/>
                 <a:cs typeface="Arial" pitchFamily="34" charset="-120"/>
               </a:rPr>
-              <a:t>A consequência: taxa de erro sobe</a:t>
+              <a:t>O que mudou para quem usa</a:t>
             </a:r>
             <a:endParaRPr lang="en-US" sz="2600" dirty="0"/>
           </a:p>
         </p:txBody>
       </p:sp>
-      <p:sp>
-        <p:nvSpPr>
-          <p:cNvPr id="4" name="Shape 2"/>
-          <p:cNvSpPr/>
-          <p:nvPr/>
-        </p:nvSpPr>
-        <p:spPr>
-          <a:xfrm>
-            <a:off x="502920" y="1371600"/>
-            <a:ext cx="8138160" cy="0"/>
-          </a:xfrm>
-          <a:prstGeom prst="line">
-            <a:avLst/>
-          </a:prstGeom>
-          <a:noFill/>
-          <a:ln w="19050">
-            <a:solidFill>
-              <a:srgbClr val="010C53"/>
-            </a:solidFill>
-            <a:prstDash val="solid"/>
-          </a:ln>
-        </p:spPr>
-      </p:sp>
-      <p:sp>
-        <p:nvSpPr>
-          <p:cNvPr id="5" name="Text 3"/>
-          <p:cNvSpPr/>
-          <p:nvPr/>
-        </p:nvSpPr>
-        <p:spPr>
-          <a:xfrm>
-            <a:off x="502920" y="1600200"/>
-            <a:ext cx="8138160" cy="3044952"/>
-          </a:xfrm>
-          <a:prstGeom prst="rect">
-            <a:avLst/>
-          </a:prstGeom>
-          <a:noFill/>
-          <a:ln/>
-        </p:spPr>
-        <p:txBody>
-          <a:bodyPr wrap="square" rtlCol="0" anchor="t"/>
-          <a:lstStyle/>
-          <a:p>
-            <a:pPr marL="342900" indent="-342900">
-              <a:lnSpc>
-                <a:spcPct val="115000"/>
-              </a:lnSpc>
-              <a:spcAft>
-                <a:spcPts val="1000"/>
-              </a:spcAft>
-              <a:buSzPct val="100000"/>
-              <a:buChar char="•"/>
-            </a:pPr>
-            <a:r>
-              <a:rPr lang="en-US" sz="1500" dirty="0">
-                <a:solidFill>
-                  <a:srgbClr val="011676"/>
-                </a:solidFill>
-                <a:latin typeface="Arial" pitchFamily="34" charset="0"/>
-                <a:ea typeface="Arial" pitchFamily="34" charset="-122"/>
-                <a:cs typeface="Arial" pitchFamily="34" charset="-120"/>
-              </a:rPr>
-              <a:t>Com foto entrando no fluxo, a superfície de erro aumenta.</a:t>
-            </a:r>
-            <a:endParaRPr lang="en-US" sz="1500" dirty="0"/>
-          </a:p>
-          <a:p>
-            <a:pPr marL="342900" indent="-342900">
-              <a:lnSpc>
-                <a:spcPct val="115000"/>
-              </a:lnSpc>
-              <a:spcAft>
-                <a:spcPts val="1000"/>
-              </a:spcAft>
-              <a:buSzPct val="100000"/>
-              <a:buChar char="•"/>
-            </a:pPr>
-            <a:r>
-              <a:rPr lang="en-US" sz="1500" b="1" dirty="0">
-                <a:solidFill>
-                  <a:srgbClr val="011676"/>
-                </a:solidFill>
-                <a:latin typeface="Arial" pitchFamily="34" charset="0"/>
-                <a:ea typeface="Arial" pitchFamily="34" charset="-122"/>
-                <a:cs typeface="Arial" pitchFamily="34" charset="-120"/>
-              </a:rPr>
-              <a:t>A tela de revisão de nota deixa de ser luxo — receipt_items.confirmed já existe no schema, hoje sempre true.</a:t>
-            </a:r>
-            <a:endParaRPr lang="en-US" sz="1500" dirty="0"/>
-          </a:p>
-          <a:p>
-            <a:pPr marL="342900" indent="-342900">
-              <a:lnSpc>
-                <a:spcPct val="115000"/>
-              </a:lnSpc>
-              <a:spcAft>
-                <a:spcPts val="1000"/>
-              </a:spcAft>
-              <a:buSzPct val="100000"/>
-              <a:buChar char="•"/>
-            </a:pPr>
-            <a:r>
-              <a:rPr lang="en-US" sz="1500" dirty="0">
-                <a:solidFill>
-                  <a:srgbClr val="011676"/>
-                </a:solidFill>
-                <a:latin typeface="Arial" pitchFamily="34" charset="0"/>
-                <a:ea typeface="Arial" pitchFamily="34" charset="-122"/>
-                <a:cs typeface="Arial" pitchFamily="34" charset="-120"/>
-              </a:rPr>
-              <a:t>Gancho pro próximo PR de gaveta, combinado para ser construído depois do #6 testado.</a:t>
-            </a:r>
-            <a:endParaRPr lang="en-US" sz="1500" dirty="0"/>
-          </a:p>
-        </p:txBody>
-      </p:sp>
-      <p:sp>
-        <p:nvSpPr>
-          <p:cNvPr id="6" name="Text 4"/>
+      <p:graphicFrame>
+        <p:nvGraphicFramePr>
+          <p:cNvPr id="16" name="Table 0"/>
+          <p:cNvGraphicFramePr>
+            <a:graphicFrameLocks noGrp="1"/>
+          </p:cNvGraphicFramePr>
+          <p:nvPr>
+            <p:extLst>
+              <p:ext uri="{D42A27DB-BD31-4B8C-83A1-F6EECF244321}">
+                <p14:modId xmlns:p14="http://schemas.microsoft.com/office/powerpoint/2010/main" val="1579011935"/>
+              </p:ext>
+            </p:extLst>
+          </p:nvPr>
+        </p:nvGraphicFramePr>
+        <p:xfrm>
+          <a:off x="502920" y="1463040"/>
+          <a:ext cx="8138160" cy="914400"/>
+        </p:xfrm>
+        <a:graphic>
+          <a:graphicData uri="http://schemas.openxmlformats.org/drawingml/2006/table">
+            <a:tbl>
+              <a:tblPr/>
+              <a:tblGrid>
+                <a:gridCol w="3657600"/>
+                <a:gridCol w="2377440"/>
+                <a:gridCol w="2377440"/>
+              </a:tblGrid>
+              <a:tr h="0">
+                <a:tc>
+                  <a:txBody>
+                    <a:bodyPr/>
+                    <a:lstStyle/>
+                    <a:p>
+                      <a:pPr indent="0" marL="0">
+                        <a:buNone/>
+                      </a:pPr>
+                      <a:endParaRPr lang="en-US" sz="1100" dirty="0">
+                        <a:latin typeface="Arial" charset="0"/>
+                        <a:ea typeface="Arial" charset="0"/>
+                        <a:cs typeface="Arial" charset="0"/>
+                      </a:endParaRPr>
+                    </a:p>
+                  </a:txBody>
+                  <a:tcPr marL="91440" marR="91440" marT="45720" marB="45720" anchor="ctr">
+                    <a:lnL w="6350" cap="flat" cmpd="sng" algn="ctr">
+                      <a:solidFill>
+                        <a:srgbClr val="D8DCEA"/>
+                      </a:solidFill>
+                      <a:prstDash val="solid"/>
+                      <a:round/>
+                      <a:headEnd type="none" w="med" len="med"/>
+                      <a:tailEnd type="none" w="med" len="med"/>
+                    </a:lnL>
+                    <a:lnR w="6350" cap="flat" cmpd="sng" algn="ctr">
+                      <a:solidFill>
+                        <a:srgbClr val="D8DCEA"/>
+                      </a:solidFill>
+                      <a:prstDash val="solid"/>
+                      <a:round/>
+                      <a:headEnd type="none" w="med" len="med"/>
+                      <a:tailEnd type="none" w="med" len="med"/>
+                    </a:lnR>
+                    <a:lnT w="6350" cap="flat" cmpd="sng" algn="ctr">
+                      <a:solidFill>
+                        <a:srgbClr val="D8DCEA"/>
+                      </a:solidFill>
+                      <a:prstDash val="solid"/>
+                      <a:round/>
+                      <a:headEnd type="none" w="med" len="med"/>
+                      <a:tailEnd type="none" w="med" len="med"/>
+                    </a:lnT>
+                    <a:lnB w="6350" cap="flat" cmpd="sng" algn="ctr">
+                      <a:solidFill>
+                        <a:srgbClr val="D8DCEA"/>
+                      </a:solidFill>
+                      <a:prstDash val="solid"/>
+                      <a:round/>
+                      <a:headEnd type="none" w="med" len="med"/>
+                      <a:tailEnd type="none" w="med" len="med"/>
+                    </a:lnB>
+                    <a:solidFill>
+                      <a:srgbClr val="010C53"/>
+                    </a:solidFill>
+                  </a:tcPr>
+                </a:tc>
+                <a:tc>
+                  <a:txBody>
+                    <a:bodyPr/>
+                    <a:lstStyle/>
+                    <a:p>
+                      <a:pPr indent="0" marL="0">
+                        <a:buNone/>
+                      </a:pPr>
+                      <a:r>
+                        <a:rPr lang="en-US" sz="1100" b="1" dirty="0">
+                          <a:solidFill>
+                            <a:srgbClr val="F4F5F6"/>
+                          </a:solidFill>
+                          <a:latin typeface="Arial" pitchFamily="34" charset="0"/>
+                          <a:ea typeface="Arial" pitchFamily="34" charset="-122"/>
+                          <a:cs typeface="Arial" pitchFamily="34" charset="-120"/>
+                        </a:rPr>
+                        <a:t>Antes</a:t>
+                      </a:r>
+                      <a:endParaRPr lang="en-US" sz="1100" dirty="0">
+                        <a:latin typeface="Arial" charset="0"/>
+                        <a:ea typeface="Arial" charset="0"/>
+                        <a:cs typeface="Arial" charset="0"/>
+                      </a:endParaRPr>
+                    </a:p>
+                  </a:txBody>
+                  <a:tcPr marL="91440" marR="91440" marT="45720" marB="45720" anchor="ctr">
+                    <a:lnL w="6350" cap="flat" cmpd="sng" algn="ctr">
+                      <a:solidFill>
+                        <a:srgbClr val="D8DCEA"/>
+                      </a:solidFill>
+                      <a:prstDash val="solid"/>
+                      <a:round/>
+                      <a:headEnd type="none" w="med" len="med"/>
+                      <a:tailEnd type="none" w="med" len="med"/>
+                    </a:lnL>
+                    <a:lnR w="6350" cap="flat" cmpd="sng" algn="ctr">
+                      <a:solidFill>
+                        <a:srgbClr val="D8DCEA"/>
+                      </a:solidFill>
+                      <a:prstDash val="solid"/>
+                      <a:round/>
+                      <a:headEnd type="none" w="med" len="med"/>
+                      <a:tailEnd type="none" w="med" len="med"/>
+                    </a:lnR>
+                    <a:lnT w="6350" cap="flat" cmpd="sng" algn="ctr">
+                      <a:solidFill>
+                        <a:srgbClr val="D8DCEA"/>
+                      </a:solidFill>
+                      <a:prstDash val="solid"/>
+                      <a:round/>
+                      <a:headEnd type="none" w="med" len="med"/>
+                      <a:tailEnd type="none" w="med" len="med"/>
+                    </a:lnT>
+                    <a:lnB w="6350" cap="flat" cmpd="sng" algn="ctr">
+                      <a:solidFill>
+                        <a:srgbClr val="D8DCEA"/>
+                      </a:solidFill>
+                      <a:prstDash val="solid"/>
+                      <a:round/>
+                      <a:headEnd type="none" w="med" len="med"/>
+                      <a:tailEnd type="none" w="med" len="med"/>
+                    </a:lnB>
+                    <a:solidFill>
+                      <a:srgbClr val="010C53"/>
+                    </a:solidFill>
+                  </a:tcPr>
+                </a:tc>
+                <a:tc>
+                  <a:txBody>
+                    <a:bodyPr/>
+                    <a:lstStyle/>
+                    <a:p>
+                      <a:pPr indent="0" marL="0">
+                        <a:buNone/>
+                      </a:pPr>
+                      <a:r>
+                        <a:rPr lang="en-US" sz="1100" b="1" dirty="0">
+                          <a:solidFill>
+                            <a:srgbClr val="F4F5F6"/>
+                          </a:solidFill>
+                          <a:latin typeface="Arial" pitchFamily="34" charset="0"/>
+                          <a:ea typeface="Arial" pitchFamily="34" charset="-122"/>
+                          <a:cs typeface="Arial" pitchFamily="34" charset="-120"/>
+                        </a:rPr>
+                        <a:t>Depois</a:t>
+                      </a:r>
+                      <a:endParaRPr lang="en-US" sz="1100" dirty="0">
+                        <a:latin typeface="Arial" charset="0"/>
+                        <a:ea typeface="Arial" charset="0"/>
+                        <a:cs typeface="Arial" charset="0"/>
+                      </a:endParaRPr>
+                    </a:p>
+                  </a:txBody>
+                  <a:tcPr marL="91440" marR="91440" marT="45720" marB="45720" anchor="ctr">
+                    <a:lnL w="6350" cap="flat" cmpd="sng" algn="ctr">
+                      <a:solidFill>
+                        <a:srgbClr val="D8DCEA"/>
+                      </a:solidFill>
+                      <a:prstDash val="solid"/>
+                      <a:round/>
+                      <a:headEnd type="none" w="med" len="med"/>
+                      <a:tailEnd type="none" w="med" len="med"/>
+                    </a:lnL>
+                    <a:lnR w="6350" cap="flat" cmpd="sng" algn="ctr">
+                      <a:solidFill>
+                        <a:srgbClr val="D8DCEA"/>
+                      </a:solidFill>
+                      <a:prstDash val="solid"/>
+                      <a:round/>
+                      <a:headEnd type="none" w="med" len="med"/>
+                      <a:tailEnd type="none" w="med" len="med"/>
+                    </a:lnR>
+                    <a:lnT w="6350" cap="flat" cmpd="sng" algn="ctr">
+                      <a:solidFill>
+                        <a:srgbClr val="D8DCEA"/>
+                      </a:solidFill>
+                      <a:prstDash val="solid"/>
+                      <a:round/>
+                      <a:headEnd type="none" w="med" len="med"/>
+                      <a:tailEnd type="none" w="med" len="med"/>
+                    </a:lnT>
+                    <a:lnB w="6350" cap="flat" cmpd="sng" algn="ctr">
+                      <a:solidFill>
+                        <a:srgbClr val="D8DCEA"/>
+                      </a:solidFill>
+                      <a:prstDash val="solid"/>
+                      <a:round/>
+                      <a:headEnd type="none" w="med" len="med"/>
+                      <a:tailEnd type="none" w="med" len="med"/>
+                    </a:lnB>
+                    <a:solidFill>
+                      <a:srgbClr val="010C53"/>
+                    </a:solidFill>
+                  </a:tcPr>
+                </a:tc>
+              </a:tr>
+              <a:tr h="0">
+                <a:tc>
+                  <a:txBody>
+                    <a:bodyPr/>
+                    <a:lstStyle/>
+                    <a:p>
+                      <a:pPr indent="0" marL="0">
+                        <a:buNone/>
+                      </a:pPr>
+                      <a:r>
+                        <a:rPr lang="en-US" sz="1100" dirty="0">
+                          <a:solidFill>
+                            <a:srgbClr val="011676"/>
+                          </a:solidFill>
+                          <a:latin typeface="Arial" pitchFamily="34" charset="0"/>
+                          <a:ea typeface="Arial" pitchFamily="34" charset="-122"/>
+                          <a:cs typeface="Arial" pitchFamily="34" charset="-120"/>
+                        </a:rPr>
+                        <a:t>O usuário sabe o que houve?</a:t>
+                      </a:r>
+                      <a:endParaRPr lang="en-US" sz="1100" dirty="0">
+                        <a:latin typeface="Arial" charset="0"/>
+                        <a:ea typeface="Arial" charset="0"/>
+                        <a:cs typeface="Arial" charset="0"/>
+                      </a:endParaRPr>
+                    </a:p>
+                  </a:txBody>
+                  <a:tcPr marL="91440" marR="91440" marT="45720" marB="45720" anchor="t">
+                    <a:lnL w="6350" cap="flat" cmpd="sng" algn="ctr">
+                      <a:solidFill>
+                        <a:srgbClr val="D8DCEA"/>
+                      </a:solidFill>
+                      <a:prstDash val="solid"/>
+                      <a:round/>
+                      <a:headEnd type="none" w="med" len="med"/>
+                      <a:tailEnd type="none" w="med" len="med"/>
+                    </a:lnL>
+                    <a:lnR w="6350" cap="flat" cmpd="sng" algn="ctr">
+                      <a:solidFill>
+                        <a:srgbClr val="D8DCEA"/>
+                      </a:solidFill>
+                      <a:prstDash val="solid"/>
+                      <a:round/>
+                      <a:headEnd type="none" w="med" len="med"/>
+                      <a:tailEnd type="none" w="med" len="med"/>
+                    </a:lnR>
+                    <a:lnT w="6350" cap="flat" cmpd="sng" algn="ctr">
+                      <a:solidFill>
+                        <a:srgbClr val="D8DCEA"/>
+                      </a:solidFill>
+                      <a:prstDash val="solid"/>
+                      <a:round/>
+                      <a:headEnd type="none" w="med" len="med"/>
+                      <a:tailEnd type="none" w="med" len="med"/>
+                    </a:lnT>
+                    <a:lnB w="6350" cap="flat" cmpd="sng" algn="ctr">
+                      <a:solidFill>
+                        <a:srgbClr val="D8DCEA"/>
+                      </a:solidFill>
+                      <a:prstDash val="solid"/>
+                      <a:round/>
+                      <a:headEnd type="none" w="med" len="med"/>
+                      <a:tailEnd type="none" w="med" len="med"/>
+                    </a:lnB>
+                    <a:solidFill>
+                      <a:srgbClr val="FFFFFF"/>
+                    </a:solidFill>
+                  </a:tcPr>
+                </a:tc>
+                <a:tc>
+                  <a:txBody>
+                    <a:bodyPr/>
+                    <a:lstStyle/>
+                    <a:p>
+                      <a:pPr indent="0" marL="0">
+                        <a:buNone/>
+                      </a:pPr>
+                      <a:r>
+                        <a:rPr lang="en-US" sz="1100" dirty="0">
+                          <a:solidFill>
+                            <a:srgbClr val="011676"/>
+                          </a:solidFill>
+                          <a:latin typeface="Arial" pitchFamily="34" charset="0"/>
+                          <a:ea typeface="Arial" pitchFamily="34" charset="-122"/>
+                          <a:cs typeface="Arial" pitchFamily="34" charset="-120"/>
+                        </a:rPr>
+                        <a:t>não</a:t>
+                      </a:r>
+                      <a:endParaRPr lang="en-US" sz="1100" dirty="0">
+                        <a:latin typeface="Arial" charset="0"/>
+                        <a:ea typeface="Arial" charset="0"/>
+                        <a:cs typeface="Arial" charset="0"/>
+                      </a:endParaRPr>
+                    </a:p>
+                  </a:txBody>
+                  <a:tcPr marL="91440" marR="91440" marT="45720" marB="45720" anchor="t">
+                    <a:lnL w="6350" cap="flat" cmpd="sng" algn="ctr">
+                      <a:solidFill>
+                        <a:srgbClr val="D8DCEA"/>
+                      </a:solidFill>
+                      <a:prstDash val="solid"/>
+                      <a:round/>
+                      <a:headEnd type="none" w="med" len="med"/>
+                      <a:tailEnd type="none" w="med" len="med"/>
+                    </a:lnL>
+                    <a:lnR w="6350" cap="flat" cmpd="sng" algn="ctr">
+                      <a:solidFill>
+                        <a:srgbClr val="D8DCEA"/>
+                      </a:solidFill>
+                      <a:prstDash val="solid"/>
+                      <a:round/>
+                      <a:headEnd type="none" w="med" len="med"/>
+                      <a:tailEnd type="none" w="med" len="med"/>
+                    </a:lnR>
+                    <a:lnT w="6350" cap="flat" cmpd="sng" algn="ctr">
+                      <a:solidFill>
+                        <a:srgbClr val="D8DCEA"/>
+                      </a:solidFill>
+                      <a:prstDash val="solid"/>
+                      <a:round/>
+                      <a:headEnd type="none" w="med" len="med"/>
+                      <a:tailEnd type="none" w="med" len="med"/>
+                    </a:lnT>
+                    <a:lnB w="6350" cap="flat" cmpd="sng" algn="ctr">
+                      <a:solidFill>
+                        <a:srgbClr val="D8DCEA"/>
+                      </a:solidFill>
+                      <a:prstDash val="solid"/>
+                      <a:round/>
+                      <a:headEnd type="none" w="med" len="med"/>
+                      <a:tailEnd type="none" w="med" len="med"/>
+                    </a:lnB>
+                    <a:solidFill>
+                      <a:srgbClr val="FFFFFF"/>
+                    </a:solidFill>
+                  </a:tcPr>
+                </a:tc>
+                <a:tc>
+                  <a:txBody>
+                    <a:bodyPr/>
+                    <a:lstStyle/>
+                    <a:p>
+                      <a:pPr indent="0" marL="0">
+                        <a:buNone/>
+                      </a:pPr>
+                      <a:r>
+                        <a:rPr lang="en-US" sz="1100" dirty="0">
+                          <a:solidFill>
+                            <a:srgbClr val="011676"/>
+                          </a:solidFill>
+                          <a:latin typeface="Arial" pitchFamily="34" charset="0"/>
+                          <a:ea typeface="Arial" pitchFamily="34" charset="-122"/>
+                          <a:cs typeface="Arial" pitchFamily="34" charset="-120"/>
+                        </a:rPr>
+                        <a:t>sim</a:t>
+                      </a:r>
+                      <a:endParaRPr lang="en-US" sz="1100" dirty="0">
+                        <a:latin typeface="Arial" charset="0"/>
+                        <a:ea typeface="Arial" charset="0"/>
+                        <a:cs typeface="Arial" charset="0"/>
+                      </a:endParaRPr>
+                    </a:p>
+                  </a:txBody>
+                  <a:tcPr marL="91440" marR="91440" marT="45720" marB="45720" anchor="t">
+                    <a:lnL w="6350" cap="flat" cmpd="sng" algn="ctr">
+                      <a:solidFill>
+                        <a:srgbClr val="D8DCEA"/>
+                      </a:solidFill>
+                      <a:prstDash val="solid"/>
+                      <a:round/>
+                      <a:headEnd type="none" w="med" len="med"/>
+                      <a:tailEnd type="none" w="med" len="med"/>
+                    </a:lnL>
+                    <a:lnR w="6350" cap="flat" cmpd="sng" algn="ctr">
+                      <a:solidFill>
+                        <a:srgbClr val="D8DCEA"/>
+                      </a:solidFill>
+                      <a:prstDash val="solid"/>
+                      <a:round/>
+                      <a:headEnd type="none" w="med" len="med"/>
+                      <a:tailEnd type="none" w="med" len="med"/>
+                    </a:lnR>
+                    <a:lnT w="6350" cap="flat" cmpd="sng" algn="ctr">
+                      <a:solidFill>
+                        <a:srgbClr val="D8DCEA"/>
+                      </a:solidFill>
+                      <a:prstDash val="solid"/>
+                      <a:round/>
+                      <a:headEnd type="none" w="med" len="med"/>
+                      <a:tailEnd type="none" w="med" len="med"/>
+                    </a:lnT>
+                    <a:lnB w="6350" cap="flat" cmpd="sng" algn="ctr">
+                      <a:solidFill>
+                        <a:srgbClr val="D8DCEA"/>
+                      </a:solidFill>
+                      <a:prstDash val="solid"/>
+                      <a:round/>
+                      <a:headEnd type="none" w="med" len="med"/>
+                      <a:tailEnd type="none" w="med" len="med"/>
+                    </a:lnB>
+                    <a:solidFill>
+                      <a:srgbClr val="FFFFFF"/>
+                    </a:solidFill>
+                  </a:tcPr>
+                </a:tc>
+              </a:tr>
+              <a:tr h="0">
+                <a:tc>
+                  <a:txBody>
+                    <a:bodyPr/>
+                    <a:lstStyle/>
+                    <a:p>
+                      <a:pPr indent="0" marL="0">
+                        <a:buNone/>
+                      </a:pPr>
+                      <a:r>
+                        <a:rPr lang="en-US" sz="1100" dirty="0">
+                          <a:solidFill>
+                            <a:srgbClr val="011676"/>
+                          </a:solidFill>
+                          <a:latin typeface="Arial" pitchFamily="34" charset="0"/>
+                          <a:ea typeface="Arial" pitchFamily="34" charset="-122"/>
+                          <a:cs typeface="Arial" pitchFamily="34" charset="-120"/>
+                        </a:rPr>
+                        <a:t>Deixa rastro no log?</a:t>
+                      </a:r>
+                      <a:endParaRPr lang="en-US" sz="1100" dirty="0">
+                        <a:latin typeface="Arial" charset="0"/>
+                        <a:ea typeface="Arial" charset="0"/>
+                        <a:cs typeface="Arial" charset="0"/>
+                      </a:endParaRPr>
+                    </a:p>
+                  </a:txBody>
+                  <a:tcPr marL="91440" marR="91440" marT="45720" marB="45720" anchor="t">
+                    <a:lnL w="6350" cap="flat" cmpd="sng" algn="ctr">
+                      <a:solidFill>
+                        <a:srgbClr val="D8DCEA"/>
+                      </a:solidFill>
+                      <a:prstDash val="solid"/>
+                      <a:round/>
+                      <a:headEnd type="none" w="med" len="med"/>
+                      <a:tailEnd type="none" w="med" len="med"/>
+                    </a:lnL>
+                    <a:lnR w="6350" cap="flat" cmpd="sng" algn="ctr">
+                      <a:solidFill>
+                        <a:srgbClr val="D8DCEA"/>
+                      </a:solidFill>
+                      <a:prstDash val="solid"/>
+                      <a:round/>
+                      <a:headEnd type="none" w="med" len="med"/>
+                      <a:tailEnd type="none" w="med" len="med"/>
+                    </a:lnR>
+                    <a:lnT w="6350" cap="flat" cmpd="sng" algn="ctr">
+                      <a:solidFill>
+                        <a:srgbClr val="D8DCEA"/>
+                      </a:solidFill>
+                      <a:prstDash val="solid"/>
+                      <a:round/>
+                      <a:headEnd type="none" w="med" len="med"/>
+                      <a:tailEnd type="none" w="med" len="med"/>
+                    </a:lnT>
+                    <a:lnB w="6350" cap="flat" cmpd="sng" algn="ctr">
+                      <a:solidFill>
+                        <a:srgbClr val="D8DCEA"/>
+                      </a:solidFill>
+                      <a:prstDash val="solid"/>
+                      <a:round/>
+                      <a:headEnd type="none" w="med" len="med"/>
+                      <a:tailEnd type="none" w="med" len="med"/>
+                    </a:lnB>
+                    <a:solidFill>
+                      <a:srgbClr val="F4F5F6"/>
+                    </a:solidFill>
+                  </a:tcPr>
+                </a:tc>
+                <a:tc>
+                  <a:txBody>
+                    <a:bodyPr/>
+                    <a:lstStyle/>
+                    <a:p>
+                      <a:pPr indent="0" marL="0">
+                        <a:buNone/>
+                      </a:pPr>
+                      <a:r>
+                        <a:rPr lang="en-US" sz="1100" dirty="0">
+                          <a:solidFill>
+                            <a:srgbClr val="011676"/>
+                          </a:solidFill>
+                          <a:latin typeface="Arial" pitchFamily="34" charset="0"/>
+                          <a:ea typeface="Arial" pitchFamily="34" charset="-122"/>
+                          <a:cs typeface="Arial" pitchFamily="34" charset="-120"/>
+                        </a:rPr>
+                        <a:t>não</a:t>
+                      </a:r>
+                      <a:endParaRPr lang="en-US" sz="1100" dirty="0">
+                        <a:latin typeface="Arial" charset="0"/>
+                        <a:ea typeface="Arial" charset="0"/>
+                        <a:cs typeface="Arial" charset="0"/>
+                      </a:endParaRPr>
+                    </a:p>
+                  </a:txBody>
+                  <a:tcPr marL="91440" marR="91440" marT="45720" marB="45720" anchor="t">
+                    <a:lnL w="6350" cap="flat" cmpd="sng" algn="ctr">
+                      <a:solidFill>
+                        <a:srgbClr val="D8DCEA"/>
+                      </a:solidFill>
+                      <a:prstDash val="solid"/>
+                      <a:round/>
+                      <a:headEnd type="none" w="med" len="med"/>
+                      <a:tailEnd type="none" w="med" len="med"/>
+                    </a:lnL>
+                    <a:lnR w="6350" cap="flat" cmpd="sng" algn="ctr">
+                      <a:solidFill>
+                        <a:srgbClr val="D8DCEA"/>
+                      </a:solidFill>
+                      <a:prstDash val="solid"/>
+                      <a:round/>
+                      <a:headEnd type="none" w="med" len="med"/>
+                      <a:tailEnd type="none" w="med" len="med"/>
+                    </a:lnR>
+                    <a:lnT w="6350" cap="flat" cmpd="sng" algn="ctr">
+                      <a:solidFill>
+                        <a:srgbClr val="D8DCEA"/>
+                      </a:solidFill>
+                      <a:prstDash val="solid"/>
+                      <a:round/>
+                      <a:headEnd type="none" w="med" len="med"/>
+                      <a:tailEnd type="none" w="med" len="med"/>
+                    </a:lnT>
+                    <a:lnB w="6350" cap="flat" cmpd="sng" algn="ctr">
+                      <a:solidFill>
+                        <a:srgbClr val="D8DCEA"/>
+                      </a:solidFill>
+                      <a:prstDash val="solid"/>
+                      <a:round/>
+                      <a:headEnd type="none" w="med" len="med"/>
+                      <a:tailEnd type="none" w="med" len="med"/>
+                    </a:lnB>
+                    <a:solidFill>
+                      <a:srgbClr val="F4F5F6"/>
+                    </a:solidFill>
+                  </a:tcPr>
+                </a:tc>
+                <a:tc>
+                  <a:txBody>
+                    <a:bodyPr/>
+                    <a:lstStyle/>
+                    <a:p>
+                      <a:pPr indent="0" marL="0">
+                        <a:buNone/>
+                      </a:pPr>
+                      <a:r>
+                        <a:rPr lang="en-US" sz="1100" dirty="0">
+                          <a:solidFill>
+                            <a:srgbClr val="011676"/>
+                          </a:solidFill>
+                          <a:latin typeface="Arial" pitchFamily="34" charset="0"/>
+                          <a:ea typeface="Arial" pitchFamily="34" charset="-122"/>
+                          <a:cs typeface="Arial" pitchFamily="34" charset="-120"/>
+                        </a:rPr>
+                        <a:t>sim</a:t>
+                      </a:r>
+                      <a:endParaRPr lang="en-US" sz="1100" dirty="0">
+                        <a:latin typeface="Arial" charset="0"/>
+                        <a:ea typeface="Arial" charset="0"/>
+                        <a:cs typeface="Arial" charset="0"/>
+                      </a:endParaRPr>
+                    </a:p>
+                  </a:txBody>
+                  <a:tcPr marL="91440" marR="91440" marT="45720" marB="45720" anchor="t">
+                    <a:lnL w="6350" cap="flat" cmpd="sng" algn="ctr">
+                      <a:solidFill>
+                        <a:srgbClr val="D8DCEA"/>
+                      </a:solidFill>
+                      <a:prstDash val="solid"/>
+                      <a:round/>
+                      <a:headEnd type="none" w="med" len="med"/>
+                      <a:tailEnd type="none" w="med" len="med"/>
+                    </a:lnL>
+                    <a:lnR w="6350" cap="flat" cmpd="sng" algn="ctr">
+                      <a:solidFill>
+                        <a:srgbClr val="D8DCEA"/>
+                      </a:solidFill>
+                      <a:prstDash val="solid"/>
+                      <a:round/>
+                      <a:headEnd type="none" w="med" len="med"/>
+                      <a:tailEnd type="none" w="med" len="med"/>
+                    </a:lnR>
+                    <a:lnT w="6350" cap="flat" cmpd="sng" algn="ctr">
+                      <a:solidFill>
+                        <a:srgbClr val="D8DCEA"/>
+                      </a:solidFill>
+                      <a:prstDash val="solid"/>
+                      <a:round/>
+                      <a:headEnd type="none" w="med" len="med"/>
+                      <a:tailEnd type="none" w="med" len="med"/>
+                    </a:lnT>
+                    <a:lnB w="6350" cap="flat" cmpd="sng" algn="ctr">
+                      <a:solidFill>
+                        <a:srgbClr val="D8DCEA"/>
+                      </a:solidFill>
+                      <a:prstDash val="solid"/>
+                      <a:round/>
+                      <a:headEnd type="none" w="med" len="med"/>
+                      <a:tailEnd type="none" w="med" len="med"/>
+                    </a:lnB>
+                    <a:solidFill>
+                      <a:srgbClr val="F4F5F6"/>
+                    </a:solidFill>
+                  </a:tcPr>
+                </a:tc>
+              </a:tr>
+              <a:tr h="0">
+                <a:tc>
+                  <a:txBody>
+                    <a:bodyPr/>
+                    <a:lstStyle/>
+                    <a:p>
+                      <a:pPr indent="0" marL="0">
+                        <a:buNone/>
+                      </a:pPr>
+                      <a:r>
+                        <a:rPr lang="en-US" sz="1100" dirty="0">
+                          <a:solidFill>
+                            <a:srgbClr val="011676"/>
+                          </a:solidFill>
+                          <a:latin typeface="Arial" pitchFamily="34" charset="0"/>
+                          <a:ea typeface="Arial" pitchFamily="34" charset="-122"/>
+                          <a:cs typeface="Arial" pitchFamily="34" charset="-120"/>
+                        </a:rPr>
+                        <a:t>Sabe o que fazer em seguida?</a:t>
+                      </a:r>
+                      <a:endParaRPr lang="en-US" sz="1100" dirty="0">
+                        <a:latin typeface="Arial" charset="0"/>
+                        <a:ea typeface="Arial" charset="0"/>
+                        <a:cs typeface="Arial" charset="0"/>
+                      </a:endParaRPr>
+                    </a:p>
+                  </a:txBody>
+                  <a:tcPr marL="91440" marR="91440" marT="45720" marB="45720" anchor="t">
+                    <a:lnL w="6350" cap="flat" cmpd="sng" algn="ctr">
+                      <a:solidFill>
+                        <a:srgbClr val="D8DCEA"/>
+                      </a:solidFill>
+                      <a:prstDash val="solid"/>
+                      <a:round/>
+                      <a:headEnd type="none" w="med" len="med"/>
+                      <a:tailEnd type="none" w="med" len="med"/>
+                    </a:lnL>
+                    <a:lnR w="6350" cap="flat" cmpd="sng" algn="ctr">
+                      <a:solidFill>
+                        <a:srgbClr val="D8DCEA"/>
+                      </a:solidFill>
+                      <a:prstDash val="solid"/>
+                      <a:round/>
+                      <a:headEnd type="none" w="med" len="med"/>
+                      <a:tailEnd type="none" w="med" len="med"/>
+                    </a:lnR>
+                    <a:lnT w="6350" cap="flat" cmpd="sng" algn="ctr">
+                      <a:solidFill>
+                        <a:srgbClr val="D8DCEA"/>
+                      </a:solidFill>
+                      <a:prstDash val="solid"/>
+                      <a:round/>
+                      <a:headEnd type="none" w="med" len="med"/>
+                      <a:tailEnd type="none" w="med" len="med"/>
+                    </a:lnT>
+                    <a:lnB w="6350" cap="flat" cmpd="sng" algn="ctr">
+                      <a:solidFill>
+                        <a:srgbClr val="D8DCEA"/>
+                      </a:solidFill>
+                      <a:prstDash val="solid"/>
+                      <a:round/>
+                      <a:headEnd type="none" w="med" len="med"/>
+                      <a:tailEnd type="none" w="med" len="med"/>
+                    </a:lnB>
+                    <a:solidFill>
+                      <a:srgbClr val="FFFFFF"/>
+                    </a:solidFill>
+                  </a:tcPr>
+                </a:tc>
+                <a:tc>
+                  <a:txBody>
+                    <a:bodyPr/>
+                    <a:lstStyle/>
+                    <a:p>
+                      <a:pPr indent="0" marL="0">
+                        <a:buNone/>
+                      </a:pPr>
+                      <a:r>
+                        <a:rPr lang="en-US" sz="1100" dirty="0">
+                          <a:solidFill>
+                            <a:srgbClr val="011676"/>
+                          </a:solidFill>
+                          <a:latin typeface="Arial" pitchFamily="34" charset="0"/>
+                          <a:ea typeface="Arial" pitchFamily="34" charset="-122"/>
+                          <a:cs typeface="Arial" pitchFamily="34" charset="-120"/>
+                        </a:rPr>
+                        <a:t>não</a:t>
+                      </a:r>
+                      <a:endParaRPr lang="en-US" sz="1100" dirty="0">
+                        <a:latin typeface="Arial" charset="0"/>
+                        <a:ea typeface="Arial" charset="0"/>
+                        <a:cs typeface="Arial" charset="0"/>
+                      </a:endParaRPr>
+                    </a:p>
+                  </a:txBody>
+                  <a:tcPr marL="91440" marR="91440" marT="45720" marB="45720" anchor="t">
+                    <a:lnL w="6350" cap="flat" cmpd="sng" algn="ctr">
+                      <a:solidFill>
+                        <a:srgbClr val="D8DCEA"/>
+                      </a:solidFill>
+                      <a:prstDash val="solid"/>
+                      <a:round/>
+                      <a:headEnd type="none" w="med" len="med"/>
+                      <a:tailEnd type="none" w="med" len="med"/>
+                    </a:lnL>
+                    <a:lnR w="6350" cap="flat" cmpd="sng" algn="ctr">
+                      <a:solidFill>
+                        <a:srgbClr val="D8DCEA"/>
+                      </a:solidFill>
+                      <a:prstDash val="solid"/>
+                      <a:round/>
+                      <a:headEnd type="none" w="med" len="med"/>
+                      <a:tailEnd type="none" w="med" len="med"/>
+                    </a:lnR>
+                    <a:lnT w="6350" cap="flat" cmpd="sng" algn="ctr">
+                      <a:solidFill>
+                        <a:srgbClr val="D8DCEA"/>
+                      </a:solidFill>
+                      <a:prstDash val="solid"/>
+                      <a:round/>
+                      <a:headEnd type="none" w="med" len="med"/>
+                      <a:tailEnd type="none" w="med" len="med"/>
+                    </a:lnT>
+                    <a:lnB w="6350" cap="flat" cmpd="sng" algn="ctr">
+                      <a:solidFill>
+                        <a:srgbClr val="D8DCEA"/>
+                      </a:solidFill>
+                      <a:prstDash val="solid"/>
+                      <a:round/>
+                      <a:headEnd type="none" w="med" len="med"/>
+                      <a:tailEnd type="none" w="med" len="med"/>
+                    </a:lnB>
+                    <a:solidFill>
+                      <a:srgbClr val="FFFFFF"/>
+                    </a:solidFill>
+                  </a:tcPr>
+                </a:tc>
+                <a:tc>
+                  <a:txBody>
+                    <a:bodyPr/>
+                    <a:lstStyle/>
+                    <a:p>
+                      <a:pPr indent="0" marL="0">
+                        <a:buNone/>
+                      </a:pPr>
+                      <a:r>
+                        <a:rPr lang="en-US" sz="1100" dirty="0">
+                          <a:solidFill>
+                            <a:srgbClr val="011676"/>
+                          </a:solidFill>
+                          <a:latin typeface="Arial" pitchFamily="34" charset="0"/>
+                          <a:ea typeface="Arial" pitchFamily="34" charset="-122"/>
+                          <a:cs typeface="Arial" pitchFamily="34" charset="-120"/>
+                        </a:rPr>
+                        <a:t>sim</a:t>
+                      </a:r>
+                      <a:endParaRPr lang="en-US" sz="1100" dirty="0">
+                        <a:latin typeface="Arial" charset="0"/>
+                        <a:ea typeface="Arial" charset="0"/>
+                        <a:cs typeface="Arial" charset="0"/>
+                      </a:endParaRPr>
+                    </a:p>
+                  </a:txBody>
+                  <a:tcPr marL="91440" marR="91440" marT="45720" marB="45720" anchor="t">
+                    <a:lnL w="6350" cap="flat" cmpd="sng" algn="ctr">
+                      <a:solidFill>
+                        <a:srgbClr val="D8DCEA"/>
+                      </a:solidFill>
+                      <a:prstDash val="solid"/>
+                      <a:round/>
+                      <a:headEnd type="none" w="med" len="med"/>
+                      <a:tailEnd type="none" w="med" len="med"/>
+                    </a:lnL>
+                    <a:lnR w="6350" cap="flat" cmpd="sng" algn="ctr">
+                      <a:solidFill>
+                        <a:srgbClr val="D8DCEA"/>
+                      </a:solidFill>
+                      <a:prstDash val="solid"/>
+                      <a:round/>
+                      <a:headEnd type="none" w="med" len="med"/>
+                      <a:tailEnd type="none" w="med" len="med"/>
+                    </a:lnR>
+                    <a:lnT w="6350" cap="flat" cmpd="sng" algn="ctr">
+                      <a:solidFill>
+                        <a:srgbClr val="D8DCEA"/>
+                      </a:solidFill>
+                      <a:prstDash val="solid"/>
+                      <a:round/>
+                      <a:headEnd type="none" w="med" len="med"/>
+                      <a:tailEnd type="none" w="med" len="med"/>
+                    </a:lnT>
+                    <a:lnB w="6350" cap="flat" cmpd="sng" algn="ctr">
+                      <a:solidFill>
+                        <a:srgbClr val="D8DCEA"/>
+                      </a:solidFill>
+                      <a:prstDash val="solid"/>
+                      <a:round/>
+                      <a:headEnd type="none" w="med" len="med"/>
+                      <a:tailEnd type="none" w="med" len="med"/>
+                    </a:lnB>
+                    <a:solidFill>
+                      <a:srgbClr val="FFFFFF"/>
+                    </a:solidFill>
+                  </a:tcPr>
+                </a:tc>
+              </a:tr>
+              <a:tr h="0">
+                <a:tc>
+                  <a:txBody>
+                    <a:bodyPr/>
+                    <a:lstStyle/>
+                    <a:p>
+                      <a:pPr indent="0" marL="0">
+                        <a:buNone/>
+                      </a:pPr>
+                      <a:r>
+                        <a:rPr lang="en-US" sz="1100" dirty="0">
+                          <a:solidFill>
+                            <a:srgbClr val="011676"/>
+                          </a:solidFill>
+                          <a:latin typeface="Arial" pitchFamily="34" charset="0"/>
+                          <a:ea typeface="Arial" pitchFamily="34" charset="-122"/>
+                          <a:cs typeface="Arial" pitchFamily="34" charset="-120"/>
+                        </a:rPr>
+                        <a:t>É mensurável?</a:t>
+                      </a:r>
+                      <a:endParaRPr lang="en-US" sz="1100" dirty="0">
+                        <a:latin typeface="Arial" charset="0"/>
+                        <a:ea typeface="Arial" charset="0"/>
+                        <a:cs typeface="Arial" charset="0"/>
+                      </a:endParaRPr>
+                    </a:p>
+                  </a:txBody>
+                  <a:tcPr marL="91440" marR="91440" marT="45720" marB="45720" anchor="t">
+                    <a:lnL w="6350" cap="flat" cmpd="sng" algn="ctr">
+                      <a:solidFill>
+                        <a:srgbClr val="D8DCEA"/>
+                      </a:solidFill>
+                      <a:prstDash val="solid"/>
+                      <a:round/>
+                      <a:headEnd type="none" w="med" len="med"/>
+                      <a:tailEnd type="none" w="med" len="med"/>
+                    </a:lnL>
+                    <a:lnR w="6350" cap="flat" cmpd="sng" algn="ctr">
+                      <a:solidFill>
+                        <a:srgbClr val="D8DCEA"/>
+                      </a:solidFill>
+                      <a:prstDash val="solid"/>
+                      <a:round/>
+                      <a:headEnd type="none" w="med" len="med"/>
+                      <a:tailEnd type="none" w="med" len="med"/>
+                    </a:lnR>
+                    <a:lnT w="6350" cap="flat" cmpd="sng" algn="ctr">
+                      <a:solidFill>
+                        <a:srgbClr val="D8DCEA"/>
+                      </a:solidFill>
+                      <a:prstDash val="solid"/>
+                      <a:round/>
+                      <a:headEnd type="none" w="med" len="med"/>
+                      <a:tailEnd type="none" w="med" len="med"/>
+                    </a:lnT>
+                    <a:lnB w="6350" cap="flat" cmpd="sng" algn="ctr">
+                      <a:solidFill>
+                        <a:srgbClr val="D8DCEA"/>
+                      </a:solidFill>
+                      <a:prstDash val="solid"/>
+                      <a:round/>
+                      <a:headEnd type="none" w="med" len="med"/>
+                      <a:tailEnd type="none" w="med" len="med"/>
+                    </a:lnB>
+                    <a:solidFill>
+                      <a:srgbClr val="F4F5F6"/>
+                    </a:solidFill>
+                  </a:tcPr>
+                </a:tc>
+                <a:tc>
+                  <a:txBody>
+                    <a:bodyPr/>
+                    <a:lstStyle/>
+                    <a:p>
+                      <a:pPr indent="0" marL="0">
+                        <a:buNone/>
+                      </a:pPr>
+                      <a:r>
+                        <a:rPr lang="en-US" sz="1100" dirty="0">
+                          <a:solidFill>
+                            <a:srgbClr val="011676"/>
+                          </a:solidFill>
+                          <a:latin typeface="Arial" pitchFamily="34" charset="0"/>
+                          <a:ea typeface="Arial" pitchFamily="34" charset="-122"/>
+                          <a:cs typeface="Arial" pitchFamily="34" charset="-120"/>
+                        </a:rPr>
+                        <a:t>impossível</a:t>
+                      </a:r>
+                      <a:endParaRPr lang="en-US" sz="1100" dirty="0">
+                        <a:latin typeface="Arial" charset="0"/>
+                        <a:ea typeface="Arial" charset="0"/>
+                        <a:cs typeface="Arial" charset="0"/>
+                      </a:endParaRPr>
+                    </a:p>
+                  </a:txBody>
+                  <a:tcPr marL="91440" marR="91440" marT="45720" marB="45720" anchor="t">
+                    <a:lnL w="6350" cap="flat" cmpd="sng" algn="ctr">
+                      <a:solidFill>
+                        <a:srgbClr val="D8DCEA"/>
+                      </a:solidFill>
+                      <a:prstDash val="solid"/>
+                      <a:round/>
+                      <a:headEnd type="none" w="med" len="med"/>
+                      <a:tailEnd type="none" w="med" len="med"/>
+                    </a:lnL>
+                    <a:lnR w="6350" cap="flat" cmpd="sng" algn="ctr">
+                      <a:solidFill>
+                        <a:srgbClr val="D8DCEA"/>
+                      </a:solidFill>
+                      <a:prstDash val="solid"/>
+                      <a:round/>
+                      <a:headEnd type="none" w="med" len="med"/>
+                      <a:tailEnd type="none" w="med" len="med"/>
+                    </a:lnR>
+                    <a:lnT w="6350" cap="flat" cmpd="sng" algn="ctr">
+                      <a:solidFill>
+                        <a:srgbClr val="D8DCEA"/>
+                      </a:solidFill>
+                      <a:prstDash val="solid"/>
+                      <a:round/>
+                      <a:headEnd type="none" w="med" len="med"/>
+                      <a:tailEnd type="none" w="med" len="med"/>
+                    </a:lnT>
+                    <a:lnB w="6350" cap="flat" cmpd="sng" algn="ctr">
+                      <a:solidFill>
+                        <a:srgbClr val="D8DCEA"/>
+                      </a:solidFill>
+                      <a:prstDash val="solid"/>
+                      <a:round/>
+                      <a:headEnd type="none" w="med" len="med"/>
+                      <a:tailEnd type="none" w="med" len="med"/>
+                    </a:lnB>
+                    <a:solidFill>
+                      <a:srgbClr val="F4F5F6"/>
+                    </a:solidFill>
+                  </a:tcPr>
+                </a:tc>
+                <a:tc>
+                  <a:txBody>
+                    <a:bodyPr/>
+                    <a:lstStyle/>
+                    <a:p>
+                      <a:pPr indent="0" marL="0">
+                        <a:buNone/>
+                      </a:pPr>
+                      <a:r>
+                        <a:rPr lang="en-US" sz="1100" dirty="0">
+                          <a:solidFill>
+                            <a:srgbClr val="011676"/>
+                          </a:solidFill>
+                          <a:latin typeface="Arial" pitchFamily="34" charset="0"/>
+                          <a:ea typeface="Arial" pitchFamily="34" charset="-122"/>
+                          <a:cs typeface="Arial" pitchFamily="34" charset="-120"/>
+                        </a:rPr>
+                        <a:t>contável</a:t>
+                      </a:r>
+                      <a:endParaRPr lang="en-US" sz="1100" dirty="0">
+                        <a:latin typeface="Arial" charset="0"/>
+                        <a:ea typeface="Arial" charset="0"/>
+                        <a:cs typeface="Arial" charset="0"/>
+                      </a:endParaRPr>
+                    </a:p>
+                  </a:txBody>
+                  <a:tcPr marL="91440" marR="91440" marT="45720" marB="45720" anchor="t">
+                    <a:lnL w="6350" cap="flat" cmpd="sng" algn="ctr">
+                      <a:solidFill>
+                        <a:srgbClr val="D8DCEA"/>
+                      </a:solidFill>
+                      <a:prstDash val="solid"/>
+                      <a:round/>
+                      <a:headEnd type="none" w="med" len="med"/>
+                      <a:tailEnd type="none" w="med" len="med"/>
+                    </a:lnL>
+                    <a:lnR w="6350" cap="flat" cmpd="sng" algn="ctr">
+                      <a:solidFill>
+                        <a:srgbClr val="D8DCEA"/>
+                      </a:solidFill>
+                      <a:prstDash val="solid"/>
+                      <a:round/>
+                      <a:headEnd type="none" w="med" len="med"/>
+                      <a:tailEnd type="none" w="med" len="med"/>
+                    </a:lnR>
+                    <a:lnT w="6350" cap="flat" cmpd="sng" algn="ctr">
+                      <a:solidFill>
+                        <a:srgbClr val="D8DCEA"/>
+                      </a:solidFill>
+                      <a:prstDash val="solid"/>
+                      <a:round/>
+                      <a:headEnd type="none" w="med" len="med"/>
+                      <a:tailEnd type="none" w="med" len="med"/>
+                    </a:lnT>
+                    <a:lnB w="6350" cap="flat" cmpd="sng" algn="ctr">
+                      <a:solidFill>
+                        <a:srgbClr val="D8DCEA"/>
+                      </a:solidFill>
+                      <a:prstDash val="solid"/>
+                      <a:round/>
+                      <a:headEnd type="none" w="med" len="med"/>
+                      <a:tailEnd type="none" w="med" len="med"/>
+                    </a:lnB>
+                    <a:solidFill>
+                      <a:srgbClr val="F4F5F6"/>
+                    </a:solidFill>
+                  </a:tcPr>
+                </a:tc>
+              </a:tr>
+            </a:tbl>
+          </a:graphicData>
+        </a:graphic>
+      </p:graphicFrame>
+      <p:sp>
+        <p:nvSpPr>
+          <p:cNvPr id="5" name="Text 2"/>
           <p:cNvSpPr/>
           <p:nvPr/>
         </p:nvSpPr>
@@ -4139,7 +5882,7 @@
                 <a:ea typeface="Arial" pitchFamily="34" charset="-122"/>
                 <a:cs typeface="Arial" pitchFamily="34" charset="-120"/>
               </a:rPr>
-              <a:t>VÍDEO 4.4</a:t>
+              <a:t>VÍDEO 4.3</a:t>
             </a:r>
             <a:endParaRPr lang="en-US" sz="1100" dirty="0"/>
           </a:p>
@@ -4178,7 +5921,7 @@
                 <a:ea typeface="Arial" pitchFamily="34" charset="-122"/>
                 <a:cs typeface="Arial" pitchFamily="34" charset="-120"/>
               </a:rPr>
-              <a:t>O que fica como risco aceito</a:t>
+              <a:t>Admitir já é corrigir</a:t>
             </a:r>
             <a:endParaRPr lang="en-US" sz="2600" dirty="0"/>
           </a:p>
@@ -4239,7 +5982,7 @@
               <a:buChar char="•"/>
             </a:pPr>
             <a:r>
-              <a:rPr lang="en-US" sz="1500" dirty="0">
+              <a:rPr lang="en-US" sz="1500" b="1" dirty="0">
                 <a:solidFill>
                   <a:srgbClr val="011676"/>
                 </a:solidFill>
@@ -4247,7 +5990,7 @@
                 <a:ea typeface="Arial" pitchFamily="34" charset="-122"/>
                 <a:cs typeface="Arial" pitchFamily="34" charset="-120"/>
               </a:rPr>
-              <a:t>Truncamento por max_tokens — não corrigido de propósito, reprodução ao vivo é o próprio conteúdo.</a:t>
+              <a:t>Toda resposta "não sei fazer isso" é mais honesta — e mais barata — que fingir que processou.</a:t>
             </a:r>
             <a:endParaRPr lang="en-US" sz="1500" dirty="0"/>
           </a:p>
@@ -4271,7 +6014,7 @@
                 <a:ea typeface="Arial" pitchFamily="34" charset="-122"/>
                 <a:cs typeface="Arial" pitchFamily="34" charset="-120"/>
               </a:rPr>
-              <a:t>Match aproximado de nome (episódio C) — não corrigir sem decidir; a saída provável é perguntar, não um algoritmo mais esperto.</a:t>
+              <a:t>E há um ganho operacional junto: o que era invisível virou dado.</a:t>
             </a:r>
             <a:endParaRPr lang="en-US" sz="1500" dirty="0"/>
           </a:p>
@@ -4287,7 +6030,7 @@
               <a:buChar char="•"/>
             </a:pPr>
             <a:r>
-              <a:rPr lang="en-US" sz="1500" b="1" dirty="0">
+              <a:rPr lang="en-US" sz="1500" dirty="0">
                 <a:solidFill>
                   <a:srgbClr val="011676"/>
                 </a:solidFill>
@@ -4295,7 +6038,31 @@
                 <a:ea typeface="Arial" pitchFamily="34" charset="-122"/>
                 <a:cs typeface="Arial" pitchFamily="34" charset="-120"/>
               </a:rPr>
-              <a:t>Risco aceito e documentado, não escondido — é o gancho direto pro checklist da Aula 5.</a:t>
+              <a:t>Antes eu não tinha como saber quantas pessoas tentaram mandar foto. Agora tenho.</a:t>
+            </a:r>
+            <a:endParaRPr lang="en-US" sz="1500" dirty="0"/>
+          </a:p>
+          <a:p>
+            <a:pPr marL="342900" indent="-342900">
+              <a:lnSpc>
+                <a:spcPct val="115000"/>
+              </a:lnSpc>
+              <a:spcAft>
+                <a:spcPts val="1000"/>
+              </a:spcAft>
+              <a:buSzPct val="100000"/>
+              <a:buChar char="•"/>
+            </a:pPr>
+            <a:r>
+              <a:rPr lang="en-US" sz="1500" dirty="0">
+                <a:solidFill>
+                  <a:srgbClr val="011676"/>
+                </a:solidFill>
+                <a:latin typeface="Arial" pitchFamily="34" charset="0"/>
+                <a:ea typeface="Arial" pitchFamily="34" charset="-122"/>
+                <a:cs typeface="Arial" pitchFamily="34" charset="-120"/>
+              </a:rPr>
+              <a:t>É assim que se decide se vale construir a capacidade.</a:t>
             </a:r>
             <a:endParaRPr lang="en-US" sz="1500" dirty="0"/>
           </a:p>
@@ -4409,7 +6176,7 @@
                 <a:ea typeface="Consolas" pitchFamily="34" charset="-122"/>
                 <a:cs typeface="Consolas" pitchFamily="34" charset="-120"/>
               </a:rPr>
-              <a:t>4.5</a:t>
+              <a:t>4.4</a:t>
             </a:r>
             <a:endParaRPr lang="en-US" sz="2000" dirty="0"/>
           </a:p>
@@ -4448,7 +6215,7 @@
                 <a:ea typeface="Arial" pitchFamily="34" charset="-122"/>
                 <a:cs typeface="Arial" pitchFamily="34" charset="-120"/>
               </a:rPr>
-              <a:t>O que aprendemos?</a:t>
+              <a:t>Simulando o ciclo completo</a:t>
             </a:r>
             <a:endParaRPr lang="en-US" sz="3400" dirty="0"/>
           </a:p>
@@ -4560,7 +6327,7 @@
                 <a:ea typeface="Arial" pitchFamily="34" charset="-122"/>
                 <a:cs typeface="Arial" pitchFamily="34" charset="-120"/>
               </a:rPr>
-              <a:t>FECHAMENTO DA AULA</a:t>
+              <a:t>VÍDEO 4.4</a:t>
             </a:r>
             <a:endParaRPr lang="en-US" sz="1100" dirty="0"/>
           </a:p>
@@ -4599,7 +6366,7 @@
                 <a:ea typeface="Arial" pitchFamily="34" charset="-122"/>
                 <a:cs typeface="Arial" pitchFamily="34" charset="-120"/>
               </a:rPr>
-              <a:t>O que aprendemos</a:t>
+              <a:t>O desenho que o teste derrubou</a:t>
             </a:r>
             <a:endParaRPr lang="en-US" sz="2600" dirty="0"/>
           </a:p>
@@ -4668,7 +6435,7 @@
                 <a:ea typeface="Arial" pitchFamily="34" charset="-122"/>
                 <a:cs typeface="Arial" pitchFamily="34" charset="-120"/>
               </a:rPr>
-              <a:t>Nem toda falha grita — os quatro episódios reais foram encontrados olhando dado, não esperando alarme.</a:t>
+              <a:t>Plano original: o modelo de visão lê os 44 dígitos da chave impressos no cupom. Óbvio, direto.</a:t>
             </a:r>
             <a:endParaRPr lang="en-US" sz="1500" dirty="0"/>
           </a:p>
@@ -4692,7 +6459,7 @@
                 <a:ea typeface="Arial" pitchFamily="34" charset="-122"/>
                 <a:cs typeface="Arial" pitchFamily="34" charset="-120"/>
               </a:rPr>
-              <a:t>Admitir a limitação já é uma correção.</a:t>
+              <a:t>A SEFAZ exige um código de segurança que só existe dentro do QR code — não está impresso em lugar nenhum.</a:t>
             </a:r>
             <a:endParaRPr lang="en-US" sz="1500" dirty="0"/>
           </a:p>
@@ -4716,7 +6483,7 @@
                 <a:ea typeface="Arial" pitchFamily="34" charset="-122"/>
                 <a:cs typeface="Arial" pitchFamily="34" charset="-120"/>
               </a:rPr>
-              <a:t>Falha de canal (A, B) e falha de estado (C) exigem diagnóstico diferente — mas a mesma disciplina de observar.</a:t>
+              <a:t>Nenhum modelo de visão do mundo lê o que não está escrito.</a:t>
             </a:r>
             <a:endParaRPr lang="en-US" sz="1500" dirty="0"/>
           </a:p>
@@ -4740,7 +6507,7 @@
                 <a:ea typeface="Arial" pitchFamily="34" charset="-122"/>
                 <a:cs typeface="Arial" pitchFamily="34" charset="-120"/>
               </a:rPr>
-              <a:t>Corrigir antes do usuário perceber é possível quando o dado de produção está visível.</a:t>
+              <a:t>Solução real: ler o QR, e usar visão só como degrau de recuo. Menos elegante, e funciona.</a:t>
             </a:r>
             <a:endParaRPr lang="en-US" sz="1500" dirty="0"/>
           </a:p>
@@ -4801,7 +6568,7 @@
     <p:bg>
       <p:bgPr>
         <a:solidFill>
-          <a:srgbClr val="0C0C0E"/>
+          <a:srgbClr val="F4F5F6"/>
         </a:solidFill>
       </p:bgPr>
     </p:bg>
@@ -4827,8 +6594,8 @@
         </p:nvSpPr>
         <p:spPr>
           <a:xfrm>
-            <a:off x="502920" y="2011680"/>
-            <a:ext cx="8138160" cy="457200"/>
+            <a:off x="502920" y="365760"/>
+            <a:ext cx="8138160" cy="320040"/>
           </a:xfrm>
           <a:prstGeom prst="rect">
             <a:avLst/>
@@ -4844,17 +6611,17 @@
               <a:buNone/>
             </a:pPr>
             <a:r>
-              <a:rPr lang="en-US" sz="1400" b="1" spc="150" kern="0" dirty="0">
-                <a:solidFill>
-                  <a:srgbClr val="1F53E5"/>
-                </a:solidFill>
-                <a:latin typeface="Arial" pitchFamily="34" charset="0"/>
-                <a:ea typeface="Arial" pitchFamily="34" charset="-122"/>
-                <a:cs typeface="Arial" pitchFamily="34" charset="-120"/>
-              </a:rPr>
-              <a:t>AULA 4 CONCLUÍDA</a:t>
-            </a:r>
-            <a:endParaRPr lang="en-US" sz="1400" dirty="0"/>
+              <a:rPr lang="en-US" sz="1100" b="1" spc="150" kern="0" dirty="0">
+                <a:solidFill>
+                  <a:srgbClr val="0429BC"/>
+                </a:solidFill>
+                <a:latin typeface="Arial" pitchFamily="34" charset="0"/>
+                <a:ea typeface="Arial" pitchFamily="34" charset="-122"/>
+                <a:cs typeface="Arial" pitchFamily="34" charset="-120"/>
+              </a:rPr>
+              <a:t>VÍDEO 4.4</a:t>
+            </a:r>
+            <a:endParaRPr lang="en-US" sz="1100" dirty="0"/>
           </a:p>
         </p:txBody>
       </p:sp>
@@ -4866,8 +6633,8 @@
         </p:nvSpPr>
         <p:spPr>
           <a:xfrm>
-            <a:off x="502920" y="2377440"/>
-            <a:ext cx="8138160" cy="2194560"/>
+            <a:off x="502920" y="713232"/>
+            <a:ext cx="8138160" cy="640080"/>
           </a:xfrm>
           <a:prstGeom prst="rect">
             <a:avLst/>
@@ -4880,63 +6647,202 @@
           <a:lstStyle/>
           <a:p>
             <a:pPr indent="0" marL="0">
+              <a:buNone/>
+            </a:pPr>
+            <a:r>
+              <a:rPr lang="en-US" sz="2600" b="1" dirty="0">
+                <a:solidFill>
+                  <a:srgbClr val="010C53"/>
+                </a:solidFill>
+                <a:latin typeface="Arial" pitchFamily="34" charset="0"/>
+                <a:ea typeface="Arial" pitchFamily="34" charset="-122"/>
+                <a:cs typeface="Arial" pitchFamily="34" charset="-120"/>
+              </a:rPr>
+              <a:t>Toda capacidade nova traz erro novo</a:t>
+            </a:r>
+            <a:endParaRPr lang="en-US" sz="2600" dirty="0"/>
+          </a:p>
+        </p:txBody>
+      </p:sp>
+      <p:sp>
+        <p:nvSpPr>
+          <p:cNvPr id="4" name="Shape 2"/>
+          <p:cNvSpPr/>
+          <p:nvPr/>
+        </p:nvSpPr>
+        <p:spPr>
+          <a:xfrm>
+            <a:off x="502920" y="1371600"/>
+            <a:ext cx="8138160" cy="0"/>
+          </a:xfrm>
+          <a:prstGeom prst="line">
+            <a:avLst/>
+          </a:prstGeom>
+          <a:noFill/>
+          <a:ln w="19050">
+            <a:solidFill>
+              <a:srgbClr val="010C53"/>
+            </a:solidFill>
+            <a:prstDash val="solid"/>
+          </a:ln>
+        </p:spPr>
+      </p:sp>
+      <p:sp>
+        <p:nvSpPr>
+          <p:cNvPr id="5" name="Text 3"/>
+          <p:cNvSpPr/>
+          <p:nvPr/>
+        </p:nvSpPr>
+        <p:spPr>
+          <a:xfrm>
+            <a:off x="502920" y="1600200"/>
+            <a:ext cx="8138160" cy="3044952"/>
+          </a:xfrm>
+          <a:prstGeom prst="rect">
+            <a:avLst/>
+          </a:prstGeom>
+          <a:noFill/>
+          <a:ln/>
+        </p:spPr>
+        <p:txBody>
+          <a:bodyPr wrap="square" rtlCol="0" anchor="t"/>
+          <a:lstStyle/>
+          <a:p>
+            <a:pPr marL="342900" indent="-342900">
               <a:lnSpc>
-                <a:spcPct val="120000"/>
+                <a:spcPct val="115000"/>
               </a:lnSpc>
+              <a:spcAft>
+                <a:spcPts val="1000"/>
+              </a:spcAft>
+              <a:buSzPct val="100000"/>
+              <a:buChar char="•"/>
+            </a:pPr>
+            <a:r>
+              <a:rPr lang="en-US" sz="1500" dirty="0">
+                <a:solidFill>
+                  <a:srgbClr val="011676"/>
+                </a:solidFill>
+                <a:latin typeface="Arial" pitchFamily="34" charset="0"/>
+                <a:ea typeface="Arial" pitchFamily="34" charset="-122"/>
+                <a:cs typeface="Arial" pitchFamily="34" charset="-120"/>
+              </a:rPr>
+              <a:t>Com leitura por foto, a taxa de erro sobe: cupom amassado, foto tremida, luz ruim.</a:t>
+            </a:r>
+            <a:endParaRPr lang="en-US" sz="1500" dirty="0"/>
+          </a:p>
+          <a:p>
+            <a:pPr marL="342900" indent="-342900">
+              <a:lnSpc>
+                <a:spcPct val="115000"/>
+              </a:lnSpc>
+              <a:spcAft>
+                <a:spcPts val="1000"/>
+              </a:spcAft>
+              <a:buSzPct val="100000"/>
+              <a:buChar char="•"/>
+            </a:pPr>
+            <a:r>
+              <a:rPr lang="en-US" sz="1500" dirty="0">
+                <a:solidFill>
+                  <a:srgbClr val="011676"/>
+                </a:solidFill>
+                <a:latin typeface="Arial" pitchFamily="34" charset="0"/>
+                <a:ea typeface="Arial" pitchFamily="34" charset="-122"/>
+                <a:cs typeface="Arial" pitchFamily="34" charset="-120"/>
+              </a:rPr>
+              <a:t>Antes o produto não errava nisso — porque não fazia.</a:t>
+            </a:r>
+            <a:endParaRPr lang="en-US" sz="1500" dirty="0"/>
+          </a:p>
+          <a:p>
+            <a:pPr marL="342900" indent="-342900">
+              <a:lnSpc>
+                <a:spcPct val="115000"/>
+              </a:lnSpc>
+              <a:spcAft>
+                <a:spcPts val="1000"/>
+              </a:spcAft>
+              <a:buSzPct val="100000"/>
+              <a:buChar char="•"/>
+            </a:pPr>
+            <a:r>
+              <a:rPr lang="en-US" sz="1500" dirty="0">
+                <a:solidFill>
+                  <a:srgbClr val="011676"/>
+                </a:solidFill>
+                <a:latin typeface="Arial" pitchFamily="34" charset="0"/>
+                <a:ea typeface="Arial" pitchFamily="34" charset="-122"/>
+                <a:cs typeface="Arial" pitchFamily="34" charset="-120"/>
+              </a:rPr>
+              <a:t>A tela de revisão, adiada desde o começo, deixa de ser luxo e vira necessidade.</a:t>
+            </a:r>
+            <a:endParaRPr lang="en-US" sz="1500" dirty="0"/>
+          </a:p>
+          <a:p>
+            <a:pPr marL="342900" indent="-342900">
+              <a:lnSpc>
+                <a:spcPct val="115000"/>
+              </a:lnSpc>
+              <a:spcAft>
+                <a:spcPts val="1000"/>
+              </a:spcAft>
+              <a:buSzPct val="100000"/>
+              <a:buChar char="•"/>
+            </a:pPr>
+            <a:r>
+              <a:rPr lang="en-US" sz="1500" b="1" dirty="0">
+                <a:solidFill>
+                  <a:srgbClr val="011676"/>
+                </a:solidFill>
+                <a:latin typeface="Arial" pitchFamily="34" charset="0"/>
+                <a:ea typeface="Arial" pitchFamily="34" charset="-122"/>
+                <a:cs typeface="Arial" pitchFamily="34" charset="-120"/>
+              </a:rPr>
+              <a:t>Detectar → diagnosticar → corrigir → entregar → novo risco → recomeça.</a:t>
+            </a:r>
+            <a:endParaRPr lang="en-US" sz="1500" dirty="0"/>
+          </a:p>
+        </p:txBody>
+      </p:sp>
+      <p:sp>
+        <p:nvSpPr>
+          <p:cNvPr id="6" name="Text 4"/>
+          <p:cNvSpPr/>
+          <p:nvPr/>
+        </p:nvSpPr>
+        <p:spPr>
+          <a:xfrm>
+            <a:off x="502920" y="4800600"/>
+            <a:ext cx="8138160" cy="274320"/>
+          </a:xfrm>
+          <a:prstGeom prst="rect">
+            <a:avLst/>
+          </a:prstGeom>
+          <a:noFill/>
+          <a:ln/>
+        </p:spPr>
+        <p:txBody>
+          <a:bodyPr wrap="square" rtlCol="0" anchor="ctr"/>
+          <a:lstStyle/>
+          <a:p>
+            <a:pPr indent="0" marL="0">
               <a:buNone/>
             </a:pPr>
             <a:r>
-              <a:rPr lang="en-US" sz="2400" b="1" dirty="0">
-                <a:solidFill>
-                  <a:srgbClr val="F4F5F6"/>
-                </a:solidFill>
-                <a:latin typeface="Arial" pitchFamily="34" charset="0"/>
-                <a:ea typeface="Arial" pitchFamily="34" charset="-122"/>
-                <a:cs typeface="Arial" pitchFamily="34" charset="-120"/>
-              </a:rPr>
-              <a:t>Nenhuma falha gritou</a:t>
-            </a:r>
-            <a:endParaRPr lang="en-US" sz="2400" dirty="0"/>
-          </a:p>
-          <a:p>
-            <a:pPr indent="0" marL="0">
-              <a:lnSpc>
-                <a:spcPct val="120000"/>
-              </a:lnSpc>
-              <a:buNone/>
-            </a:pPr>
-            <a:r>
-              <a:rPr lang="en-US" sz="2400" b="1" dirty="0">
-                <a:solidFill>
-                  <a:srgbClr val="F4F5F6"/>
-                </a:solidFill>
-                <a:latin typeface="Arial" pitchFamily="34" charset="0"/>
-                <a:ea typeface="Arial" pitchFamily="34" charset="-122"/>
-                <a:cs typeface="Arial" pitchFamily="34" charset="-120"/>
-              </a:rPr>
-              <a:t>sozinha. Todas foram</a:t>
-            </a:r>
-            <a:endParaRPr lang="en-US" sz="2400" dirty="0"/>
-          </a:p>
-          <a:p>
-            <a:pPr indent="0" marL="0">
-              <a:lnSpc>
-                <a:spcPct val="120000"/>
-              </a:lnSpc>
-              <a:buNone/>
-            </a:pPr>
-            <a:r>
-              <a:rPr lang="en-US" sz="2400" b="1" dirty="0">
-                <a:solidFill>
-                  <a:srgbClr val="F4F5F6"/>
-                </a:solidFill>
-                <a:latin typeface="Arial" pitchFamily="34" charset="0"/>
-                <a:ea typeface="Arial" pitchFamily="34" charset="-122"/>
-                <a:cs typeface="Arial" pitchFamily="34" charset="-120"/>
-              </a:rPr>
-              <a:t>encontradas olhando.</a:t>
-            </a:r>
-            <a:endParaRPr lang="en-US" sz="2400" dirty="0"/>
+              <a:rPr lang="en-US" sz="900" dirty="0">
+                <a:solidFill>
+                  <a:srgbClr val="010C53">
+                    <a:alpha val="60000"/>
+                  </a:srgbClr>
+                </a:solidFill>
+                <a:latin typeface="Arial" pitchFamily="34" charset="0"/>
+                <a:ea typeface="Arial" pitchFamily="34" charset="-122"/>
+                <a:cs typeface="Arial" pitchFamily="34" charset="-120"/>
+              </a:rPr>
+              <a:t>Aula 4 — Detectar, diagnosticar e corrigir — Evals, observabilidade e conformidade</a:t>
+            </a:r>
+            <a:endParaRPr lang="en-US" sz="900" dirty="0"/>
           </a:p>
         </p:txBody>
       </p:sp>
@@ -5101,6 +7007,1800 @@
 </p:sld>
 </file>
 
+<file path=ppt/slides/slide20.xml><?xml version="1.0" encoding="utf-8"?>
+<p:sld xmlns:a="http://schemas.openxmlformats.org/drawingml/2006/main" xmlns:r="http://schemas.openxmlformats.org/officeDocument/2006/relationships" xmlns:p="http://schemas.openxmlformats.org/presentationml/2006/main">
+  <p:cSld name="Slide 20">
+    <p:bg>
+      <p:bgPr>
+        <a:solidFill>
+          <a:srgbClr val="F4F5F6"/>
+        </a:solidFill>
+      </p:bgPr>
+    </p:bg>
+    <p:spTree>
+      <p:nvGrpSpPr>
+        <p:cNvPr id="1" name=""/>
+        <p:cNvGrpSpPr/>
+        <p:nvPr/>
+      </p:nvGrpSpPr>
+      <p:grpSpPr>
+        <a:xfrm>
+          <a:off x="0" y="0"/>
+          <a:ext cx="0" cy="0"/>
+          <a:chOff x="0" y="0"/>
+          <a:chExt cx="0" cy="0"/>
+        </a:xfrm>
+      </p:grpSpPr>
+      <p:sp>
+        <p:nvSpPr>
+          <p:cNvPr id="2" name="Text 0"/>
+          <p:cNvSpPr/>
+          <p:nvPr/>
+        </p:nvSpPr>
+        <p:spPr>
+          <a:xfrm>
+            <a:off x="502920" y="365760"/>
+            <a:ext cx="8138160" cy="320040"/>
+          </a:xfrm>
+          <a:prstGeom prst="rect">
+            <a:avLst/>
+          </a:prstGeom>
+          <a:noFill/>
+          <a:ln/>
+        </p:spPr>
+        <p:txBody>
+          <a:bodyPr wrap="square" rtlCol="0" anchor="ctr"/>
+          <a:lstStyle/>
+          <a:p>
+            <a:pPr indent="0" marL="0">
+              <a:buNone/>
+            </a:pPr>
+            <a:r>
+              <a:rPr lang="en-US" sz="1100" b="1" spc="150" kern="0" dirty="0">
+                <a:solidFill>
+                  <a:srgbClr val="0429BC"/>
+                </a:solidFill>
+                <a:latin typeface="Arial" pitchFamily="34" charset="0"/>
+                <a:ea typeface="Arial" pitchFamily="34" charset="-122"/>
+                <a:cs typeface="Arial" pitchFamily="34" charset="-120"/>
+              </a:rPr>
+              <a:t>VÍDEO 4.4 — A FALHA QUE EU NÃO CORRIGI</a:t>
+            </a:r>
+            <a:endParaRPr lang="en-US" sz="1100" dirty="0"/>
+          </a:p>
+        </p:txBody>
+      </p:sp>
+      <p:sp>
+        <p:nvSpPr>
+          <p:cNvPr id="3" name="Text 1"/>
+          <p:cNvSpPr/>
+          <p:nvPr/>
+        </p:nvSpPr>
+        <p:spPr>
+          <a:xfrm>
+            <a:off x="502920" y="713232"/>
+            <a:ext cx="8138160" cy="640080"/>
+          </a:xfrm>
+          <a:prstGeom prst="rect">
+            <a:avLst/>
+          </a:prstGeom>
+          <a:noFill/>
+          <a:ln/>
+        </p:spPr>
+        <p:txBody>
+          <a:bodyPr wrap="square" rtlCol="0" anchor="ctr"/>
+          <a:lstStyle/>
+          <a:p>
+            <a:pPr indent="0" marL="0">
+              <a:buNone/>
+            </a:pPr>
+            <a:r>
+              <a:rPr lang="en-US" sz="2600" b="1" dirty="0">
+                <a:solidFill>
+                  <a:srgbClr val="010C53"/>
+                </a:solidFill>
+                <a:latin typeface="Arial" pitchFamily="34" charset="0"/>
+                <a:ea typeface="Arial" pitchFamily="34" charset="-122"/>
+                <a:cs typeface="Arial" pitchFamily="34" charset="-120"/>
+              </a:rPr>
+              <a:t>O modelo acertou. O código errou.</a:t>
+            </a:r>
+            <a:endParaRPr lang="en-US" sz="2600" dirty="0"/>
+          </a:p>
+        </p:txBody>
+      </p:sp>
+      <p:sp>
+        <p:nvSpPr>
+          <p:cNvPr id="4" name="Shape 2"/>
+          <p:cNvSpPr/>
+          <p:nvPr/>
+        </p:nvSpPr>
+        <p:spPr>
+          <a:xfrm>
+            <a:off x="502920" y="1371600"/>
+            <a:ext cx="8138160" cy="0"/>
+          </a:xfrm>
+          <a:prstGeom prst="line">
+            <a:avLst/>
+          </a:prstGeom>
+          <a:noFill/>
+          <a:ln w="19050">
+            <a:solidFill>
+              <a:srgbClr val="010C53"/>
+            </a:solidFill>
+            <a:prstDash val="solid"/>
+          </a:ln>
+        </p:spPr>
+      </p:sp>
+      <p:sp>
+        <p:nvSpPr>
+          <p:cNvPr id="5" name="Text 3"/>
+          <p:cNvSpPr/>
+          <p:nvPr/>
+        </p:nvSpPr>
+        <p:spPr>
+          <a:xfrm>
+            <a:off x="502920" y="1600200"/>
+            <a:ext cx="8138160" cy="3044952"/>
+          </a:xfrm>
+          <a:prstGeom prst="rect">
+            <a:avLst/>
+          </a:prstGeom>
+          <a:noFill/>
+          <a:ln/>
+        </p:spPr>
+        <p:txBody>
+          <a:bodyPr wrap="square" rtlCol="0" anchor="t"/>
+          <a:lstStyle/>
+          <a:p>
+            <a:pPr marL="342900" indent="-342900">
+              <a:lnSpc>
+                <a:spcPct val="115000"/>
+              </a:lnSpc>
+              <a:spcAft>
+                <a:spcPts val="1000"/>
+              </a:spcAft>
+              <a:buSzPct val="100000"/>
+              <a:buChar char="•"/>
+            </a:pPr>
+            <a:r>
+              <a:rPr lang="en-US" sz="1500" dirty="0">
+                <a:solidFill>
+                  <a:srgbClr val="011676"/>
+                </a:solidFill>
+                <a:latin typeface="Arial" pitchFamily="34" charset="0"/>
+                <a:ea typeface="Arial" pitchFamily="34" charset="-122"/>
+                <a:cs typeface="Arial" pitchFamily="34" charset="-120"/>
+              </a:rPr>
+              <a:t>Relato real: "Comemos 3 porções de lasagna, 1 e 1/2 para cada!"</a:t>
+            </a:r>
+            <a:endParaRPr lang="en-US" sz="1500" dirty="0"/>
+          </a:p>
+          <a:p>
+            <a:pPr marL="342900" indent="-342900">
+              <a:lnSpc>
+                <a:spcPct val="115000"/>
+              </a:lnSpc>
+              <a:spcAft>
+                <a:spcPts val="1000"/>
+              </a:spcAft>
+              <a:buSzPct val="100000"/>
+              <a:buChar char="•"/>
+            </a:pPr>
+            <a:r>
+              <a:rPr lang="en-US" sz="1500" dirty="0">
+                <a:solidFill>
+                  <a:srgbClr val="011676"/>
+                </a:solidFill>
+                <a:latin typeface="Arial" pitchFamily="34" charset="0"/>
+                <a:ea typeface="Arial" pitchFamily="34" charset="-122"/>
+                <a:cs typeface="Arial" pitchFamily="34" charset="-120"/>
+              </a:rPr>
+              <a:t>Saída do modelo: tipo relato_refeicao, fonte caseira, item_nome "lasagna", quantidade 3.</a:t>
+            </a:r>
+            <a:endParaRPr lang="en-US" sz="1500" dirty="0"/>
+          </a:p>
+          <a:p>
+            <a:pPr marL="342900" indent="-342900">
+              <a:lnSpc>
+                <a:spcPct val="115000"/>
+              </a:lnSpc>
+              <a:spcAft>
+                <a:spcPts val="1000"/>
+              </a:spcAft>
+              <a:buSzPct val="100000"/>
+              <a:buChar char="•"/>
+            </a:pPr>
+            <a:r>
+              <a:rPr lang="en-US" sz="1500" dirty="0">
+                <a:solidFill>
+                  <a:srgbClr val="011676"/>
+                </a:solidFill>
+                <a:latin typeface="Arial" pitchFamily="34" charset="0"/>
+                <a:ea typeface="Arial" pitchFamily="34" charset="-122"/>
+                <a:cs typeface="Arial" pitchFamily="34" charset="-120"/>
+              </a:rPr>
+              <a:t>Ele até resolveu que "1 e 1/2 para cada", com duas pessoas, dá 3.</a:t>
+            </a:r>
+            <a:endParaRPr lang="en-US" sz="1500" dirty="0"/>
+          </a:p>
+          <a:p>
+            <a:pPr marL="342900" indent="-342900">
+              <a:lnSpc>
+                <a:spcPct val="115000"/>
+              </a:lnSpc>
+              <a:spcAft>
+                <a:spcPts val="1000"/>
+              </a:spcAft>
+              <a:buSzPct val="100000"/>
+              <a:buChar char="•"/>
+            </a:pPr>
+            <a:r>
+              <a:rPr lang="en-US" sz="1500" b="1" dirty="0">
+                <a:solidFill>
+                  <a:srgbClr val="011676"/>
+                </a:solidFill>
+                <a:latin typeface="Arial" pitchFamily="34" charset="0"/>
+                <a:ea typeface="Arial" pitchFamily="34" charset="-122"/>
+                <a:cs typeface="Arial" pitchFamily="34" charset="-120"/>
+              </a:rPr>
+              <a:t>Zero erro do modelo.</a:t>
+            </a:r>
+            <a:endParaRPr lang="en-US" sz="1500" dirty="0"/>
+          </a:p>
+        </p:txBody>
+      </p:sp>
+      <p:sp>
+        <p:nvSpPr>
+          <p:cNvPr id="6" name="Text 4"/>
+          <p:cNvSpPr/>
+          <p:nvPr/>
+        </p:nvSpPr>
+        <p:spPr>
+          <a:xfrm>
+            <a:off x="502920" y="4800600"/>
+            <a:ext cx="8138160" cy="274320"/>
+          </a:xfrm>
+          <a:prstGeom prst="rect">
+            <a:avLst/>
+          </a:prstGeom>
+          <a:noFill/>
+          <a:ln/>
+        </p:spPr>
+        <p:txBody>
+          <a:bodyPr wrap="square" rtlCol="0" anchor="ctr"/>
+          <a:lstStyle/>
+          <a:p>
+            <a:pPr indent="0" marL="0">
+              <a:buNone/>
+            </a:pPr>
+            <a:r>
+              <a:rPr lang="en-US" sz="900" dirty="0">
+                <a:solidFill>
+                  <a:srgbClr val="010C53">
+                    <a:alpha val="60000"/>
+                  </a:srgbClr>
+                </a:solidFill>
+                <a:latin typeface="Arial" pitchFamily="34" charset="0"/>
+                <a:ea typeface="Arial" pitchFamily="34" charset="-122"/>
+                <a:cs typeface="Arial" pitchFamily="34" charset="-120"/>
+              </a:rPr>
+              <a:t>Aula 4 — Detectar, diagnosticar e corrigir — Evals, observabilidade e conformidade</a:t>
+            </a:r>
+            <a:endParaRPr lang="en-US" sz="900" dirty="0"/>
+          </a:p>
+        </p:txBody>
+      </p:sp>
+    </p:spTree>
+  </p:cSld>
+  <p:clrMapOvr>
+    <a:masterClrMapping/>
+  </p:clrMapOvr>
+</p:sld>
+</file>
+
+<file path=ppt/slides/slide21.xml><?xml version="1.0" encoding="utf-8"?>
+<p:sld xmlns:a="http://schemas.openxmlformats.org/drawingml/2006/main" xmlns:r="http://schemas.openxmlformats.org/officeDocument/2006/relationships" xmlns:p="http://schemas.openxmlformats.org/presentationml/2006/main">
+  <p:cSld name="Slide 21">
+    <p:bg>
+      <p:bgPr>
+        <a:solidFill>
+          <a:srgbClr val="F4F5F6"/>
+        </a:solidFill>
+      </p:bgPr>
+    </p:bg>
+    <p:spTree>
+      <p:nvGrpSpPr>
+        <p:cNvPr id="1" name=""/>
+        <p:cNvGrpSpPr/>
+        <p:nvPr/>
+      </p:nvGrpSpPr>
+      <p:grpSpPr>
+        <a:xfrm>
+          <a:off x="0" y="0"/>
+          <a:ext cx="0" cy="0"/>
+          <a:chOff x="0" y="0"/>
+          <a:chExt cx="0" cy="0"/>
+        </a:xfrm>
+      </p:grpSpPr>
+      <p:sp>
+        <p:nvSpPr>
+          <p:cNvPr id="2" name="Text 0"/>
+          <p:cNvSpPr/>
+          <p:nvPr/>
+        </p:nvSpPr>
+        <p:spPr>
+          <a:xfrm>
+            <a:off x="502920" y="365760"/>
+            <a:ext cx="8138160" cy="320040"/>
+          </a:xfrm>
+          <a:prstGeom prst="rect">
+            <a:avLst/>
+          </a:prstGeom>
+          <a:noFill/>
+          <a:ln/>
+        </p:spPr>
+        <p:txBody>
+          <a:bodyPr wrap="square" rtlCol="0" anchor="ctr"/>
+          <a:lstStyle/>
+          <a:p>
+            <a:pPr indent="0" marL="0">
+              <a:buNone/>
+            </a:pPr>
+            <a:r>
+              <a:rPr lang="en-US" sz="1100" b="1" spc="150" kern="0" dirty="0">
+                <a:solidFill>
+                  <a:srgbClr val="0429BC"/>
+                </a:solidFill>
+                <a:latin typeface="Arial" pitchFamily="34" charset="0"/>
+                <a:ea typeface="Arial" pitchFamily="34" charset="-122"/>
+                <a:cs typeface="Arial" pitchFamily="34" charset="-120"/>
+              </a:rPr>
+              <a:t>VÍDEO 4.4</a:t>
+            </a:r>
+            <a:endParaRPr lang="en-US" sz="1100" dirty="0"/>
+          </a:p>
+        </p:txBody>
+      </p:sp>
+      <p:sp>
+        <p:nvSpPr>
+          <p:cNvPr id="3" name="Text 1"/>
+          <p:cNvSpPr/>
+          <p:nvPr/>
+        </p:nvSpPr>
+        <p:spPr>
+          <a:xfrm>
+            <a:off x="502920" y="713232"/>
+            <a:ext cx="8138160" cy="640080"/>
+          </a:xfrm>
+          <a:prstGeom prst="rect">
+            <a:avLst/>
+          </a:prstGeom>
+          <a:noFill/>
+          <a:ln/>
+        </p:spPr>
+        <p:txBody>
+          <a:bodyPr wrap="square" rtlCol="0" anchor="ctr"/>
+          <a:lstStyle/>
+          <a:p>
+            <a:pPr indent="0" marL="0">
+              <a:buNone/>
+            </a:pPr>
+            <a:r>
+              <a:rPr lang="en-US" sz="2600" b="1" dirty="0">
+                <a:solidFill>
+                  <a:srgbClr val="010C53"/>
+                </a:solidFill>
+                <a:latin typeface="Arial" pitchFamily="34" charset="0"/>
+                <a:ea typeface="Arial" pitchFamily="34" charset="-122"/>
+                <a:cs typeface="Arial" pitchFamily="34" charset="-120"/>
+              </a:rPr>
+              <a:t>E o estoque não mudou</a:t>
+            </a:r>
+            <a:endParaRPr lang="en-US" sz="2600" dirty="0"/>
+          </a:p>
+        </p:txBody>
+      </p:sp>
+      <p:sp>
+        <p:nvSpPr>
+          <p:cNvPr id="4" name="Shape 2"/>
+          <p:cNvSpPr/>
+          <p:nvPr/>
+        </p:nvSpPr>
+        <p:spPr>
+          <a:xfrm>
+            <a:off x="502920" y="1371600"/>
+            <a:ext cx="8138160" cy="0"/>
+          </a:xfrm>
+          <a:prstGeom prst="line">
+            <a:avLst/>
+          </a:prstGeom>
+          <a:noFill/>
+          <a:ln w="19050">
+            <a:solidFill>
+              <a:srgbClr val="010C53"/>
+            </a:solidFill>
+            <a:prstDash val="solid"/>
+          </a:ln>
+        </p:spPr>
+      </p:sp>
+      <p:sp>
+        <p:nvSpPr>
+          <p:cNvPr id="5" name="Text 3"/>
+          <p:cNvSpPr/>
+          <p:nvPr/>
+        </p:nvSpPr>
+        <p:spPr>
+          <a:xfrm>
+            <a:off x="502920" y="1600200"/>
+            <a:ext cx="8138160" cy="3044952"/>
+          </a:xfrm>
+          <a:prstGeom prst="rect">
+            <a:avLst/>
+          </a:prstGeom>
+          <a:noFill/>
+          <a:ln/>
+        </p:spPr>
+        <p:txBody>
+          <a:bodyPr wrap="square" rtlCol="0" anchor="t"/>
+          <a:lstStyle/>
+          <a:p>
+            <a:pPr marL="342900" indent="-342900">
+              <a:lnSpc>
+                <a:spcPct val="115000"/>
+              </a:lnSpc>
+              <a:spcAft>
+                <a:spcPts val="1000"/>
+              </a:spcAft>
+              <a:buSzPct val="100000"/>
+              <a:buChar char="•"/>
+            </a:pPr>
+            <a:r>
+              <a:rPr lang="en-US" sz="1500" b="1" dirty="0">
+                <a:solidFill>
+                  <a:srgbClr val="011676"/>
+                </a:solidFill>
+                <a:latin typeface="Arial" pitchFamily="34" charset="0"/>
+                <a:ea typeface="Arial" pitchFamily="34" charset="-122"/>
+                <a:cs typeface="Arial" pitchFamily="34" charset="-120"/>
+              </a:rPr>
+              <a:t>Cinco porções de cinco. Nenhuma foi baixada.</a:t>
+            </a:r>
+            <a:endParaRPr lang="en-US" sz="1500" dirty="0"/>
+          </a:p>
+          <a:p>
+            <a:pPr marL="342900" indent="-342900">
+              <a:lnSpc>
+                <a:spcPct val="115000"/>
+              </a:lnSpc>
+              <a:spcAft>
+                <a:spcPts val="1000"/>
+              </a:spcAft>
+              <a:buSzPct val="100000"/>
+              <a:buChar char="•"/>
+            </a:pPr>
+            <a:r>
+              <a:rPr lang="en-US" sz="1500" dirty="0">
+                <a:solidFill>
+                  <a:srgbClr val="011676"/>
+                </a:solidFill>
+                <a:latin typeface="Arial" pitchFamily="34" charset="0"/>
+                <a:ea typeface="Arial" pitchFamily="34" charset="-122"/>
+                <a:cs typeface="Arial" pitchFamily="34" charset="-120"/>
+              </a:rPr>
+              <a:t>O prato está gravado como "lasanha" (nh). O relato veio "lasagna" (gn).</a:t>
+            </a:r>
+            <a:endParaRPr lang="en-US" sz="1500" dirty="0"/>
+          </a:p>
+          <a:p>
+            <a:pPr marL="342900" indent="-342900">
+              <a:lnSpc>
+                <a:spcPct val="115000"/>
+              </a:lnSpc>
+              <a:spcAft>
+                <a:spcPts val="1000"/>
+              </a:spcAft>
+              <a:buSzPct val="100000"/>
+              <a:buChar char="•"/>
+            </a:pPr>
+            <a:r>
+              <a:rPr lang="en-US" sz="1500" dirty="0">
+                <a:solidFill>
+                  <a:srgbClr val="011676"/>
+                </a:solidFill>
+                <a:latin typeface="Arial" pitchFamily="34" charset="0"/>
+                <a:ea typeface="Arial" pitchFamily="34" charset="-122"/>
+                <a:cs typeface="Arial" pitchFamily="34" charset="-120"/>
+              </a:rPr>
+              <a:t>A busca não casou. Não é acento, não é maiúscula — é grafia.</a:t>
+            </a:r>
+            <a:endParaRPr lang="en-US" sz="1500" dirty="0"/>
+          </a:p>
+          <a:p>
+            <a:pPr marL="342900" indent="-342900">
+              <a:lnSpc>
+                <a:spcPct val="115000"/>
+              </a:lnSpc>
+              <a:spcAft>
+                <a:spcPts val="1000"/>
+              </a:spcAft>
+              <a:buSzPct val="100000"/>
+              <a:buChar char="•"/>
+            </a:pPr>
+            <a:r>
+              <a:rPr lang="en-US" sz="1500" dirty="0">
+                <a:solidFill>
+                  <a:srgbClr val="011676"/>
+                </a:solidFill>
+                <a:latin typeface="Arial" pitchFamily="34" charset="0"/>
+                <a:ea typeface="Arial" pitchFamily="34" charset="-122"/>
+                <a:cs typeface="Arial" pitchFamily="34" charset="-120"/>
+              </a:rPr>
+              <a:t>E tudo "funcionou": relato gravado, refeição registrada, o bot reagiu com 👍.</a:t>
+            </a:r>
+            <a:endParaRPr lang="en-US" sz="1500" dirty="0"/>
+          </a:p>
+        </p:txBody>
+      </p:sp>
+      <p:sp>
+        <p:nvSpPr>
+          <p:cNvPr id="6" name="Text 4"/>
+          <p:cNvSpPr/>
+          <p:nvPr/>
+        </p:nvSpPr>
+        <p:spPr>
+          <a:xfrm>
+            <a:off x="502920" y="4800600"/>
+            <a:ext cx="8138160" cy="274320"/>
+          </a:xfrm>
+          <a:prstGeom prst="rect">
+            <a:avLst/>
+          </a:prstGeom>
+          <a:noFill/>
+          <a:ln/>
+        </p:spPr>
+        <p:txBody>
+          <a:bodyPr wrap="square" rtlCol="0" anchor="ctr"/>
+          <a:lstStyle/>
+          <a:p>
+            <a:pPr indent="0" marL="0">
+              <a:buNone/>
+            </a:pPr>
+            <a:r>
+              <a:rPr lang="en-US" sz="900" dirty="0">
+                <a:solidFill>
+                  <a:srgbClr val="010C53">
+                    <a:alpha val="60000"/>
+                  </a:srgbClr>
+                </a:solidFill>
+                <a:latin typeface="Arial" pitchFamily="34" charset="0"/>
+                <a:ea typeface="Arial" pitchFamily="34" charset="-122"/>
+                <a:cs typeface="Arial" pitchFamily="34" charset="-120"/>
+              </a:rPr>
+              <a:t>Aula 4 — Detectar, diagnosticar e corrigir — Evals, observabilidade e conformidade</a:t>
+            </a:r>
+            <a:endParaRPr lang="en-US" sz="900" dirty="0"/>
+          </a:p>
+        </p:txBody>
+      </p:sp>
+    </p:spTree>
+  </p:cSld>
+  <p:clrMapOvr>
+    <a:masterClrMapping/>
+  </p:clrMapOvr>
+</p:sld>
+</file>
+
+<file path=ppt/slides/slide22.xml><?xml version="1.0" encoding="utf-8"?>
+<p:sld xmlns:a="http://schemas.openxmlformats.org/drawingml/2006/main" xmlns:r="http://schemas.openxmlformats.org/officeDocument/2006/relationships" xmlns:p="http://schemas.openxmlformats.org/presentationml/2006/main">
+  <p:cSld name="Slide 22">
+    <p:bg>
+      <p:bgPr>
+        <a:solidFill>
+          <a:srgbClr val="F4F5F6"/>
+        </a:solidFill>
+      </p:bgPr>
+    </p:bg>
+    <p:spTree>
+      <p:nvGrpSpPr>
+        <p:cNvPr id="1" name=""/>
+        <p:cNvGrpSpPr/>
+        <p:nvPr/>
+      </p:nvGrpSpPr>
+      <p:grpSpPr>
+        <a:xfrm>
+          <a:off x="0" y="0"/>
+          <a:ext cx="0" cy="0"/>
+          <a:chOff x="0" y="0"/>
+          <a:chExt cx="0" cy="0"/>
+        </a:xfrm>
+      </p:grpSpPr>
+      <p:sp>
+        <p:nvSpPr>
+          <p:cNvPr id="2" name="Text 0"/>
+          <p:cNvSpPr/>
+          <p:nvPr/>
+        </p:nvSpPr>
+        <p:spPr>
+          <a:xfrm>
+            <a:off x="502920" y="365760"/>
+            <a:ext cx="8138160" cy="320040"/>
+          </a:xfrm>
+          <a:prstGeom prst="rect">
+            <a:avLst/>
+          </a:prstGeom>
+          <a:noFill/>
+          <a:ln/>
+        </p:spPr>
+        <p:txBody>
+          <a:bodyPr wrap="square" rtlCol="0" anchor="ctr"/>
+          <a:lstStyle/>
+          <a:p>
+            <a:pPr indent="0" marL="0">
+              <a:buNone/>
+            </a:pPr>
+            <a:r>
+              <a:rPr lang="en-US" sz="1100" b="1" spc="150" kern="0" dirty="0">
+                <a:solidFill>
+                  <a:srgbClr val="0429BC"/>
+                </a:solidFill>
+                <a:latin typeface="Arial" pitchFamily="34" charset="0"/>
+                <a:ea typeface="Arial" pitchFamily="34" charset="-122"/>
+                <a:cs typeface="Arial" pitchFamily="34" charset="-120"/>
+              </a:rPr>
+              <a:t>VÍDEO 4.4</a:t>
+            </a:r>
+            <a:endParaRPr lang="en-US" sz="1100" dirty="0"/>
+          </a:p>
+        </p:txBody>
+      </p:sp>
+      <p:sp>
+        <p:nvSpPr>
+          <p:cNvPr id="3" name="Text 1"/>
+          <p:cNvSpPr/>
+          <p:nvPr/>
+        </p:nvSpPr>
+        <p:spPr>
+          <a:xfrm>
+            <a:off x="502920" y="713232"/>
+            <a:ext cx="8138160" cy="640080"/>
+          </a:xfrm>
+          <a:prstGeom prst="rect">
+            <a:avLst/>
+          </a:prstGeom>
+          <a:noFill/>
+          <a:ln/>
+        </p:spPr>
+        <p:txBody>
+          <a:bodyPr wrap="square" rtlCol="0" anchor="ctr"/>
+          <a:lstStyle/>
+          <a:p>
+            <a:pPr indent="0" marL="0">
+              <a:buNone/>
+            </a:pPr>
+            <a:r>
+              <a:rPr lang="en-US" sz="2600" b="1" dirty="0">
+                <a:solidFill>
+                  <a:srgbClr val="010C53"/>
+                </a:solidFill>
+                <a:latin typeface="Arial" pitchFamily="34" charset="0"/>
+                <a:ea typeface="Arial" pitchFamily="34" charset="-122"/>
+                <a:cs typeface="Arial" pitchFamily="34" charset="-120"/>
+              </a:rPr>
+              <a:t>Por que monitorar só o modelo não basta</a:t>
+            </a:r>
+            <a:endParaRPr lang="en-US" sz="2600" dirty="0"/>
+          </a:p>
+        </p:txBody>
+      </p:sp>
+      <p:sp>
+        <p:nvSpPr>
+          <p:cNvPr id="4" name="Shape 2"/>
+          <p:cNvSpPr/>
+          <p:nvPr/>
+        </p:nvSpPr>
+        <p:spPr>
+          <a:xfrm>
+            <a:off x="502920" y="1371600"/>
+            <a:ext cx="8138160" cy="0"/>
+          </a:xfrm>
+          <a:prstGeom prst="line">
+            <a:avLst/>
+          </a:prstGeom>
+          <a:noFill/>
+          <a:ln w="19050">
+            <a:solidFill>
+              <a:srgbClr val="010C53"/>
+            </a:solidFill>
+            <a:prstDash val="solid"/>
+          </a:ln>
+        </p:spPr>
+      </p:sp>
+      <p:sp>
+        <p:nvSpPr>
+          <p:cNvPr id="5" name="Text 3"/>
+          <p:cNvSpPr/>
+          <p:nvPr/>
+        </p:nvSpPr>
+        <p:spPr>
+          <a:xfrm>
+            <a:off x="502920" y="1600200"/>
+            <a:ext cx="8138160" cy="3044952"/>
+          </a:xfrm>
+          <a:prstGeom prst="rect">
+            <a:avLst/>
+          </a:prstGeom>
+          <a:noFill/>
+          <a:ln/>
+        </p:spPr>
+        <p:txBody>
+          <a:bodyPr wrap="square" rtlCol="0" anchor="t"/>
+          <a:lstStyle/>
+          <a:p>
+            <a:pPr marL="342900" indent="-342900">
+              <a:lnSpc>
+                <a:spcPct val="115000"/>
+              </a:lnSpc>
+              <a:spcAft>
+                <a:spcPts val="1000"/>
+              </a:spcAft>
+              <a:buSzPct val="100000"/>
+              <a:buChar char="•"/>
+            </a:pPr>
+            <a:r>
+              <a:rPr lang="en-US" sz="1500" dirty="0">
+                <a:solidFill>
+                  <a:srgbClr val="011676"/>
+                </a:solidFill>
+                <a:latin typeface="Arial" pitchFamily="34" charset="0"/>
+                <a:ea typeface="Arial" pitchFamily="34" charset="-122"/>
+                <a:cs typeface="Arial" pitchFamily="34" charset="-120"/>
+              </a:rPr>
+              <a:t>A gente desconfia da parte probabilística — e o erro veio da determinística.</a:t>
+            </a:r>
+            <a:endParaRPr lang="en-US" sz="1500" dirty="0"/>
+          </a:p>
+          <a:p>
+            <a:pPr marL="342900" indent="-342900">
+              <a:lnSpc>
+                <a:spcPct val="115000"/>
+              </a:lnSpc>
+              <a:spcAft>
+                <a:spcPts val="1000"/>
+              </a:spcAft>
+              <a:buSzPct val="100000"/>
+              <a:buChar char="•"/>
+            </a:pPr>
+            <a:r>
+              <a:rPr lang="en-US" sz="1500" dirty="0">
+                <a:solidFill>
+                  <a:srgbClr val="011676"/>
+                </a:solidFill>
+                <a:latin typeface="Arial" pitchFamily="34" charset="0"/>
+                <a:ea typeface="Arial" pitchFamily="34" charset="-122"/>
+                <a:cs typeface="Arial" pitchFamily="34" charset="-120"/>
+              </a:rPr>
+              <a:t>Nenhum log, nenhum alerta, nenhum eval de resposta pegaria isso.</a:t>
+            </a:r>
+            <a:endParaRPr lang="en-US" sz="1500" dirty="0"/>
+          </a:p>
+          <a:p>
+            <a:pPr marL="342900" indent="-342900">
+              <a:lnSpc>
+                <a:spcPct val="115000"/>
+              </a:lnSpc>
+              <a:spcAft>
+                <a:spcPts val="1000"/>
+              </a:spcAft>
+              <a:buSzPct val="100000"/>
+              <a:buChar char="•"/>
+            </a:pPr>
+            <a:r>
+              <a:rPr lang="en-US" sz="1500" b="1" dirty="0">
+                <a:solidFill>
+                  <a:srgbClr val="011676"/>
+                </a:solidFill>
+                <a:latin typeface="Arial" pitchFamily="34" charset="0"/>
+                <a:ea typeface="Arial" pitchFamily="34" charset="-122"/>
+                <a:cs typeface="Arial" pitchFamily="34" charset="-120"/>
+              </a:rPr>
+              <a:t>Só dava para detectar cruzando o trace com o estado resultante.</a:t>
+            </a:r>
+            <a:endParaRPr lang="en-US" sz="1500" dirty="0"/>
+          </a:p>
+          <a:p>
+            <a:pPr marL="342900" indent="-342900">
+              <a:lnSpc>
+                <a:spcPct val="115000"/>
+              </a:lnSpc>
+              <a:spcAft>
+                <a:spcPts val="1000"/>
+              </a:spcAft>
+              <a:buSzPct val="100000"/>
+              <a:buChar char="•"/>
+            </a:pPr>
+            <a:r>
+              <a:rPr lang="en-US" sz="1500" dirty="0">
+                <a:solidFill>
+                  <a:srgbClr val="011676"/>
+                </a:solidFill>
+                <a:latin typeface="Arial" pitchFamily="34" charset="0"/>
+                <a:ea typeface="Arial" pitchFamily="34" charset="-122"/>
+                <a:cs typeface="Arial" pitchFamily="34" charset="-120"/>
+              </a:rPr>
+              <a:t>Observabilidade de produto, não só de modelo.</a:t>
+            </a:r>
+            <a:endParaRPr lang="en-US" sz="1500" dirty="0"/>
+          </a:p>
+        </p:txBody>
+      </p:sp>
+      <p:sp>
+        <p:nvSpPr>
+          <p:cNvPr id="6" name="Text 4"/>
+          <p:cNvSpPr/>
+          <p:nvPr/>
+        </p:nvSpPr>
+        <p:spPr>
+          <a:xfrm>
+            <a:off x="502920" y="4800600"/>
+            <a:ext cx="8138160" cy="274320"/>
+          </a:xfrm>
+          <a:prstGeom prst="rect">
+            <a:avLst/>
+          </a:prstGeom>
+          <a:noFill/>
+          <a:ln/>
+        </p:spPr>
+        <p:txBody>
+          <a:bodyPr wrap="square" rtlCol="0" anchor="ctr"/>
+          <a:lstStyle/>
+          <a:p>
+            <a:pPr indent="0" marL="0">
+              <a:buNone/>
+            </a:pPr>
+            <a:r>
+              <a:rPr lang="en-US" sz="900" dirty="0">
+                <a:solidFill>
+                  <a:srgbClr val="010C53">
+                    <a:alpha val="60000"/>
+                  </a:srgbClr>
+                </a:solidFill>
+                <a:latin typeface="Arial" pitchFamily="34" charset="0"/>
+                <a:ea typeface="Arial" pitchFamily="34" charset="-122"/>
+                <a:cs typeface="Arial" pitchFamily="34" charset="-120"/>
+              </a:rPr>
+              <a:t>Aula 4 — Detectar, diagnosticar e corrigir — Evals, observabilidade e conformidade</a:t>
+            </a:r>
+            <a:endParaRPr lang="en-US" sz="900" dirty="0"/>
+          </a:p>
+        </p:txBody>
+      </p:sp>
+    </p:spTree>
+  </p:cSld>
+  <p:clrMapOvr>
+    <a:masterClrMapping/>
+  </p:clrMapOvr>
+</p:sld>
+</file>
+
+<file path=ppt/slides/slide23.xml><?xml version="1.0" encoding="utf-8"?>
+<p:sld xmlns:a="http://schemas.openxmlformats.org/drawingml/2006/main" xmlns:r="http://schemas.openxmlformats.org/officeDocument/2006/relationships" xmlns:p="http://schemas.openxmlformats.org/presentationml/2006/main">
+  <p:cSld name="Slide 23">
+    <p:bg>
+      <p:bgPr>
+        <a:solidFill>
+          <a:srgbClr val="F4F5F6"/>
+        </a:solidFill>
+      </p:bgPr>
+    </p:bg>
+    <p:spTree>
+      <p:nvGrpSpPr>
+        <p:cNvPr id="1" name=""/>
+        <p:cNvGrpSpPr/>
+        <p:nvPr/>
+      </p:nvGrpSpPr>
+      <p:grpSpPr>
+        <a:xfrm>
+          <a:off x="0" y="0"/>
+          <a:ext cx="0" cy="0"/>
+          <a:chOff x="0" y="0"/>
+          <a:chExt cx="0" cy="0"/>
+        </a:xfrm>
+      </p:grpSpPr>
+      <p:sp>
+        <p:nvSpPr>
+          <p:cNvPr id="2" name="Text 0"/>
+          <p:cNvSpPr/>
+          <p:nvPr/>
+        </p:nvSpPr>
+        <p:spPr>
+          <a:xfrm>
+            <a:off x="502920" y="365760"/>
+            <a:ext cx="8138160" cy="320040"/>
+          </a:xfrm>
+          <a:prstGeom prst="rect">
+            <a:avLst/>
+          </a:prstGeom>
+          <a:noFill/>
+          <a:ln/>
+        </p:spPr>
+        <p:txBody>
+          <a:bodyPr wrap="square" rtlCol="0" anchor="ctr"/>
+          <a:lstStyle/>
+          <a:p>
+            <a:pPr indent="0" marL="0">
+              <a:buNone/>
+            </a:pPr>
+            <a:r>
+              <a:rPr lang="en-US" sz="1100" b="1" spc="150" kern="0" dirty="0">
+                <a:solidFill>
+                  <a:srgbClr val="0429BC"/>
+                </a:solidFill>
+                <a:latin typeface="Arial" pitchFamily="34" charset="0"/>
+                <a:ea typeface="Arial" pitchFamily="34" charset="-122"/>
+                <a:cs typeface="Arial" pitchFamily="34" charset="-120"/>
+              </a:rPr>
+              <a:t>VÍDEO 4.4</a:t>
+            </a:r>
+            <a:endParaRPr lang="en-US" sz="1100" dirty="0"/>
+          </a:p>
+        </p:txBody>
+      </p:sp>
+      <p:sp>
+        <p:nvSpPr>
+          <p:cNvPr id="3" name="Text 1"/>
+          <p:cNvSpPr/>
+          <p:nvPr/>
+        </p:nvSpPr>
+        <p:spPr>
+          <a:xfrm>
+            <a:off x="502920" y="713232"/>
+            <a:ext cx="8138160" cy="640080"/>
+          </a:xfrm>
+          <a:prstGeom prst="rect">
+            <a:avLst/>
+          </a:prstGeom>
+          <a:noFill/>
+          <a:ln/>
+        </p:spPr>
+        <p:txBody>
+          <a:bodyPr wrap="square" rtlCol="0" anchor="ctr"/>
+          <a:lstStyle/>
+          <a:p>
+            <a:pPr indent="0" marL="0">
+              <a:buNone/>
+            </a:pPr>
+            <a:r>
+              <a:rPr lang="en-US" sz="2600" b="1" dirty="0">
+                <a:solidFill>
+                  <a:srgbClr val="010C53"/>
+                </a:solidFill>
+                <a:latin typeface="Arial" pitchFamily="34" charset="0"/>
+                <a:ea typeface="Arial" pitchFamily="34" charset="-122"/>
+                <a:cs typeface="Arial" pitchFamily="34" charset="-120"/>
+              </a:rPr>
+              <a:t>E por que eu não corrigi</a:t>
+            </a:r>
+            <a:endParaRPr lang="en-US" sz="2600" dirty="0"/>
+          </a:p>
+        </p:txBody>
+      </p:sp>
+      <p:sp>
+        <p:nvSpPr>
+          <p:cNvPr id="4" name="Shape 2"/>
+          <p:cNvSpPr/>
+          <p:nvPr/>
+        </p:nvSpPr>
+        <p:spPr>
+          <a:xfrm>
+            <a:off x="502920" y="1371600"/>
+            <a:ext cx="8138160" cy="0"/>
+          </a:xfrm>
+          <a:prstGeom prst="line">
+            <a:avLst/>
+          </a:prstGeom>
+          <a:noFill/>
+          <a:ln w="19050">
+            <a:solidFill>
+              <a:srgbClr val="010C53"/>
+            </a:solidFill>
+            <a:prstDash val="solid"/>
+          </a:ln>
+        </p:spPr>
+      </p:sp>
+      <p:sp>
+        <p:nvSpPr>
+          <p:cNvPr id="5" name="Text 3"/>
+          <p:cNvSpPr/>
+          <p:nvPr/>
+        </p:nvSpPr>
+        <p:spPr>
+          <a:xfrm>
+            <a:off x="502920" y="1600200"/>
+            <a:ext cx="8138160" cy="3044952"/>
+          </a:xfrm>
+          <a:prstGeom prst="rect">
+            <a:avLst/>
+          </a:prstGeom>
+          <a:noFill/>
+          <a:ln/>
+        </p:spPr>
+        <p:txBody>
+          <a:bodyPr wrap="square" rtlCol="0" anchor="t"/>
+          <a:lstStyle/>
+          <a:p>
+            <a:pPr marL="342900" indent="-342900">
+              <a:lnSpc>
+                <a:spcPct val="115000"/>
+              </a:lnSpc>
+              <a:spcAft>
+                <a:spcPts val="1000"/>
+              </a:spcAft>
+              <a:buSzPct val="100000"/>
+              <a:buChar char="•"/>
+            </a:pPr>
+            <a:r>
+              <a:rPr lang="en-US" sz="1500" dirty="0">
+                <a:solidFill>
+                  <a:srgbClr val="011676"/>
+                </a:solidFill>
+                <a:latin typeface="Arial" pitchFamily="34" charset="0"/>
+                <a:ea typeface="Arial" pitchFamily="34" charset="-122"/>
+                <a:cs typeface="Arial" pitchFamily="34" charset="-120"/>
+              </a:rPr>
+              <a:t>Não é preguiça: eu ainda não sei qual é a correção certa.</a:t>
+            </a:r>
+            <a:endParaRPr lang="en-US" sz="1500" dirty="0"/>
+          </a:p>
+          <a:p>
+            <a:pPr marL="342900" indent="-342900">
+              <a:lnSpc>
+                <a:spcPct val="115000"/>
+              </a:lnSpc>
+              <a:spcAft>
+                <a:spcPts val="1000"/>
+              </a:spcAft>
+              <a:buSzPct val="100000"/>
+              <a:buChar char="•"/>
+            </a:pPr>
+            <a:r>
+              <a:rPr lang="en-US" sz="1500" dirty="0">
+                <a:solidFill>
+                  <a:srgbClr val="011676"/>
+                </a:solidFill>
+                <a:latin typeface="Arial" pitchFamily="34" charset="0"/>
+                <a:ea typeface="Arial" pitchFamily="34" charset="-122"/>
+                <a:cs typeface="Arial" pitchFamily="34" charset="-120"/>
+              </a:rPr>
+              <a:t>Busca mais tolerante resolve este caso e cria outros — "arroz" casando com "arroz doce".</a:t>
+            </a:r>
+            <a:endParaRPr lang="en-US" sz="1500" dirty="0"/>
+          </a:p>
+          <a:p>
+            <a:pPr marL="342900" indent="-342900">
+              <a:lnSpc>
+                <a:spcPct val="115000"/>
+              </a:lnSpc>
+              <a:spcAft>
+                <a:spcPts val="1000"/>
+              </a:spcAft>
+              <a:buSzPct val="100000"/>
+              <a:buChar char="•"/>
+            </a:pPr>
+            <a:r>
+              <a:rPr lang="en-US" sz="1500" dirty="0">
+                <a:solidFill>
+                  <a:srgbClr val="011676"/>
+                </a:solidFill>
+                <a:latin typeface="Arial" pitchFamily="34" charset="0"/>
+                <a:ea typeface="Arial" pitchFamily="34" charset="-122"/>
+                <a:cs typeface="Arial" pitchFamily="34" charset="-120"/>
+              </a:rPr>
+              <a:t>A saída provável não é um algoritmo mais esperto: é o sistema perguntar quando estiver em dúvida.</a:t>
+            </a:r>
+            <a:endParaRPr lang="en-US" sz="1500" dirty="0"/>
+          </a:p>
+          <a:p>
+            <a:pPr marL="342900" indent="-342900">
+              <a:lnSpc>
+                <a:spcPct val="115000"/>
+              </a:lnSpc>
+              <a:spcAft>
+                <a:spcPts val="1000"/>
+              </a:spcAft>
+              <a:buSzPct val="100000"/>
+              <a:buChar char="•"/>
+            </a:pPr>
+            <a:r>
+              <a:rPr lang="en-US" sz="1500" b="1" dirty="0">
+                <a:solidFill>
+                  <a:srgbClr val="011676"/>
+                </a:solidFill>
+                <a:latin typeface="Arial" pitchFamily="34" charset="0"/>
+                <a:ea typeface="Arial" pitchFamily="34" charset="-122"/>
+                <a:cs typeface="Arial" pitchFamily="34" charset="-120"/>
+              </a:rPr>
+              <a:t>Distinguir o bug que se corrige hoje do bug que ainda precisa ser entendido também é operar.</a:t>
+            </a:r>
+            <a:endParaRPr lang="en-US" sz="1500" dirty="0"/>
+          </a:p>
+        </p:txBody>
+      </p:sp>
+      <p:sp>
+        <p:nvSpPr>
+          <p:cNvPr id="6" name="Text 4"/>
+          <p:cNvSpPr/>
+          <p:nvPr/>
+        </p:nvSpPr>
+        <p:spPr>
+          <a:xfrm>
+            <a:off x="502920" y="4800600"/>
+            <a:ext cx="8138160" cy="274320"/>
+          </a:xfrm>
+          <a:prstGeom prst="rect">
+            <a:avLst/>
+          </a:prstGeom>
+          <a:noFill/>
+          <a:ln/>
+        </p:spPr>
+        <p:txBody>
+          <a:bodyPr wrap="square" rtlCol="0" anchor="ctr"/>
+          <a:lstStyle/>
+          <a:p>
+            <a:pPr indent="0" marL="0">
+              <a:buNone/>
+            </a:pPr>
+            <a:r>
+              <a:rPr lang="en-US" sz="900" dirty="0">
+                <a:solidFill>
+                  <a:srgbClr val="010C53">
+                    <a:alpha val="60000"/>
+                  </a:srgbClr>
+                </a:solidFill>
+                <a:latin typeface="Arial" pitchFamily="34" charset="0"/>
+                <a:ea typeface="Arial" pitchFamily="34" charset="-122"/>
+                <a:cs typeface="Arial" pitchFamily="34" charset="-120"/>
+              </a:rPr>
+              <a:t>Aula 4 — Detectar, diagnosticar e corrigir — Evals, observabilidade e conformidade</a:t>
+            </a:r>
+            <a:endParaRPr lang="en-US" sz="900" dirty="0"/>
+          </a:p>
+        </p:txBody>
+      </p:sp>
+    </p:spTree>
+  </p:cSld>
+  <p:clrMapOvr>
+    <a:masterClrMapping/>
+  </p:clrMapOvr>
+</p:sld>
+</file>
+
+<file path=ppt/slides/slide24.xml><?xml version="1.0" encoding="utf-8"?>
+<p:sld xmlns:a="http://schemas.openxmlformats.org/drawingml/2006/main" xmlns:r="http://schemas.openxmlformats.org/officeDocument/2006/relationships" xmlns:p="http://schemas.openxmlformats.org/presentationml/2006/main">
+  <p:cSld name="Slide 24">
+    <p:bg>
+      <p:bgPr>
+        <a:solidFill>
+          <a:srgbClr val="0429BC"/>
+        </a:solidFill>
+      </p:bgPr>
+    </p:bg>
+    <p:spTree>
+      <p:nvGrpSpPr>
+        <p:cNvPr id="1" name=""/>
+        <p:cNvGrpSpPr/>
+        <p:nvPr/>
+      </p:nvGrpSpPr>
+      <p:grpSpPr>
+        <a:xfrm>
+          <a:off x="0" y="0"/>
+          <a:ext cx="0" cy="0"/>
+          <a:chOff x="0" y="0"/>
+          <a:chExt cx="0" cy="0"/>
+        </a:xfrm>
+      </p:grpSpPr>
+      <p:sp>
+        <p:nvSpPr>
+          <p:cNvPr id="2" name="Text 0"/>
+          <p:cNvSpPr/>
+          <p:nvPr/>
+        </p:nvSpPr>
+        <p:spPr>
+          <a:xfrm>
+            <a:off x="502920" y="1554480"/>
+            <a:ext cx="1828800" cy="914400"/>
+          </a:xfrm>
+          <a:prstGeom prst="rect">
+            <a:avLst/>
+          </a:prstGeom>
+          <a:noFill/>
+          <a:ln/>
+        </p:spPr>
+        <p:txBody>
+          <a:bodyPr wrap="square" rtlCol="0" anchor="ctr"/>
+          <a:lstStyle/>
+          <a:p>
+            <a:pPr indent="0" marL="0">
+              <a:buNone/>
+            </a:pPr>
+            <a:r>
+              <a:rPr lang="en-US" sz="2000" b="1" dirty="0">
+                <a:solidFill>
+                  <a:srgbClr val="F4F5F6">
+                    <a:alpha val="80000"/>
+                  </a:srgbClr>
+                </a:solidFill>
+                <a:latin typeface="Consolas" pitchFamily="34" charset="0"/>
+                <a:ea typeface="Consolas" pitchFamily="34" charset="-122"/>
+                <a:cs typeface="Consolas" pitchFamily="34" charset="-120"/>
+              </a:rPr>
+              <a:t>4.5</a:t>
+            </a:r>
+            <a:endParaRPr lang="en-US" sz="2000" dirty="0"/>
+          </a:p>
+        </p:txBody>
+      </p:sp>
+      <p:sp>
+        <p:nvSpPr>
+          <p:cNvPr id="3" name="Text 1"/>
+          <p:cNvSpPr/>
+          <p:nvPr/>
+        </p:nvSpPr>
+        <p:spPr>
+          <a:xfrm>
+            <a:off x="502920" y="1965960"/>
+            <a:ext cx="8138160" cy="1280160"/>
+          </a:xfrm>
+          <a:prstGeom prst="rect">
+            <a:avLst/>
+          </a:prstGeom>
+          <a:noFill/>
+          <a:ln/>
+        </p:spPr>
+        <p:txBody>
+          <a:bodyPr wrap="square" rtlCol="0" anchor="ctr"/>
+          <a:lstStyle/>
+          <a:p>
+            <a:pPr indent="0" marL="0">
+              <a:buNone/>
+            </a:pPr>
+            <a:r>
+              <a:rPr lang="en-US" sz="3400" b="1" dirty="0">
+                <a:solidFill>
+                  <a:srgbClr val="F4F5F6"/>
+                </a:solidFill>
+                <a:latin typeface="Arial" pitchFamily="34" charset="0"/>
+                <a:ea typeface="Arial" pitchFamily="34" charset="-122"/>
+                <a:cs typeface="Arial" pitchFamily="34" charset="-120"/>
+              </a:rPr>
+              <a:t>O que aprendemos?</a:t>
+            </a:r>
+            <a:endParaRPr lang="en-US" sz="3400" dirty="0"/>
+          </a:p>
+        </p:txBody>
+      </p:sp>
+      <p:sp>
+        <p:nvSpPr>
+          <p:cNvPr id="4" name="Text 2"/>
+          <p:cNvSpPr/>
+          <p:nvPr/>
+        </p:nvSpPr>
+        <p:spPr>
+          <a:xfrm>
+            <a:off x="502920" y="4800600"/>
+            <a:ext cx="8138160" cy="274320"/>
+          </a:xfrm>
+          <a:prstGeom prst="rect">
+            <a:avLst/>
+          </a:prstGeom>
+          <a:noFill/>
+          <a:ln/>
+        </p:spPr>
+        <p:txBody>
+          <a:bodyPr wrap="square" rtlCol="0" anchor="ctr"/>
+          <a:lstStyle/>
+          <a:p>
+            <a:pPr indent="0" marL="0">
+              <a:buNone/>
+            </a:pPr>
+            <a:r>
+              <a:rPr lang="en-US" sz="900" dirty="0">
+                <a:solidFill>
+                  <a:srgbClr val="010C53">
+                    <a:alpha val="60000"/>
+                  </a:srgbClr>
+                </a:solidFill>
+                <a:latin typeface="Arial" pitchFamily="34" charset="0"/>
+                <a:ea typeface="Arial" pitchFamily="34" charset="-122"/>
+                <a:cs typeface="Arial" pitchFamily="34" charset="-120"/>
+              </a:rPr>
+              <a:t>Aula 4 — Detectar, diagnosticar e corrigir — Evals, observabilidade e conformidade</a:t>
+            </a:r>
+            <a:endParaRPr lang="en-US" sz="900" dirty="0"/>
+          </a:p>
+        </p:txBody>
+      </p:sp>
+    </p:spTree>
+  </p:cSld>
+  <p:clrMapOvr>
+    <a:masterClrMapping/>
+  </p:clrMapOvr>
+</p:sld>
+</file>
+
+<file path=ppt/slides/slide25.xml><?xml version="1.0" encoding="utf-8"?>
+<p:sld xmlns:a="http://schemas.openxmlformats.org/drawingml/2006/main" xmlns:r="http://schemas.openxmlformats.org/officeDocument/2006/relationships" xmlns:p="http://schemas.openxmlformats.org/presentationml/2006/main">
+  <p:cSld name="Slide 25">
+    <p:bg>
+      <p:bgPr>
+        <a:solidFill>
+          <a:srgbClr val="F4F5F6"/>
+        </a:solidFill>
+      </p:bgPr>
+    </p:bg>
+    <p:spTree>
+      <p:nvGrpSpPr>
+        <p:cNvPr id="1" name=""/>
+        <p:cNvGrpSpPr/>
+        <p:nvPr/>
+      </p:nvGrpSpPr>
+      <p:grpSpPr>
+        <a:xfrm>
+          <a:off x="0" y="0"/>
+          <a:ext cx="0" cy="0"/>
+          <a:chOff x="0" y="0"/>
+          <a:chExt cx="0" cy="0"/>
+        </a:xfrm>
+      </p:grpSpPr>
+      <p:sp>
+        <p:nvSpPr>
+          <p:cNvPr id="2" name="Text 0"/>
+          <p:cNvSpPr/>
+          <p:nvPr/>
+        </p:nvSpPr>
+        <p:spPr>
+          <a:xfrm>
+            <a:off x="502920" y="365760"/>
+            <a:ext cx="8138160" cy="320040"/>
+          </a:xfrm>
+          <a:prstGeom prst="rect">
+            <a:avLst/>
+          </a:prstGeom>
+          <a:noFill/>
+          <a:ln/>
+        </p:spPr>
+        <p:txBody>
+          <a:bodyPr wrap="square" rtlCol="0" anchor="ctr"/>
+          <a:lstStyle/>
+          <a:p>
+            <a:pPr indent="0" marL="0">
+              <a:buNone/>
+            </a:pPr>
+            <a:r>
+              <a:rPr lang="en-US" sz="1100" b="1" spc="150" kern="0" dirty="0">
+                <a:solidFill>
+                  <a:srgbClr val="0429BC"/>
+                </a:solidFill>
+                <a:latin typeface="Arial" pitchFamily="34" charset="0"/>
+                <a:ea typeface="Arial" pitchFamily="34" charset="-122"/>
+                <a:cs typeface="Arial" pitchFamily="34" charset="-120"/>
+              </a:rPr>
+              <a:t>VÍDEO 4.5</a:t>
+            </a:r>
+            <a:endParaRPr lang="en-US" sz="1100" dirty="0"/>
+          </a:p>
+        </p:txBody>
+      </p:sp>
+      <p:sp>
+        <p:nvSpPr>
+          <p:cNvPr id="3" name="Text 1"/>
+          <p:cNvSpPr/>
+          <p:nvPr/>
+        </p:nvSpPr>
+        <p:spPr>
+          <a:xfrm>
+            <a:off x="502920" y="713232"/>
+            <a:ext cx="8138160" cy="640080"/>
+          </a:xfrm>
+          <a:prstGeom prst="rect">
+            <a:avLst/>
+          </a:prstGeom>
+          <a:noFill/>
+          <a:ln/>
+        </p:spPr>
+        <p:txBody>
+          <a:bodyPr wrap="square" rtlCol="0" anchor="ctr"/>
+          <a:lstStyle/>
+          <a:p>
+            <a:pPr indent="0" marL="0">
+              <a:buNone/>
+            </a:pPr>
+            <a:r>
+              <a:rPr lang="en-US" sz="2600" b="1" dirty="0">
+                <a:solidFill>
+                  <a:srgbClr val="010C53"/>
+                </a:solidFill>
+                <a:latin typeface="Arial" pitchFamily="34" charset="0"/>
+                <a:ea typeface="Arial" pitchFamily="34" charset="-122"/>
+                <a:cs typeface="Arial" pitchFamily="34" charset="-120"/>
+              </a:rPr>
+              <a:t>O que aprendemos</a:t>
+            </a:r>
+            <a:endParaRPr lang="en-US" sz="2600" dirty="0"/>
+          </a:p>
+        </p:txBody>
+      </p:sp>
+      <p:sp>
+        <p:nvSpPr>
+          <p:cNvPr id="4" name="Shape 2"/>
+          <p:cNvSpPr/>
+          <p:nvPr/>
+        </p:nvSpPr>
+        <p:spPr>
+          <a:xfrm>
+            <a:off x="502920" y="1371600"/>
+            <a:ext cx="8138160" cy="0"/>
+          </a:xfrm>
+          <a:prstGeom prst="line">
+            <a:avLst/>
+          </a:prstGeom>
+          <a:noFill/>
+          <a:ln w="19050">
+            <a:solidFill>
+              <a:srgbClr val="010C53"/>
+            </a:solidFill>
+            <a:prstDash val="solid"/>
+          </a:ln>
+        </p:spPr>
+      </p:sp>
+      <p:sp>
+        <p:nvSpPr>
+          <p:cNvPr id="5" name="Text 3"/>
+          <p:cNvSpPr/>
+          <p:nvPr/>
+        </p:nvSpPr>
+        <p:spPr>
+          <a:xfrm>
+            <a:off x="502920" y="1600200"/>
+            <a:ext cx="8138160" cy="3044952"/>
+          </a:xfrm>
+          <a:prstGeom prst="rect">
+            <a:avLst/>
+          </a:prstGeom>
+          <a:noFill/>
+          <a:ln/>
+        </p:spPr>
+        <p:txBody>
+          <a:bodyPr wrap="square" rtlCol="0" anchor="t"/>
+          <a:lstStyle/>
+          <a:p>
+            <a:pPr marL="342900" indent="-342900">
+              <a:lnSpc>
+                <a:spcPct val="115000"/>
+              </a:lnSpc>
+              <a:spcAft>
+                <a:spcPts val="1000"/>
+              </a:spcAft>
+              <a:buSzPct val="100000"/>
+              <a:buChar char="•"/>
+            </a:pPr>
+            <a:r>
+              <a:rPr lang="en-US" sz="1500" dirty="0">
+                <a:solidFill>
+                  <a:srgbClr val="011676"/>
+                </a:solidFill>
+                <a:latin typeface="Arial" pitchFamily="34" charset="0"/>
+                <a:ea typeface="Arial" pitchFamily="34" charset="-122"/>
+                <a:cs typeface="Arial" pitchFamily="34" charset="-120"/>
+              </a:rPr>
+              <a:t>Detectar é o mais difícil: a pior falha não é a que grita, é a que não deixa rastro.</a:t>
+            </a:r>
+            <a:endParaRPr lang="en-US" sz="1500" dirty="0"/>
+          </a:p>
+          <a:p>
+            <a:pPr marL="342900" indent="-342900">
+              <a:lnSpc>
+                <a:spcPct val="115000"/>
+              </a:lnSpc>
+              <a:spcAft>
+                <a:spcPts val="1000"/>
+              </a:spcAft>
+              <a:buSzPct val="100000"/>
+              <a:buChar char="•"/>
+            </a:pPr>
+            <a:r>
+              <a:rPr lang="en-US" sz="1500" dirty="0">
+                <a:solidFill>
+                  <a:srgbClr val="011676"/>
+                </a:solidFill>
+                <a:latin typeface="Arial" pitchFamily="34" charset="0"/>
+                <a:ea typeface="Arial" pitchFamily="34" charset="-122"/>
+                <a:cs typeface="Arial" pitchFamily="34" charset="-120"/>
+              </a:rPr>
+              <a:t>Uma falha pode começar cosmética e virar crash sem ninguém mexer no código.</a:t>
+            </a:r>
+            <a:endParaRPr lang="en-US" sz="1500" dirty="0"/>
+          </a:p>
+          <a:p>
+            <a:pPr marL="342900" indent="-342900">
+              <a:lnSpc>
+                <a:spcPct val="115000"/>
+              </a:lnSpc>
+              <a:spcAft>
+                <a:spcPts val="1000"/>
+              </a:spcAft>
+              <a:buSzPct val="100000"/>
+              <a:buChar char="•"/>
+            </a:pPr>
+            <a:r>
+              <a:rPr lang="en-US" sz="1500" dirty="0">
+                <a:solidFill>
+                  <a:srgbClr val="011676"/>
+                </a:solidFill>
+                <a:latin typeface="Arial" pitchFamily="34" charset="0"/>
+                <a:ea typeface="Arial" pitchFamily="34" charset="-122"/>
+                <a:cs typeface="Arial" pitchFamily="34" charset="-120"/>
+              </a:rPr>
+              <a:t>Evals dão prevalência — é o que transforma anedota em decisão.</a:t>
+            </a:r>
+            <a:endParaRPr lang="en-US" sz="1500" dirty="0"/>
+          </a:p>
+          <a:p>
+            <a:pPr marL="342900" indent="-342900">
+              <a:lnSpc>
+                <a:spcPct val="115000"/>
+              </a:lnSpc>
+              <a:spcAft>
+                <a:spcPts val="1000"/>
+              </a:spcAft>
+              <a:buSzPct val="100000"/>
+              <a:buChar char="•"/>
+            </a:pPr>
+            <a:r>
+              <a:rPr lang="en-US" sz="1500" dirty="0">
+                <a:solidFill>
+                  <a:srgbClr val="011676"/>
+                </a:solidFill>
+                <a:latin typeface="Arial" pitchFamily="34" charset="0"/>
+                <a:ea typeface="Arial" pitchFamily="34" charset="-122"/>
+                <a:cs typeface="Arial" pitchFamily="34" charset="-120"/>
+              </a:rPr>
+              <a:t>Admitir a limitação já é uma correção: converte o invisível em mensurável.</a:t>
+            </a:r>
+            <a:endParaRPr lang="en-US" sz="1500" dirty="0"/>
+          </a:p>
+          <a:p>
+            <a:pPr marL="342900" indent="-342900">
+              <a:lnSpc>
+                <a:spcPct val="115000"/>
+              </a:lnSpc>
+              <a:spcAft>
+                <a:spcPts val="1000"/>
+              </a:spcAft>
+              <a:buSzPct val="100000"/>
+              <a:buChar char="•"/>
+            </a:pPr>
+            <a:r>
+              <a:rPr lang="en-US" sz="1500" dirty="0">
+                <a:solidFill>
+                  <a:srgbClr val="011676"/>
+                </a:solidFill>
+                <a:latin typeface="Arial" pitchFamily="34" charset="0"/>
+                <a:ea typeface="Arial" pitchFamily="34" charset="-122"/>
+                <a:cs typeface="Arial" pitchFamily="34" charset="-120"/>
+              </a:rPr>
+              <a:t>O modelo pode acertar enquanto o código erra.</a:t>
+            </a:r>
+            <a:endParaRPr lang="en-US" sz="1500" dirty="0"/>
+          </a:p>
+          <a:p>
+            <a:pPr marL="342900" indent="-342900">
+              <a:lnSpc>
+                <a:spcPct val="115000"/>
+              </a:lnSpc>
+              <a:spcAft>
+                <a:spcPts val="1000"/>
+              </a:spcAft>
+              <a:buSzPct val="100000"/>
+              <a:buChar char="•"/>
+            </a:pPr>
+            <a:r>
+              <a:rPr lang="en-US" sz="1500" b="1" dirty="0">
+                <a:solidFill>
+                  <a:srgbClr val="011676"/>
+                </a:solidFill>
+                <a:latin typeface="Arial" pitchFamily="34" charset="0"/>
+                <a:ea typeface="Arial" pitchFamily="34" charset="-122"/>
+                <a:cs typeface="Arial" pitchFamily="34" charset="-120"/>
+              </a:rPr>
+              <a:t>Nem todo bug deve ser corrigido agora. Mas todo bug deve ser decidido.</a:t>
+            </a:r>
+            <a:endParaRPr lang="en-US" sz="1500" dirty="0"/>
+          </a:p>
+        </p:txBody>
+      </p:sp>
+      <p:sp>
+        <p:nvSpPr>
+          <p:cNvPr id="6" name="Text 4"/>
+          <p:cNvSpPr/>
+          <p:nvPr/>
+        </p:nvSpPr>
+        <p:spPr>
+          <a:xfrm>
+            <a:off x="502920" y="4800600"/>
+            <a:ext cx="8138160" cy="274320"/>
+          </a:xfrm>
+          <a:prstGeom prst="rect">
+            <a:avLst/>
+          </a:prstGeom>
+          <a:noFill/>
+          <a:ln/>
+        </p:spPr>
+        <p:txBody>
+          <a:bodyPr wrap="square" rtlCol="0" anchor="ctr"/>
+          <a:lstStyle/>
+          <a:p>
+            <a:pPr indent="0" marL="0">
+              <a:buNone/>
+            </a:pPr>
+            <a:r>
+              <a:rPr lang="en-US" sz="900" dirty="0">
+                <a:solidFill>
+                  <a:srgbClr val="010C53">
+                    <a:alpha val="60000"/>
+                  </a:srgbClr>
+                </a:solidFill>
+                <a:latin typeface="Arial" pitchFamily="34" charset="0"/>
+                <a:ea typeface="Arial" pitchFamily="34" charset="-122"/>
+                <a:cs typeface="Arial" pitchFamily="34" charset="-120"/>
+              </a:rPr>
+              <a:t>Aula 4 — Detectar, diagnosticar e corrigir — Evals, observabilidade e conformidade</a:t>
+            </a:r>
+            <a:endParaRPr lang="en-US" sz="900" dirty="0"/>
+          </a:p>
+        </p:txBody>
+      </p:sp>
+    </p:spTree>
+  </p:cSld>
+  <p:clrMapOvr>
+    <a:masterClrMapping/>
+  </p:clrMapOvr>
+</p:sld>
+</file>
+
+<file path=ppt/slides/slide26.xml><?xml version="1.0" encoding="utf-8"?>
+<p:sld xmlns:a="http://schemas.openxmlformats.org/drawingml/2006/main" xmlns:r="http://schemas.openxmlformats.org/officeDocument/2006/relationships" xmlns:p="http://schemas.openxmlformats.org/presentationml/2006/main">
+  <p:cSld name="Slide 26">
+    <p:bg>
+      <p:bgPr>
+        <a:solidFill>
+          <a:srgbClr val="0C0C0E"/>
+        </a:solidFill>
+      </p:bgPr>
+    </p:bg>
+    <p:spTree>
+      <p:nvGrpSpPr>
+        <p:cNvPr id="1" name=""/>
+        <p:cNvGrpSpPr/>
+        <p:nvPr/>
+      </p:nvGrpSpPr>
+      <p:grpSpPr>
+        <a:xfrm>
+          <a:off x="0" y="0"/>
+          <a:ext cx="0" cy="0"/>
+          <a:chOff x="0" y="0"/>
+          <a:chExt cx="0" cy="0"/>
+        </a:xfrm>
+      </p:grpSpPr>
+      <p:sp>
+        <p:nvSpPr>
+          <p:cNvPr id="2" name="Text 0"/>
+          <p:cNvSpPr/>
+          <p:nvPr/>
+        </p:nvSpPr>
+        <p:spPr>
+          <a:xfrm>
+            <a:off x="502920" y="2011680"/>
+            <a:ext cx="8138160" cy="457200"/>
+          </a:xfrm>
+          <a:prstGeom prst="rect">
+            <a:avLst/>
+          </a:prstGeom>
+          <a:noFill/>
+          <a:ln/>
+        </p:spPr>
+        <p:txBody>
+          <a:bodyPr wrap="square" rtlCol="0" anchor="ctr"/>
+          <a:lstStyle/>
+          <a:p>
+            <a:pPr indent="0" marL="0">
+              <a:buNone/>
+            </a:pPr>
+            <a:r>
+              <a:rPr lang="en-US" sz="1400" b="1" spc="150" kern="0" dirty="0">
+                <a:solidFill>
+                  <a:srgbClr val="1F53E5"/>
+                </a:solidFill>
+                <a:latin typeface="Arial" pitchFamily="34" charset="0"/>
+                <a:ea typeface="Arial" pitchFamily="34" charset="-122"/>
+                <a:cs typeface="Arial" pitchFamily="34" charset="-120"/>
+              </a:rPr>
+              <a:t>Aula 4</a:t>
+            </a:r>
+            <a:endParaRPr lang="en-US" sz="1400" dirty="0"/>
+          </a:p>
+        </p:txBody>
+      </p:sp>
+      <p:sp>
+        <p:nvSpPr>
+          <p:cNvPr id="3" name="Text 1"/>
+          <p:cNvSpPr/>
+          <p:nvPr/>
+        </p:nvSpPr>
+        <p:spPr>
+          <a:xfrm>
+            <a:off x="502920" y="2377440"/>
+            <a:ext cx="8138160" cy="2194560"/>
+          </a:xfrm>
+          <a:prstGeom prst="rect">
+            <a:avLst/>
+          </a:prstGeom>
+          <a:noFill/>
+          <a:ln/>
+        </p:spPr>
+        <p:txBody>
+          <a:bodyPr wrap="square" rtlCol="0" anchor="ctr"/>
+          <a:lstStyle/>
+          <a:p>
+            <a:pPr indent="0" marL="0">
+              <a:lnSpc>
+                <a:spcPct val="120000"/>
+              </a:lnSpc>
+              <a:buNone/>
+            </a:pPr>
+            <a:r>
+              <a:rPr lang="en-US" sz="2400" b="1" dirty="0">
+                <a:solidFill>
+                  <a:srgbClr val="F4F5F6"/>
+                </a:solidFill>
+                <a:latin typeface="Arial" pitchFamily="34" charset="0"/>
+                <a:ea typeface="Arial" pitchFamily="34" charset="-122"/>
+                <a:cs typeface="Arial" pitchFamily="34" charset="-120"/>
+              </a:rPr>
+              <a:t>Três falhas reais.</a:t>
+            </a:r>
+            <a:endParaRPr lang="en-US" sz="2400" dirty="0"/>
+          </a:p>
+          <a:p>
+            <a:pPr indent="0" marL="0">
+              <a:lnSpc>
+                <a:spcPct val="120000"/>
+              </a:lnSpc>
+              <a:buNone/>
+            </a:pPr>
+            <a:r>
+              <a:rPr lang="en-US" sz="2400" b="1" dirty="0">
+                <a:solidFill>
+                  <a:srgbClr val="F4F5F6"/>
+                </a:solidFill>
+                <a:latin typeface="Arial" pitchFamily="34" charset="0"/>
+                <a:ea typeface="Arial" pitchFamily="34" charset="-122"/>
+                <a:cs typeface="Arial" pitchFamily="34" charset="-120"/>
+              </a:rPr>
+              <a:t>Nenhuma delas gritou sozinha.</a:t>
+            </a:r>
+            <a:endParaRPr lang="en-US" sz="2400" dirty="0"/>
+          </a:p>
+        </p:txBody>
+      </p:sp>
+    </p:spTree>
+  </p:cSld>
+  <p:clrMapOvr>
+    <a:masterClrMapping/>
+  </p:clrMapOvr>
+</p:sld>
+</file>
+
 <file path=ppt/slides/slide3.xml><?xml version="1.0" encoding="utf-8"?>
 <p:sld xmlns:a="http://schemas.openxmlformats.org/drawingml/2006/main" xmlns:r="http://schemas.openxmlformats.org/officeDocument/2006/relationships" xmlns:p="http://schemas.openxmlformats.org/presentationml/2006/main">
   <p:cSld name="Slide 3">
@@ -5197,7 +8897,7 @@
                 <a:ea typeface="Arial" pitchFamily="34" charset="-122"/>
                 <a:cs typeface="Arial" pitchFamily="34" charset="-120"/>
               </a:rPr>
-              <a:t>O estado em produção hoje</a:t>
+              <a:t>Mandei a foto do cupom. E aí?</a:t>
             </a:r>
             <a:endParaRPr lang="en-US" sz="2600" dirty="0"/>
           </a:p>
@@ -5266,7 +8966,7 @@
                 <a:ea typeface="Arial" pitchFamily="34" charset="-122"/>
                 <a:cs typeface="Arial" pitchFamily="34" charset="-120"/>
               </a:rPr>
-              <a:t>Produção está em master, com as falhas do Telegram preservadas de propósito.</a:t>
+              <a:t>Ação completamente razoável de um usuário: fotografar o cupom e mandar pro bot.</a:t>
             </a:r>
             <a:endParaRPr lang="en-US" sz="1500" dirty="0"/>
           </a:p>
@@ -5290,7 +8990,7 @@
                 <a:ea typeface="Arial" pitchFamily="34" charset="-122"/>
                 <a:cs typeface="Arial" pitchFamily="34" charset="-120"/>
               </a:rPr>
-              <a:t>Dois PRs abertos, aguardando este vídeo: #4 (diagnóstico do Telegram) e #6 (nota por foto).</a:t>
+              <a:t>Resultado: nenhuma resposta, nenhuma reação na mensagem, nenhum item novo no estoque.</a:t>
             </a:r>
             <a:endParaRPr lang="en-US" sz="1500" dirty="0"/>
           </a:p>
@@ -5314,7 +9014,7 @@
                 <a:ea typeface="Arial" pitchFamily="34" charset="-122"/>
                 <a:cs typeface="Arial" pitchFamily="34" charset="-120"/>
               </a:rPr>
-              <a:t>A ordem importa: #4 antes do #6 — o #6 usa o avisar() que o #4 introduz.</a:t>
+              <a:t>Do lado de quem usa, o produto simplesmente ignorou.</a:t>
             </a:r>
             <a:endParaRPr lang="en-US" sz="1500" dirty="0"/>
           </a:p>
@@ -5426,7 +9126,7 @@
                 <a:ea typeface="Arial" pitchFamily="34" charset="-122"/>
                 <a:cs typeface="Arial" pitchFamily="34" charset="-120"/>
               </a:rPr>
-              <a:t>VÍDEO 4.1 — DADO REAL</a:t>
+              <a:t>VÍDEO 4.1</a:t>
             </a:r>
             <a:endParaRPr lang="en-US" sz="1100" dirty="0"/>
           </a:p>
@@ -5465,7 +9165,7 @@
                 <a:ea typeface="Arial" pitchFamily="34" charset="-122"/>
                 <a:cs typeface="Arial" pitchFamily="34" charset="-120"/>
               </a:rPr>
-              <a:t>Eixo de custo, por operação</a:t>
+              <a:t>Onde eu olhei — e o que encontrei</a:t>
             </a:r>
             <a:endParaRPr lang="en-US" sz="2600" dirty="0"/>
           </a:p>
@@ -5494,11 +9194,8 @@
             <a:tbl>
               <a:tblPr/>
               <a:tblGrid>
-                <a:gridCol w="2468880"/>
-                <a:gridCol w="548640"/>
-                <a:gridCol w="1554480"/>
-                <a:gridCol w="1737360"/>
-                <a:gridCol w="1828800"/>
+                <a:gridCol w="3840480"/>
+                <a:gridCol w="4572000"/>
               </a:tblGrid>
               <a:tr h="0">
                 <a:tc>
@@ -5518,7 +9215,7 @@
                           <a:ea typeface="Arial" pitchFamily="34" charset="-122"/>
                           <a:cs typeface="Arial" pitchFamily="34" charset="-120"/>
                         </a:rPr>
-                        <a:t>Operação</a:t>
+                        <a:t>Onde</a:t>
                       </a:r>
                       <a:endParaRPr lang="en-US" sz="1100" dirty="0">
                         <a:latin typeface="Arial" charset="0"/>
@@ -5586,211 +9283,7 @@
                           <a:ea typeface="Arial" pitchFamily="34" charset="-122"/>
                           <a:cs typeface="Arial" pitchFamily="34" charset="-120"/>
                         </a:rPr>
-                        <a:t>n</a:t>
-                      </a:r>
-                      <a:endParaRPr lang="en-US" sz="1100" dirty="0">
-                        <a:latin typeface="Arial" charset="0"/>
-                        <a:ea typeface="Arial" charset="0"/>
-                        <a:cs typeface="Arial" charset="0"/>
-                      </a:endParaRPr>
-                    </a:p>
-                  </a:txBody>
-                  <a:tcPr marL="91440" marR="91440" marT="45720" marB="45720" anchor="ctr">
-                    <a:lnL w="6350" cap="flat" cmpd="sng" algn="ctr">
-                      <a:solidFill>
-                        <a:srgbClr val="D8DCEA"/>
-                      </a:solidFill>
-                      <a:prstDash val="solid"/>
-                      <a:round/>
-                      <a:headEnd type="none" w="med" len="med"/>
-                      <a:tailEnd type="none" w="med" len="med"/>
-                    </a:lnL>
-                    <a:lnR w="6350" cap="flat" cmpd="sng" algn="ctr">
-                      <a:solidFill>
-                        <a:srgbClr val="D8DCEA"/>
-                      </a:solidFill>
-                      <a:prstDash val="solid"/>
-                      <a:round/>
-                      <a:headEnd type="none" w="med" len="med"/>
-                      <a:tailEnd type="none" w="med" len="med"/>
-                    </a:lnR>
-                    <a:lnT w="6350" cap="flat" cmpd="sng" algn="ctr">
-                      <a:solidFill>
-                        <a:srgbClr val="D8DCEA"/>
-                      </a:solidFill>
-                      <a:prstDash val="solid"/>
-                      <a:round/>
-                      <a:headEnd type="none" w="med" len="med"/>
-                      <a:tailEnd type="none" w="med" len="med"/>
-                    </a:lnT>
-                    <a:lnB w="6350" cap="flat" cmpd="sng" algn="ctr">
-                      <a:solidFill>
-                        <a:srgbClr val="D8DCEA"/>
-                      </a:solidFill>
-                      <a:prstDash val="solid"/>
-                      <a:round/>
-                      <a:headEnd type="none" w="med" len="med"/>
-                      <a:tailEnd type="none" w="med" len="med"/>
-                    </a:lnB>
-                    <a:solidFill>
-                      <a:srgbClr val="010C53"/>
-                    </a:solidFill>
-                  </a:tcPr>
-                </a:tc>
-                <a:tc>
-                  <a:txBody>
-                    <a:bodyPr/>
-                    <a:lstStyle/>
-                    <a:p>
-                      <a:pPr indent="0" marL="0">
-                        <a:buNone/>
-                      </a:pPr>
-                      <a:r>
-                        <a:rPr lang="en-US" sz="1100" b="1" dirty="0">
-                          <a:solidFill>
-                            <a:srgbClr val="F4F5F6"/>
-                          </a:solidFill>
-                          <a:latin typeface="Arial" pitchFamily="34" charset="0"/>
-                          <a:ea typeface="Arial" pitchFamily="34" charset="-122"/>
-                          <a:cs typeface="Arial" pitchFamily="34" charset="-120"/>
-                        </a:rPr>
-                        <a:t>Custo médio</a:t>
-                      </a:r>
-                      <a:endParaRPr lang="en-US" sz="1100" dirty="0">
-                        <a:latin typeface="Arial" charset="0"/>
-                        <a:ea typeface="Arial" charset="0"/>
-                        <a:cs typeface="Arial" charset="0"/>
-                      </a:endParaRPr>
-                    </a:p>
-                  </a:txBody>
-                  <a:tcPr marL="91440" marR="91440" marT="45720" marB="45720" anchor="ctr">
-                    <a:lnL w="6350" cap="flat" cmpd="sng" algn="ctr">
-                      <a:solidFill>
-                        <a:srgbClr val="D8DCEA"/>
-                      </a:solidFill>
-                      <a:prstDash val="solid"/>
-                      <a:round/>
-                      <a:headEnd type="none" w="med" len="med"/>
-                      <a:tailEnd type="none" w="med" len="med"/>
-                    </a:lnL>
-                    <a:lnR w="6350" cap="flat" cmpd="sng" algn="ctr">
-                      <a:solidFill>
-                        <a:srgbClr val="D8DCEA"/>
-                      </a:solidFill>
-                      <a:prstDash val="solid"/>
-                      <a:round/>
-                      <a:headEnd type="none" w="med" len="med"/>
-                      <a:tailEnd type="none" w="med" len="med"/>
-                    </a:lnR>
-                    <a:lnT w="6350" cap="flat" cmpd="sng" algn="ctr">
-                      <a:solidFill>
-                        <a:srgbClr val="D8DCEA"/>
-                      </a:solidFill>
-                      <a:prstDash val="solid"/>
-                      <a:round/>
-                      <a:headEnd type="none" w="med" len="med"/>
-                      <a:tailEnd type="none" w="med" len="med"/>
-                    </a:lnT>
-                    <a:lnB w="6350" cap="flat" cmpd="sng" algn="ctr">
-                      <a:solidFill>
-                        <a:srgbClr val="D8DCEA"/>
-                      </a:solidFill>
-                      <a:prstDash val="solid"/>
-                      <a:round/>
-                      <a:headEnd type="none" w="med" len="med"/>
-                      <a:tailEnd type="none" w="med" len="med"/>
-                    </a:lnB>
-                    <a:solidFill>
-                      <a:srgbClr val="010C53"/>
-                    </a:solidFill>
-                  </a:tcPr>
-                </a:tc>
-                <a:tc>
-                  <a:txBody>
-                    <a:bodyPr/>
-                    <a:lstStyle/>
-                    <a:p>
-                      <a:pPr indent="0" marL="0">
-                        <a:buNone/>
-                      </a:pPr>
-                      <a:r>
-                        <a:rPr lang="en-US" sz="1100" b="1" dirty="0">
-                          <a:solidFill>
-                            <a:srgbClr val="F4F5F6"/>
-                          </a:solidFill>
-                          <a:latin typeface="Arial" pitchFamily="34" charset="0"/>
-                          <a:ea typeface="Arial" pitchFamily="34" charset="-122"/>
-                          <a:cs typeface="Arial" pitchFamily="34" charset="-120"/>
-                        </a:rPr>
-                        <a:t>Latência média</a:t>
-                      </a:r>
-                      <a:endParaRPr lang="en-US" sz="1100" dirty="0">
-                        <a:latin typeface="Arial" charset="0"/>
-                        <a:ea typeface="Arial" charset="0"/>
-                        <a:cs typeface="Arial" charset="0"/>
-                      </a:endParaRPr>
-                    </a:p>
-                  </a:txBody>
-                  <a:tcPr marL="91440" marR="91440" marT="45720" marB="45720" anchor="ctr">
-                    <a:lnL w="6350" cap="flat" cmpd="sng" algn="ctr">
-                      <a:solidFill>
-                        <a:srgbClr val="D8DCEA"/>
-                      </a:solidFill>
-                      <a:prstDash val="solid"/>
-                      <a:round/>
-                      <a:headEnd type="none" w="med" len="med"/>
-                      <a:tailEnd type="none" w="med" len="med"/>
-                    </a:lnL>
-                    <a:lnR w="6350" cap="flat" cmpd="sng" algn="ctr">
-                      <a:solidFill>
-                        <a:srgbClr val="D8DCEA"/>
-                      </a:solidFill>
-                      <a:prstDash val="solid"/>
-                      <a:round/>
-                      <a:headEnd type="none" w="med" len="med"/>
-                      <a:tailEnd type="none" w="med" len="med"/>
-                    </a:lnR>
-                    <a:lnT w="6350" cap="flat" cmpd="sng" algn="ctr">
-                      <a:solidFill>
-                        <a:srgbClr val="D8DCEA"/>
-                      </a:solidFill>
-                      <a:prstDash val="solid"/>
-                      <a:round/>
-                      <a:headEnd type="none" w="med" len="med"/>
-                      <a:tailEnd type="none" w="med" len="med"/>
-                    </a:lnT>
-                    <a:lnB w="6350" cap="flat" cmpd="sng" algn="ctr">
-                      <a:solidFill>
-                        <a:srgbClr val="D8DCEA"/>
-                      </a:solidFill>
-                      <a:prstDash val="solid"/>
-                      <a:round/>
-                      <a:headEnd type="none" w="med" len="med"/>
-                      <a:tailEnd type="none" w="med" len="med"/>
-                    </a:lnB>
-                    <a:solidFill>
-                      <a:srgbClr val="010C53"/>
-                    </a:solidFill>
-                  </a:tcPr>
-                </a:tc>
-                <a:tc>
-                  <a:txBody>
-                    <a:bodyPr/>
-                    <a:lstStyle/>
-                    <a:p>
-                      <a:pPr indent="0" marL="0">
-                        <a:buNone/>
-                      </a:pPr>
-                      <a:r>
-                        <a:rPr lang="en-US" sz="1100" b="1" dirty="0">
-                          <a:solidFill>
-                            <a:srgbClr val="F4F5F6"/>
-                          </a:solidFill>
-                          <a:latin typeface="Arial" pitchFamily="34" charset="0"/>
-                          <a:ea typeface="Arial" pitchFamily="34" charset="-122"/>
-                          <a:cs typeface="Arial" pitchFamily="34" charset="-120"/>
-                        </a:rPr>
-                        <a:t>% do custo</a:t>
+                        <a:t>O que tem</a:t>
                       </a:r>
                       <a:endParaRPr lang="en-US" sz="1100" dirty="0">
                         <a:latin typeface="Arial" charset="0"/>
@@ -5860,7 +9353,7 @@
                           <a:ea typeface="Arial" pitchFamily="34" charset="-122"/>
                           <a:cs typeface="Arial" pitchFamily="34" charset="-120"/>
                         </a:rPr>
-                        <a:t>mediar-cardapio</a:t>
+                        <a:t>Resposta no Telegram</a:t>
                       </a:r>
                       <a:endParaRPr lang="en-US" sz="1100" dirty="0">
                         <a:latin typeface="Arial" charset="0"/>
@@ -5928,211 +9421,7 @@
                           <a:ea typeface="Arial" pitchFamily="34" charset="-122"/>
                           <a:cs typeface="Arial" pitchFamily="34" charset="-120"/>
                         </a:rPr>
-                        <a:t>10</a:t>
-                      </a:r>
-                      <a:endParaRPr lang="en-US" sz="1100" dirty="0">
-                        <a:latin typeface="Arial" charset="0"/>
-                        <a:ea typeface="Arial" charset="0"/>
-                        <a:cs typeface="Arial" charset="0"/>
-                      </a:endParaRPr>
-                    </a:p>
-                  </a:txBody>
-                  <a:tcPr marL="91440" marR="91440" marT="45720" marB="45720" anchor="t">
-                    <a:lnL w="6350" cap="flat" cmpd="sng" algn="ctr">
-                      <a:solidFill>
-                        <a:srgbClr val="D8DCEA"/>
-                      </a:solidFill>
-                      <a:prstDash val="solid"/>
-                      <a:round/>
-                      <a:headEnd type="none" w="med" len="med"/>
-                      <a:tailEnd type="none" w="med" len="med"/>
-                    </a:lnL>
-                    <a:lnR w="6350" cap="flat" cmpd="sng" algn="ctr">
-                      <a:solidFill>
-                        <a:srgbClr val="D8DCEA"/>
-                      </a:solidFill>
-                      <a:prstDash val="solid"/>
-                      <a:round/>
-                      <a:headEnd type="none" w="med" len="med"/>
-                      <a:tailEnd type="none" w="med" len="med"/>
-                    </a:lnR>
-                    <a:lnT w="6350" cap="flat" cmpd="sng" algn="ctr">
-                      <a:solidFill>
-                        <a:srgbClr val="D8DCEA"/>
-                      </a:solidFill>
-                      <a:prstDash val="solid"/>
-                      <a:round/>
-                      <a:headEnd type="none" w="med" len="med"/>
-                      <a:tailEnd type="none" w="med" len="med"/>
-                    </a:lnT>
-                    <a:lnB w="6350" cap="flat" cmpd="sng" algn="ctr">
-                      <a:solidFill>
-                        <a:srgbClr val="D8DCEA"/>
-                      </a:solidFill>
-                      <a:prstDash val="solid"/>
-                      <a:round/>
-                      <a:headEnd type="none" w="med" len="med"/>
-                      <a:tailEnd type="none" w="med" len="med"/>
-                    </a:lnB>
-                    <a:solidFill>
-                      <a:srgbClr val="FFFFFF"/>
-                    </a:solidFill>
-                  </a:tcPr>
-                </a:tc>
-                <a:tc>
-                  <a:txBody>
-                    <a:bodyPr/>
-                    <a:lstStyle/>
-                    <a:p>
-                      <a:pPr indent="0" marL="0">
-                        <a:buNone/>
-                      </a:pPr>
-                      <a:r>
-                        <a:rPr lang="en-US" sz="1100" dirty="0">
-                          <a:solidFill>
-                            <a:srgbClr val="011676"/>
-                          </a:solidFill>
-                          <a:latin typeface="Arial" pitchFamily="34" charset="0"/>
-                          <a:ea typeface="Arial" pitchFamily="34" charset="-122"/>
-                          <a:cs typeface="Arial" pitchFamily="34" charset="-120"/>
-                        </a:rPr>
-                        <a:t>US$ 0,1121</a:t>
-                      </a:r>
-                      <a:endParaRPr lang="en-US" sz="1100" dirty="0">
-                        <a:latin typeface="Arial" charset="0"/>
-                        <a:ea typeface="Arial" charset="0"/>
-                        <a:cs typeface="Arial" charset="0"/>
-                      </a:endParaRPr>
-                    </a:p>
-                  </a:txBody>
-                  <a:tcPr marL="91440" marR="91440" marT="45720" marB="45720" anchor="t">
-                    <a:lnL w="6350" cap="flat" cmpd="sng" algn="ctr">
-                      <a:solidFill>
-                        <a:srgbClr val="D8DCEA"/>
-                      </a:solidFill>
-                      <a:prstDash val="solid"/>
-                      <a:round/>
-                      <a:headEnd type="none" w="med" len="med"/>
-                      <a:tailEnd type="none" w="med" len="med"/>
-                    </a:lnL>
-                    <a:lnR w="6350" cap="flat" cmpd="sng" algn="ctr">
-                      <a:solidFill>
-                        <a:srgbClr val="D8DCEA"/>
-                      </a:solidFill>
-                      <a:prstDash val="solid"/>
-                      <a:round/>
-                      <a:headEnd type="none" w="med" len="med"/>
-                      <a:tailEnd type="none" w="med" len="med"/>
-                    </a:lnR>
-                    <a:lnT w="6350" cap="flat" cmpd="sng" algn="ctr">
-                      <a:solidFill>
-                        <a:srgbClr val="D8DCEA"/>
-                      </a:solidFill>
-                      <a:prstDash val="solid"/>
-                      <a:round/>
-                      <a:headEnd type="none" w="med" len="med"/>
-                      <a:tailEnd type="none" w="med" len="med"/>
-                    </a:lnT>
-                    <a:lnB w="6350" cap="flat" cmpd="sng" algn="ctr">
-                      <a:solidFill>
-                        <a:srgbClr val="D8DCEA"/>
-                      </a:solidFill>
-                      <a:prstDash val="solid"/>
-                      <a:round/>
-                      <a:headEnd type="none" w="med" len="med"/>
-                      <a:tailEnd type="none" w="med" len="med"/>
-                    </a:lnB>
-                    <a:solidFill>
-                      <a:srgbClr val="FFFFFF"/>
-                    </a:solidFill>
-                  </a:tcPr>
-                </a:tc>
-                <a:tc>
-                  <a:txBody>
-                    <a:bodyPr/>
-                    <a:lstStyle/>
-                    <a:p>
-                      <a:pPr indent="0" marL="0">
-                        <a:buNone/>
-                      </a:pPr>
-                      <a:r>
-                        <a:rPr lang="en-US" sz="1100" dirty="0">
-                          <a:solidFill>
-                            <a:srgbClr val="011676"/>
-                          </a:solidFill>
-                          <a:latin typeface="Arial" pitchFamily="34" charset="0"/>
-                          <a:ea typeface="Arial" pitchFamily="34" charset="-122"/>
-                          <a:cs typeface="Arial" pitchFamily="34" charset="-120"/>
-                        </a:rPr>
-                        <a:t>45,4 s</a:t>
-                      </a:r>
-                      <a:endParaRPr lang="en-US" sz="1100" dirty="0">
-                        <a:latin typeface="Arial" charset="0"/>
-                        <a:ea typeface="Arial" charset="0"/>
-                        <a:cs typeface="Arial" charset="0"/>
-                      </a:endParaRPr>
-                    </a:p>
-                  </a:txBody>
-                  <a:tcPr marL="91440" marR="91440" marT="45720" marB="45720" anchor="t">
-                    <a:lnL w="6350" cap="flat" cmpd="sng" algn="ctr">
-                      <a:solidFill>
-                        <a:srgbClr val="D8DCEA"/>
-                      </a:solidFill>
-                      <a:prstDash val="solid"/>
-                      <a:round/>
-                      <a:headEnd type="none" w="med" len="med"/>
-                      <a:tailEnd type="none" w="med" len="med"/>
-                    </a:lnL>
-                    <a:lnR w="6350" cap="flat" cmpd="sng" algn="ctr">
-                      <a:solidFill>
-                        <a:srgbClr val="D8DCEA"/>
-                      </a:solidFill>
-                      <a:prstDash val="solid"/>
-                      <a:round/>
-                      <a:headEnd type="none" w="med" len="med"/>
-                      <a:tailEnd type="none" w="med" len="med"/>
-                    </a:lnR>
-                    <a:lnT w="6350" cap="flat" cmpd="sng" algn="ctr">
-                      <a:solidFill>
-                        <a:srgbClr val="D8DCEA"/>
-                      </a:solidFill>
-                      <a:prstDash val="solid"/>
-                      <a:round/>
-                      <a:headEnd type="none" w="med" len="med"/>
-                      <a:tailEnd type="none" w="med" len="med"/>
-                    </a:lnT>
-                    <a:lnB w="6350" cap="flat" cmpd="sng" algn="ctr">
-                      <a:solidFill>
-                        <a:srgbClr val="D8DCEA"/>
-                      </a:solidFill>
-                      <a:prstDash val="solid"/>
-                      <a:round/>
-                      <a:headEnd type="none" w="med" len="med"/>
-                      <a:tailEnd type="none" w="med" len="med"/>
-                    </a:lnB>
-                    <a:solidFill>
-                      <a:srgbClr val="FFFFFF"/>
-                    </a:solidFill>
-                  </a:tcPr>
-                </a:tc>
-                <a:tc>
-                  <a:txBody>
-                    <a:bodyPr/>
-                    <a:lstStyle/>
-                    <a:p>
-                      <a:pPr indent="0" marL="0">
-                        <a:buNone/>
-                      </a:pPr>
-                      <a:r>
-                        <a:rPr lang="en-US" sz="1100" dirty="0">
-                          <a:solidFill>
-                            <a:srgbClr val="011676"/>
-                          </a:solidFill>
-                          <a:latin typeface="Arial" pitchFamily="34" charset="0"/>
-                          <a:ea typeface="Arial" pitchFamily="34" charset="-122"/>
-                          <a:cs typeface="Arial" pitchFamily="34" charset="-120"/>
-                        </a:rPr>
-                        <a:t>68 %</a:t>
+                        <a:t>nada</a:t>
                       </a:r>
                       <a:endParaRPr lang="en-US" sz="1100" dirty="0">
                         <a:latin typeface="Arial" charset="0"/>
@@ -6202,7 +9491,7 @@
                           <a:ea typeface="Arial" pitchFamily="34" charset="-122"/>
                           <a:cs typeface="Arial" pitchFamily="34" charset="-120"/>
                         </a:rPr>
-                        <a:t>sugerir-receita</a:t>
+                        <a:t>Log da aplicação</a:t>
                       </a:r>
                       <a:endParaRPr lang="en-US" sz="1100" dirty="0">
                         <a:latin typeface="Arial" charset="0"/>
@@ -6270,211 +9559,7 @@
                           <a:ea typeface="Arial" pitchFamily="34" charset="-122"/>
                           <a:cs typeface="Arial" pitchFamily="34" charset="-120"/>
                         </a:rPr>
-                        <a:t>13</a:t>
-                      </a:r>
-                      <a:endParaRPr lang="en-US" sz="1100" dirty="0">
-                        <a:latin typeface="Arial" charset="0"/>
-                        <a:ea typeface="Arial" charset="0"/>
-                        <a:cs typeface="Arial" charset="0"/>
-                      </a:endParaRPr>
-                    </a:p>
-                  </a:txBody>
-                  <a:tcPr marL="91440" marR="91440" marT="45720" marB="45720" anchor="t">
-                    <a:lnL w="6350" cap="flat" cmpd="sng" algn="ctr">
-                      <a:solidFill>
-                        <a:srgbClr val="D8DCEA"/>
-                      </a:solidFill>
-                      <a:prstDash val="solid"/>
-                      <a:round/>
-                      <a:headEnd type="none" w="med" len="med"/>
-                      <a:tailEnd type="none" w="med" len="med"/>
-                    </a:lnL>
-                    <a:lnR w="6350" cap="flat" cmpd="sng" algn="ctr">
-                      <a:solidFill>
-                        <a:srgbClr val="D8DCEA"/>
-                      </a:solidFill>
-                      <a:prstDash val="solid"/>
-                      <a:round/>
-                      <a:headEnd type="none" w="med" len="med"/>
-                      <a:tailEnd type="none" w="med" len="med"/>
-                    </a:lnR>
-                    <a:lnT w="6350" cap="flat" cmpd="sng" algn="ctr">
-                      <a:solidFill>
-                        <a:srgbClr val="D8DCEA"/>
-                      </a:solidFill>
-                      <a:prstDash val="solid"/>
-                      <a:round/>
-                      <a:headEnd type="none" w="med" len="med"/>
-                      <a:tailEnd type="none" w="med" len="med"/>
-                    </a:lnT>
-                    <a:lnB w="6350" cap="flat" cmpd="sng" algn="ctr">
-                      <a:solidFill>
-                        <a:srgbClr val="D8DCEA"/>
-                      </a:solidFill>
-                      <a:prstDash val="solid"/>
-                      <a:round/>
-                      <a:headEnd type="none" w="med" len="med"/>
-                      <a:tailEnd type="none" w="med" len="med"/>
-                    </a:lnB>
-                    <a:solidFill>
-                      <a:srgbClr val="F4F5F6"/>
-                    </a:solidFill>
-                  </a:tcPr>
-                </a:tc>
-                <a:tc>
-                  <a:txBody>
-                    <a:bodyPr/>
-                    <a:lstStyle/>
-                    <a:p>
-                      <a:pPr indent="0" marL="0">
-                        <a:buNone/>
-                      </a:pPr>
-                      <a:r>
-                        <a:rPr lang="en-US" sz="1100" dirty="0">
-                          <a:solidFill>
-                            <a:srgbClr val="011676"/>
-                          </a:solidFill>
-                          <a:latin typeface="Arial" pitchFamily="34" charset="0"/>
-                          <a:ea typeface="Arial" pitchFamily="34" charset="-122"/>
-                          <a:cs typeface="Arial" pitchFamily="34" charset="-120"/>
-                        </a:rPr>
-                        <a:t>US$ 0,0227</a:t>
-                      </a:r>
-                      <a:endParaRPr lang="en-US" sz="1100" dirty="0">
-                        <a:latin typeface="Arial" charset="0"/>
-                        <a:ea typeface="Arial" charset="0"/>
-                        <a:cs typeface="Arial" charset="0"/>
-                      </a:endParaRPr>
-                    </a:p>
-                  </a:txBody>
-                  <a:tcPr marL="91440" marR="91440" marT="45720" marB="45720" anchor="t">
-                    <a:lnL w="6350" cap="flat" cmpd="sng" algn="ctr">
-                      <a:solidFill>
-                        <a:srgbClr val="D8DCEA"/>
-                      </a:solidFill>
-                      <a:prstDash val="solid"/>
-                      <a:round/>
-                      <a:headEnd type="none" w="med" len="med"/>
-                      <a:tailEnd type="none" w="med" len="med"/>
-                    </a:lnL>
-                    <a:lnR w="6350" cap="flat" cmpd="sng" algn="ctr">
-                      <a:solidFill>
-                        <a:srgbClr val="D8DCEA"/>
-                      </a:solidFill>
-                      <a:prstDash val="solid"/>
-                      <a:round/>
-                      <a:headEnd type="none" w="med" len="med"/>
-                      <a:tailEnd type="none" w="med" len="med"/>
-                    </a:lnR>
-                    <a:lnT w="6350" cap="flat" cmpd="sng" algn="ctr">
-                      <a:solidFill>
-                        <a:srgbClr val="D8DCEA"/>
-                      </a:solidFill>
-                      <a:prstDash val="solid"/>
-                      <a:round/>
-                      <a:headEnd type="none" w="med" len="med"/>
-                      <a:tailEnd type="none" w="med" len="med"/>
-                    </a:lnT>
-                    <a:lnB w="6350" cap="flat" cmpd="sng" algn="ctr">
-                      <a:solidFill>
-                        <a:srgbClr val="D8DCEA"/>
-                      </a:solidFill>
-                      <a:prstDash val="solid"/>
-                      <a:round/>
-                      <a:headEnd type="none" w="med" len="med"/>
-                      <a:tailEnd type="none" w="med" len="med"/>
-                    </a:lnB>
-                    <a:solidFill>
-                      <a:srgbClr val="F4F5F6"/>
-                    </a:solidFill>
-                  </a:tcPr>
-                </a:tc>
-                <a:tc>
-                  <a:txBody>
-                    <a:bodyPr/>
-                    <a:lstStyle/>
-                    <a:p>
-                      <a:pPr indent="0" marL="0">
-                        <a:buNone/>
-                      </a:pPr>
-                      <a:r>
-                        <a:rPr lang="en-US" sz="1100" dirty="0">
-                          <a:solidFill>
-                            <a:srgbClr val="011676"/>
-                          </a:solidFill>
-                          <a:latin typeface="Arial" pitchFamily="34" charset="0"/>
-                          <a:ea typeface="Arial" pitchFamily="34" charset="-122"/>
-                          <a:cs typeface="Arial" pitchFamily="34" charset="-120"/>
-                        </a:rPr>
-                        <a:t>23,3 s</a:t>
-                      </a:r>
-                      <a:endParaRPr lang="en-US" sz="1100" dirty="0">
-                        <a:latin typeface="Arial" charset="0"/>
-                        <a:ea typeface="Arial" charset="0"/>
-                        <a:cs typeface="Arial" charset="0"/>
-                      </a:endParaRPr>
-                    </a:p>
-                  </a:txBody>
-                  <a:tcPr marL="91440" marR="91440" marT="45720" marB="45720" anchor="t">
-                    <a:lnL w="6350" cap="flat" cmpd="sng" algn="ctr">
-                      <a:solidFill>
-                        <a:srgbClr val="D8DCEA"/>
-                      </a:solidFill>
-                      <a:prstDash val="solid"/>
-                      <a:round/>
-                      <a:headEnd type="none" w="med" len="med"/>
-                      <a:tailEnd type="none" w="med" len="med"/>
-                    </a:lnL>
-                    <a:lnR w="6350" cap="flat" cmpd="sng" algn="ctr">
-                      <a:solidFill>
-                        <a:srgbClr val="D8DCEA"/>
-                      </a:solidFill>
-                      <a:prstDash val="solid"/>
-                      <a:round/>
-                      <a:headEnd type="none" w="med" len="med"/>
-                      <a:tailEnd type="none" w="med" len="med"/>
-                    </a:lnR>
-                    <a:lnT w="6350" cap="flat" cmpd="sng" algn="ctr">
-                      <a:solidFill>
-                        <a:srgbClr val="D8DCEA"/>
-                      </a:solidFill>
-                      <a:prstDash val="solid"/>
-                      <a:round/>
-                      <a:headEnd type="none" w="med" len="med"/>
-                      <a:tailEnd type="none" w="med" len="med"/>
-                    </a:lnT>
-                    <a:lnB w="6350" cap="flat" cmpd="sng" algn="ctr">
-                      <a:solidFill>
-                        <a:srgbClr val="D8DCEA"/>
-                      </a:solidFill>
-                      <a:prstDash val="solid"/>
-                      <a:round/>
-                      <a:headEnd type="none" w="med" len="med"/>
-                      <a:tailEnd type="none" w="med" len="med"/>
-                    </a:lnB>
-                    <a:solidFill>
-                      <a:srgbClr val="F4F5F6"/>
-                    </a:solidFill>
-                  </a:tcPr>
-                </a:tc>
-                <a:tc>
-                  <a:txBody>
-                    <a:bodyPr/>
-                    <a:lstStyle/>
-                    <a:p>
-                      <a:pPr indent="0" marL="0">
-                        <a:buNone/>
-                      </a:pPr>
-                      <a:r>
-                        <a:rPr lang="en-US" sz="1100" dirty="0">
-                          <a:solidFill>
-                            <a:srgbClr val="011676"/>
-                          </a:solidFill>
-                          <a:latin typeface="Arial" pitchFamily="34" charset="0"/>
-                          <a:ea typeface="Arial" pitchFamily="34" charset="-122"/>
-                          <a:cs typeface="Arial" pitchFamily="34" charset="-120"/>
-                        </a:rPr>
-                        <a:t>18 %</a:t>
+                        <a:t>nenhuma linha</a:t>
                       </a:r>
                       <a:endParaRPr lang="en-US" sz="1100" dirty="0">
                         <a:latin typeface="Arial" charset="0"/>
@@ -6544,7 +9629,7 @@
                           <a:ea typeface="Arial" pitchFamily="34" charset="-122"/>
                           <a:cs typeface="Arial" pitchFamily="34" charset="-120"/>
                         </a:rPr>
-                        <a:t>ingerir-relato</a:t>
+                        <a:t>Trace no Langfuse</a:t>
                       </a:r>
                       <a:endParaRPr lang="en-US" sz="1100" dirty="0">
                         <a:latin typeface="Arial" charset="0"/>
@@ -6612,211 +9697,7 @@
                           <a:ea typeface="Arial" pitchFamily="34" charset="-122"/>
                           <a:cs typeface="Arial" pitchFamily="34" charset="-120"/>
                         </a:rPr>
-                        <a:t>30</a:t>
-                      </a:r>
-                      <a:endParaRPr lang="en-US" sz="1100" dirty="0">
-                        <a:latin typeface="Arial" charset="0"/>
-                        <a:ea typeface="Arial" charset="0"/>
-                        <a:cs typeface="Arial" charset="0"/>
-                      </a:endParaRPr>
-                    </a:p>
-                  </a:txBody>
-                  <a:tcPr marL="91440" marR="91440" marT="45720" marB="45720" anchor="t">
-                    <a:lnL w="6350" cap="flat" cmpd="sng" algn="ctr">
-                      <a:solidFill>
-                        <a:srgbClr val="D8DCEA"/>
-                      </a:solidFill>
-                      <a:prstDash val="solid"/>
-                      <a:round/>
-                      <a:headEnd type="none" w="med" len="med"/>
-                      <a:tailEnd type="none" w="med" len="med"/>
-                    </a:lnL>
-                    <a:lnR w="6350" cap="flat" cmpd="sng" algn="ctr">
-                      <a:solidFill>
-                        <a:srgbClr val="D8DCEA"/>
-                      </a:solidFill>
-                      <a:prstDash val="solid"/>
-                      <a:round/>
-                      <a:headEnd type="none" w="med" len="med"/>
-                      <a:tailEnd type="none" w="med" len="med"/>
-                    </a:lnR>
-                    <a:lnT w="6350" cap="flat" cmpd="sng" algn="ctr">
-                      <a:solidFill>
-                        <a:srgbClr val="D8DCEA"/>
-                      </a:solidFill>
-                      <a:prstDash val="solid"/>
-                      <a:round/>
-                      <a:headEnd type="none" w="med" len="med"/>
-                      <a:tailEnd type="none" w="med" len="med"/>
-                    </a:lnT>
-                    <a:lnB w="6350" cap="flat" cmpd="sng" algn="ctr">
-                      <a:solidFill>
-                        <a:srgbClr val="D8DCEA"/>
-                      </a:solidFill>
-                      <a:prstDash val="solid"/>
-                      <a:round/>
-                      <a:headEnd type="none" w="med" len="med"/>
-                      <a:tailEnd type="none" w="med" len="med"/>
-                    </a:lnB>
-                    <a:solidFill>
-                      <a:srgbClr val="FFFFFF"/>
-                    </a:solidFill>
-                  </a:tcPr>
-                </a:tc>
-                <a:tc>
-                  <a:txBody>
-                    <a:bodyPr/>
-                    <a:lstStyle/>
-                    <a:p>
-                      <a:pPr indent="0" marL="0">
-                        <a:buNone/>
-                      </a:pPr>
-                      <a:r>
-                        <a:rPr lang="en-US" sz="1100" dirty="0">
-                          <a:solidFill>
-                            <a:srgbClr val="011676"/>
-                          </a:solidFill>
-                          <a:latin typeface="Arial" pitchFamily="34" charset="0"/>
-                          <a:ea typeface="Arial" pitchFamily="34" charset="-122"/>
-                          <a:cs typeface="Arial" pitchFamily="34" charset="-120"/>
-                        </a:rPr>
-                        <a:t>US$ 0,0051</a:t>
-                      </a:r>
-                      <a:endParaRPr lang="en-US" sz="1100" dirty="0">
-                        <a:latin typeface="Arial" charset="0"/>
-                        <a:ea typeface="Arial" charset="0"/>
-                        <a:cs typeface="Arial" charset="0"/>
-                      </a:endParaRPr>
-                    </a:p>
-                  </a:txBody>
-                  <a:tcPr marL="91440" marR="91440" marT="45720" marB="45720" anchor="t">
-                    <a:lnL w="6350" cap="flat" cmpd="sng" algn="ctr">
-                      <a:solidFill>
-                        <a:srgbClr val="D8DCEA"/>
-                      </a:solidFill>
-                      <a:prstDash val="solid"/>
-                      <a:round/>
-                      <a:headEnd type="none" w="med" len="med"/>
-                      <a:tailEnd type="none" w="med" len="med"/>
-                    </a:lnL>
-                    <a:lnR w="6350" cap="flat" cmpd="sng" algn="ctr">
-                      <a:solidFill>
-                        <a:srgbClr val="D8DCEA"/>
-                      </a:solidFill>
-                      <a:prstDash val="solid"/>
-                      <a:round/>
-                      <a:headEnd type="none" w="med" len="med"/>
-                      <a:tailEnd type="none" w="med" len="med"/>
-                    </a:lnR>
-                    <a:lnT w="6350" cap="flat" cmpd="sng" algn="ctr">
-                      <a:solidFill>
-                        <a:srgbClr val="D8DCEA"/>
-                      </a:solidFill>
-                      <a:prstDash val="solid"/>
-                      <a:round/>
-                      <a:headEnd type="none" w="med" len="med"/>
-                      <a:tailEnd type="none" w="med" len="med"/>
-                    </a:lnT>
-                    <a:lnB w="6350" cap="flat" cmpd="sng" algn="ctr">
-                      <a:solidFill>
-                        <a:srgbClr val="D8DCEA"/>
-                      </a:solidFill>
-                      <a:prstDash val="solid"/>
-                      <a:round/>
-                      <a:headEnd type="none" w="med" len="med"/>
-                      <a:tailEnd type="none" w="med" len="med"/>
-                    </a:lnB>
-                    <a:solidFill>
-                      <a:srgbClr val="FFFFFF"/>
-                    </a:solidFill>
-                  </a:tcPr>
-                </a:tc>
-                <a:tc>
-                  <a:txBody>
-                    <a:bodyPr/>
-                    <a:lstStyle/>
-                    <a:p>
-                      <a:pPr indent="0" marL="0">
-                        <a:buNone/>
-                      </a:pPr>
-                      <a:r>
-                        <a:rPr lang="en-US" sz="1100" dirty="0">
-                          <a:solidFill>
-                            <a:srgbClr val="011676"/>
-                          </a:solidFill>
-                          <a:latin typeface="Arial" pitchFamily="34" charset="0"/>
-                          <a:ea typeface="Arial" pitchFamily="34" charset="-122"/>
-                          <a:cs typeface="Arial" pitchFamily="34" charset="-120"/>
-                        </a:rPr>
-                        <a:t>2,6 s</a:t>
-                      </a:r>
-                      <a:endParaRPr lang="en-US" sz="1100" dirty="0">
-                        <a:latin typeface="Arial" charset="0"/>
-                        <a:ea typeface="Arial" charset="0"/>
-                        <a:cs typeface="Arial" charset="0"/>
-                      </a:endParaRPr>
-                    </a:p>
-                  </a:txBody>
-                  <a:tcPr marL="91440" marR="91440" marT="45720" marB="45720" anchor="t">
-                    <a:lnL w="6350" cap="flat" cmpd="sng" algn="ctr">
-                      <a:solidFill>
-                        <a:srgbClr val="D8DCEA"/>
-                      </a:solidFill>
-                      <a:prstDash val="solid"/>
-                      <a:round/>
-                      <a:headEnd type="none" w="med" len="med"/>
-                      <a:tailEnd type="none" w="med" len="med"/>
-                    </a:lnL>
-                    <a:lnR w="6350" cap="flat" cmpd="sng" algn="ctr">
-                      <a:solidFill>
-                        <a:srgbClr val="D8DCEA"/>
-                      </a:solidFill>
-                      <a:prstDash val="solid"/>
-                      <a:round/>
-                      <a:headEnd type="none" w="med" len="med"/>
-                      <a:tailEnd type="none" w="med" len="med"/>
-                    </a:lnR>
-                    <a:lnT w="6350" cap="flat" cmpd="sng" algn="ctr">
-                      <a:solidFill>
-                        <a:srgbClr val="D8DCEA"/>
-                      </a:solidFill>
-                      <a:prstDash val="solid"/>
-                      <a:round/>
-                      <a:headEnd type="none" w="med" len="med"/>
-                      <a:tailEnd type="none" w="med" len="med"/>
-                    </a:lnT>
-                    <a:lnB w="6350" cap="flat" cmpd="sng" algn="ctr">
-                      <a:solidFill>
-                        <a:srgbClr val="D8DCEA"/>
-                      </a:solidFill>
-                      <a:prstDash val="solid"/>
-                      <a:round/>
-                      <a:headEnd type="none" w="med" len="med"/>
-                      <a:tailEnd type="none" w="med" len="med"/>
-                    </a:lnB>
-                    <a:solidFill>
-                      <a:srgbClr val="FFFFFF"/>
-                    </a:solidFill>
-                  </a:tcPr>
-                </a:tc>
-                <a:tc>
-                  <a:txBody>
-                    <a:bodyPr/>
-                    <a:lstStyle/>
-                    <a:p>
-                      <a:pPr indent="0" marL="0">
-                        <a:buNone/>
-                      </a:pPr>
-                      <a:r>
-                        <a:rPr lang="en-US" sz="1100" dirty="0">
-                          <a:solidFill>
-                            <a:srgbClr val="011676"/>
-                          </a:solidFill>
-                          <a:latin typeface="Arial" pitchFamily="34" charset="0"/>
-                          <a:ea typeface="Arial" pitchFamily="34" charset="-122"/>
-                          <a:cs typeface="Arial" pitchFamily="34" charset="-120"/>
-                        </a:rPr>
-                        <a:t>9 %</a:t>
+                        <a:t>nenhum trace</a:t>
                       </a:r>
                       <a:endParaRPr lang="en-US" sz="1100" dirty="0">
                         <a:latin typeface="Arial" charset="0"/>
@@ -6886,7 +9767,7 @@
                           <a:ea typeface="Arial" pitchFamily="34" charset="-122"/>
                           <a:cs typeface="Arial" pitchFamily="34" charset="-120"/>
                         </a:rPr>
-                        <a:t>ingerir-nota-fiscal</a:t>
+                        <a:t>Banco de dados</a:t>
                       </a:r>
                       <a:endParaRPr lang="en-US" sz="1100" dirty="0">
                         <a:latin typeface="Arial" charset="0"/>
@@ -6954,211 +9835,7 @@
                           <a:ea typeface="Arial" pitchFamily="34" charset="-122"/>
                           <a:cs typeface="Arial" pitchFamily="34" charset="-120"/>
                         </a:rPr>
-                        <a:t>4</a:t>
-                      </a:r>
-                      <a:endParaRPr lang="en-US" sz="1100" dirty="0">
-                        <a:latin typeface="Arial" charset="0"/>
-                        <a:ea typeface="Arial" charset="0"/>
-                        <a:cs typeface="Arial" charset="0"/>
-                      </a:endParaRPr>
-                    </a:p>
-                  </a:txBody>
-                  <a:tcPr marL="91440" marR="91440" marT="45720" marB="45720" anchor="t">
-                    <a:lnL w="6350" cap="flat" cmpd="sng" algn="ctr">
-                      <a:solidFill>
-                        <a:srgbClr val="D8DCEA"/>
-                      </a:solidFill>
-                      <a:prstDash val="solid"/>
-                      <a:round/>
-                      <a:headEnd type="none" w="med" len="med"/>
-                      <a:tailEnd type="none" w="med" len="med"/>
-                    </a:lnL>
-                    <a:lnR w="6350" cap="flat" cmpd="sng" algn="ctr">
-                      <a:solidFill>
-                        <a:srgbClr val="D8DCEA"/>
-                      </a:solidFill>
-                      <a:prstDash val="solid"/>
-                      <a:round/>
-                      <a:headEnd type="none" w="med" len="med"/>
-                      <a:tailEnd type="none" w="med" len="med"/>
-                    </a:lnR>
-                    <a:lnT w="6350" cap="flat" cmpd="sng" algn="ctr">
-                      <a:solidFill>
-                        <a:srgbClr val="D8DCEA"/>
-                      </a:solidFill>
-                      <a:prstDash val="solid"/>
-                      <a:round/>
-                      <a:headEnd type="none" w="med" len="med"/>
-                      <a:tailEnd type="none" w="med" len="med"/>
-                    </a:lnT>
-                    <a:lnB w="6350" cap="flat" cmpd="sng" algn="ctr">
-                      <a:solidFill>
-                        <a:srgbClr val="D8DCEA"/>
-                      </a:solidFill>
-                      <a:prstDash val="solid"/>
-                      <a:round/>
-                      <a:headEnd type="none" w="med" len="med"/>
-                      <a:tailEnd type="none" w="med" len="med"/>
-                    </a:lnB>
-                    <a:solidFill>
-                      <a:srgbClr val="F4F5F6"/>
-                    </a:solidFill>
-                  </a:tcPr>
-                </a:tc>
-                <a:tc>
-                  <a:txBody>
-                    <a:bodyPr/>
-                    <a:lstStyle/>
-                    <a:p>
-                      <a:pPr indent="0" marL="0">
-                        <a:buNone/>
-                      </a:pPr>
-                      <a:r>
-                        <a:rPr lang="en-US" sz="1100" dirty="0">
-                          <a:solidFill>
-                            <a:srgbClr val="011676"/>
-                          </a:solidFill>
-                          <a:latin typeface="Arial" pitchFamily="34" charset="0"/>
-                          <a:ea typeface="Arial" pitchFamily="34" charset="-122"/>
-                          <a:cs typeface="Arial" pitchFamily="34" charset="-120"/>
-                        </a:rPr>
-                        <a:t>US$ 0,0080</a:t>
-                      </a:r>
-                      <a:endParaRPr lang="en-US" sz="1100" dirty="0">
-                        <a:latin typeface="Arial" charset="0"/>
-                        <a:ea typeface="Arial" charset="0"/>
-                        <a:cs typeface="Arial" charset="0"/>
-                      </a:endParaRPr>
-                    </a:p>
-                  </a:txBody>
-                  <a:tcPr marL="91440" marR="91440" marT="45720" marB="45720" anchor="t">
-                    <a:lnL w="6350" cap="flat" cmpd="sng" algn="ctr">
-                      <a:solidFill>
-                        <a:srgbClr val="D8DCEA"/>
-                      </a:solidFill>
-                      <a:prstDash val="solid"/>
-                      <a:round/>
-                      <a:headEnd type="none" w="med" len="med"/>
-                      <a:tailEnd type="none" w="med" len="med"/>
-                    </a:lnL>
-                    <a:lnR w="6350" cap="flat" cmpd="sng" algn="ctr">
-                      <a:solidFill>
-                        <a:srgbClr val="D8DCEA"/>
-                      </a:solidFill>
-                      <a:prstDash val="solid"/>
-                      <a:round/>
-                      <a:headEnd type="none" w="med" len="med"/>
-                      <a:tailEnd type="none" w="med" len="med"/>
-                    </a:lnR>
-                    <a:lnT w="6350" cap="flat" cmpd="sng" algn="ctr">
-                      <a:solidFill>
-                        <a:srgbClr val="D8DCEA"/>
-                      </a:solidFill>
-                      <a:prstDash val="solid"/>
-                      <a:round/>
-                      <a:headEnd type="none" w="med" len="med"/>
-                      <a:tailEnd type="none" w="med" len="med"/>
-                    </a:lnT>
-                    <a:lnB w="6350" cap="flat" cmpd="sng" algn="ctr">
-                      <a:solidFill>
-                        <a:srgbClr val="D8DCEA"/>
-                      </a:solidFill>
-                      <a:prstDash val="solid"/>
-                      <a:round/>
-                      <a:headEnd type="none" w="med" len="med"/>
-                      <a:tailEnd type="none" w="med" len="med"/>
-                    </a:lnB>
-                    <a:solidFill>
-                      <a:srgbClr val="F4F5F6"/>
-                    </a:solidFill>
-                  </a:tcPr>
-                </a:tc>
-                <a:tc>
-                  <a:txBody>
-                    <a:bodyPr/>
-                    <a:lstStyle/>
-                    <a:p>
-                      <a:pPr indent="0" marL="0">
-                        <a:buNone/>
-                      </a:pPr>
-                      <a:r>
-                        <a:rPr lang="en-US" sz="1100" dirty="0">
-                          <a:solidFill>
-                            <a:srgbClr val="011676"/>
-                          </a:solidFill>
-                          <a:latin typeface="Arial" pitchFamily="34" charset="0"/>
-                          <a:ea typeface="Arial" pitchFamily="34" charset="-122"/>
-                          <a:cs typeface="Arial" pitchFamily="34" charset="-120"/>
-                        </a:rPr>
-                        <a:t>3,9 s</a:t>
-                      </a:r>
-                      <a:endParaRPr lang="en-US" sz="1100" dirty="0">
-                        <a:latin typeface="Arial" charset="0"/>
-                        <a:ea typeface="Arial" charset="0"/>
-                        <a:cs typeface="Arial" charset="0"/>
-                      </a:endParaRPr>
-                    </a:p>
-                  </a:txBody>
-                  <a:tcPr marL="91440" marR="91440" marT="45720" marB="45720" anchor="t">
-                    <a:lnL w="6350" cap="flat" cmpd="sng" algn="ctr">
-                      <a:solidFill>
-                        <a:srgbClr val="D8DCEA"/>
-                      </a:solidFill>
-                      <a:prstDash val="solid"/>
-                      <a:round/>
-                      <a:headEnd type="none" w="med" len="med"/>
-                      <a:tailEnd type="none" w="med" len="med"/>
-                    </a:lnL>
-                    <a:lnR w="6350" cap="flat" cmpd="sng" algn="ctr">
-                      <a:solidFill>
-                        <a:srgbClr val="D8DCEA"/>
-                      </a:solidFill>
-                      <a:prstDash val="solid"/>
-                      <a:round/>
-                      <a:headEnd type="none" w="med" len="med"/>
-                      <a:tailEnd type="none" w="med" len="med"/>
-                    </a:lnR>
-                    <a:lnT w="6350" cap="flat" cmpd="sng" algn="ctr">
-                      <a:solidFill>
-                        <a:srgbClr val="D8DCEA"/>
-                      </a:solidFill>
-                      <a:prstDash val="solid"/>
-                      <a:round/>
-                      <a:headEnd type="none" w="med" len="med"/>
-                      <a:tailEnd type="none" w="med" len="med"/>
-                    </a:lnT>
-                    <a:lnB w="6350" cap="flat" cmpd="sng" algn="ctr">
-                      <a:solidFill>
-                        <a:srgbClr val="D8DCEA"/>
-                      </a:solidFill>
-                      <a:prstDash val="solid"/>
-                      <a:round/>
-                      <a:headEnd type="none" w="med" len="med"/>
-                      <a:tailEnd type="none" w="med" len="med"/>
-                    </a:lnB>
-                    <a:solidFill>
-                      <a:srgbClr val="F4F5F6"/>
-                    </a:solidFill>
-                  </a:tcPr>
-                </a:tc>
-                <a:tc>
-                  <a:txBody>
-                    <a:bodyPr/>
-                    <a:lstStyle/>
-                    <a:p>
-                      <a:pPr indent="0" marL="0">
-                        <a:buNone/>
-                      </a:pPr>
-                      <a:r>
-                        <a:rPr lang="en-US" sz="1100" dirty="0">
-                          <a:solidFill>
-                            <a:srgbClr val="011676"/>
-                          </a:solidFill>
-                          <a:latin typeface="Arial" pitchFamily="34" charset="0"/>
-                          <a:ea typeface="Arial" pitchFamily="34" charset="-122"/>
-                          <a:cs typeface="Arial" pitchFamily="34" charset="-120"/>
-                        </a:rPr>
-                        <a:t>2 %</a:t>
+                        <a:t>nada</a:t>
                       </a:r>
                       <a:endParaRPr lang="en-US" sz="1100" dirty="0">
                         <a:latin typeface="Arial" charset="0"/>
@@ -7228,7 +9905,7 @@
                           <a:ea typeface="Arial" pitchFamily="34" charset="-122"/>
                           <a:cs typeface="Arial" pitchFamily="34" charset="-120"/>
                         </a:rPr>
-                        <a:t>receita-premium-semanal</a:t>
+                        <a:t>getWebhookInfo do Telegram</a:t>
                       </a:r>
                       <a:endParaRPr lang="en-US" sz="1100" dirty="0">
                         <a:latin typeface="Arial" charset="0"/>
@@ -7296,211 +9973,7 @@
                           <a:ea typeface="Arial" pitchFamily="34" charset="-122"/>
                           <a:cs typeface="Arial" pitchFamily="34" charset="-120"/>
                         </a:rPr>
-                        <a:t>1</a:t>
-                      </a:r>
-                      <a:endParaRPr lang="en-US" sz="1100" dirty="0">
-                        <a:latin typeface="Arial" charset="0"/>
-                        <a:ea typeface="Arial" charset="0"/>
-                        <a:cs typeface="Arial" charset="0"/>
-                      </a:endParaRPr>
-                    </a:p>
-                  </a:txBody>
-                  <a:tcPr marL="91440" marR="91440" marT="45720" marB="45720" anchor="t">
-                    <a:lnL w="6350" cap="flat" cmpd="sng" algn="ctr">
-                      <a:solidFill>
-                        <a:srgbClr val="D8DCEA"/>
-                      </a:solidFill>
-                      <a:prstDash val="solid"/>
-                      <a:round/>
-                      <a:headEnd type="none" w="med" len="med"/>
-                      <a:tailEnd type="none" w="med" len="med"/>
-                    </a:lnL>
-                    <a:lnR w="6350" cap="flat" cmpd="sng" algn="ctr">
-                      <a:solidFill>
-                        <a:srgbClr val="D8DCEA"/>
-                      </a:solidFill>
-                      <a:prstDash val="solid"/>
-                      <a:round/>
-                      <a:headEnd type="none" w="med" len="med"/>
-                      <a:tailEnd type="none" w="med" len="med"/>
-                    </a:lnR>
-                    <a:lnT w="6350" cap="flat" cmpd="sng" algn="ctr">
-                      <a:solidFill>
-                        <a:srgbClr val="D8DCEA"/>
-                      </a:solidFill>
-                      <a:prstDash val="solid"/>
-                      <a:round/>
-                      <a:headEnd type="none" w="med" len="med"/>
-                      <a:tailEnd type="none" w="med" len="med"/>
-                    </a:lnT>
-                    <a:lnB w="6350" cap="flat" cmpd="sng" algn="ctr">
-                      <a:solidFill>
-                        <a:srgbClr val="D8DCEA"/>
-                      </a:solidFill>
-                      <a:prstDash val="solid"/>
-                      <a:round/>
-                      <a:headEnd type="none" w="med" len="med"/>
-                      <a:tailEnd type="none" w="med" len="med"/>
-                    </a:lnB>
-                    <a:solidFill>
-                      <a:srgbClr val="FFFFFF"/>
-                    </a:solidFill>
-                  </a:tcPr>
-                </a:tc>
-                <a:tc>
-                  <a:txBody>
-                    <a:bodyPr/>
-                    <a:lstStyle/>
-                    <a:p>
-                      <a:pPr indent="0" marL="0">
-                        <a:buNone/>
-                      </a:pPr>
-                      <a:r>
-                        <a:rPr lang="en-US" sz="1100" dirty="0">
-                          <a:solidFill>
-                            <a:srgbClr val="011676"/>
-                          </a:solidFill>
-                          <a:latin typeface="Arial" pitchFamily="34" charset="0"/>
-                          <a:ea typeface="Arial" pitchFamily="34" charset="-122"/>
-                          <a:cs typeface="Arial" pitchFamily="34" charset="-120"/>
-                        </a:rPr>
-                        <a:t>US$ 0,0157</a:t>
-                      </a:r>
-                      <a:endParaRPr lang="en-US" sz="1100" dirty="0">
-                        <a:latin typeface="Arial" charset="0"/>
-                        <a:ea typeface="Arial" charset="0"/>
-                        <a:cs typeface="Arial" charset="0"/>
-                      </a:endParaRPr>
-                    </a:p>
-                  </a:txBody>
-                  <a:tcPr marL="91440" marR="91440" marT="45720" marB="45720" anchor="t">
-                    <a:lnL w="6350" cap="flat" cmpd="sng" algn="ctr">
-                      <a:solidFill>
-                        <a:srgbClr val="D8DCEA"/>
-                      </a:solidFill>
-                      <a:prstDash val="solid"/>
-                      <a:round/>
-                      <a:headEnd type="none" w="med" len="med"/>
-                      <a:tailEnd type="none" w="med" len="med"/>
-                    </a:lnL>
-                    <a:lnR w="6350" cap="flat" cmpd="sng" algn="ctr">
-                      <a:solidFill>
-                        <a:srgbClr val="D8DCEA"/>
-                      </a:solidFill>
-                      <a:prstDash val="solid"/>
-                      <a:round/>
-                      <a:headEnd type="none" w="med" len="med"/>
-                      <a:tailEnd type="none" w="med" len="med"/>
-                    </a:lnR>
-                    <a:lnT w="6350" cap="flat" cmpd="sng" algn="ctr">
-                      <a:solidFill>
-                        <a:srgbClr val="D8DCEA"/>
-                      </a:solidFill>
-                      <a:prstDash val="solid"/>
-                      <a:round/>
-                      <a:headEnd type="none" w="med" len="med"/>
-                      <a:tailEnd type="none" w="med" len="med"/>
-                    </a:lnT>
-                    <a:lnB w="6350" cap="flat" cmpd="sng" algn="ctr">
-                      <a:solidFill>
-                        <a:srgbClr val="D8DCEA"/>
-                      </a:solidFill>
-                      <a:prstDash val="solid"/>
-                      <a:round/>
-                      <a:headEnd type="none" w="med" len="med"/>
-                      <a:tailEnd type="none" w="med" len="med"/>
-                    </a:lnB>
-                    <a:solidFill>
-                      <a:srgbClr val="FFFFFF"/>
-                    </a:solidFill>
-                  </a:tcPr>
-                </a:tc>
-                <a:tc>
-                  <a:txBody>
-                    <a:bodyPr/>
-                    <a:lstStyle/>
-                    <a:p>
-                      <a:pPr indent="0" marL="0">
-                        <a:buNone/>
-                      </a:pPr>
-                      <a:r>
-                        <a:rPr lang="en-US" sz="1100" dirty="0">
-                          <a:solidFill>
-                            <a:srgbClr val="011676"/>
-                          </a:solidFill>
-                          <a:latin typeface="Arial" pitchFamily="34" charset="0"/>
-                          <a:ea typeface="Arial" pitchFamily="34" charset="-122"/>
-                          <a:cs typeface="Arial" pitchFamily="34" charset="-120"/>
-                        </a:rPr>
-                        <a:t>7,5 s</a:t>
-                      </a:r>
-                      <a:endParaRPr lang="en-US" sz="1100" dirty="0">
-                        <a:latin typeface="Arial" charset="0"/>
-                        <a:ea typeface="Arial" charset="0"/>
-                        <a:cs typeface="Arial" charset="0"/>
-                      </a:endParaRPr>
-                    </a:p>
-                  </a:txBody>
-                  <a:tcPr marL="91440" marR="91440" marT="45720" marB="45720" anchor="t">
-                    <a:lnL w="6350" cap="flat" cmpd="sng" algn="ctr">
-                      <a:solidFill>
-                        <a:srgbClr val="D8DCEA"/>
-                      </a:solidFill>
-                      <a:prstDash val="solid"/>
-                      <a:round/>
-                      <a:headEnd type="none" w="med" len="med"/>
-                      <a:tailEnd type="none" w="med" len="med"/>
-                    </a:lnL>
-                    <a:lnR w="6350" cap="flat" cmpd="sng" algn="ctr">
-                      <a:solidFill>
-                        <a:srgbClr val="D8DCEA"/>
-                      </a:solidFill>
-                      <a:prstDash val="solid"/>
-                      <a:round/>
-                      <a:headEnd type="none" w="med" len="med"/>
-                      <a:tailEnd type="none" w="med" len="med"/>
-                    </a:lnR>
-                    <a:lnT w="6350" cap="flat" cmpd="sng" algn="ctr">
-                      <a:solidFill>
-                        <a:srgbClr val="D8DCEA"/>
-                      </a:solidFill>
-                      <a:prstDash val="solid"/>
-                      <a:round/>
-                      <a:headEnd type="none" w="med" len="med"/>
-                      <a:tailEnd type="none" w="med" len="med"/>
-                    </a:lnT>
-                    <a:lnB w="6350" cap="flat" cmpd="sng" algn="ctr">
-                      <a:solidFill>
-                        <a:srgbClr val="D8DCEA"/>
-                      </a:solidFill>
-                      <a:prstDash val="solid"/>
-                      <a:round/>
-                      <a:headEnd type="none" w="med" len="med"/>
-                      <a:tailEnd type="none" w="med" len="med"/>
-                    </a:lnB>
-                    <a:solidFill>
-                      <a:srgbClr val="FFFFFF"/>
-                    </a:solidFill>
-                  </a:tcPr>
-                </a:tc>
-                <a:tc>
-                  <a:txBody>
-                    <a:bodyPr/>
-                    <a:lstStyle/>
-                    <a:p>
-                      <a:pPr indent="0" marL="0">
-                        <a:buNone/>
-                      </a:pPr>
-                      <a:r>
-                        <a:rPr lang="en-US" sz="1100" dirty="0">
-                          <a:solidFill>
-                            <a:srgbClr val="011676"/>
-                          </a:solidFill>
-                          <a:latin typeface="Arial" pitchFamily="34" charset="0"/>
-                          <a:ea typeface="Arial" pitchFamily="34" charset="-122"/>
-                          <a:cs typeface="Arial" pitchFamily="34" charset="-120"/>
-                        </a:rPr>
-                        <a:t>1 %</a:t>
+                        <a:t>ENTREGA CONFIRMADA — 0 pendentes, 0 erros</a:t>
                       </a:r>
                       <a:endParaRPr lang="en-US" sz="1100" dirty="0">
                         <a:latin typeface="Arial" charset="0"/>
@@ -7701,7 +10174,7 @@
                 <a:ea typeface="Arial" pitchFamily="34" charset="-122"/>
                 <a:cs typeface="Arial" pitchFamily="34" charset="-120"/>
               </a:rPr>
-              <a:t>15% das chamadas, 68% da conta</a:t>
+              <a:t>A pergunta que abre o capítulo</a:t>
             </a:r>
             <a:endParaRPr lang="en-US" sz="2600" dirty="0"/>
           </a:p>
@@ -7770,7 +10243,7 @@
                 <a:ea typeface="Arial" pitchFamily="34" charset="-122"/>
                 <a:cs typeface="Arial" pitchFamily="34" charset="-120"/>
               </a:rPr>
-              <a:t>O Mediador de cardápio concentra o custo — não a frequência.</a:t>
+              <a:t>Se o canal confirma a entrega e o sistema não registra nada, onde está a mensagem?</a:t>
             </a:r>
             <a:endParaRPr lang="en-US" sz="1500" dirty="0"/>
           </a:p>
@@ -7794,7 +10267,7 @@
                 <a:ea typeface="Arial" pitchFamily="34" charset="-122"/>
                 <a:cs typeface="Arial" pitchFamily="34" charset="-120"/>
               </a:rPr>
-              <a:t>É o argumento mais concreto pra separar o eixo de geração do eixo de ingestão.</a:t>
+              <a:t>Um erro que grita é fácil: tem stack trace, tem alerta, alguém acorda.</a:t>
             </a:r>
             <a:endParaRPr lang="en-US" sz="1500" dirty="0"/>
           </a:p>
@@ -7818,7 +10291,31 @@
                 <a:ea typeface="Arial" pitchFamily="34" charset="-122"/>
                 <a:cs typeface="Arial" pitchFamily="34" charset="-120"/>
               </a:rPr>
-              <a:t>Com o PR #6 entram três eixos trocáveis ao vivo: model, modelIngestao e modelVisao.</a:t>
+              <a:t>Uma ausência não dispara nada. Não existe monitor que avise que algo que deveria ter acontecido não aconteceu.</a:t>
+            </a:r>
+            <a:endParaRPr lang="en-US" sz="1500" dirty="0"/>
+          </a:p>
+          <a:p>
+            <a:pPr marL="342900" indent="-342900">
+              <a:lnSpc>
+                <a:spcPct val="115000"/>
+              </a:lnSpc>
+              <a:spcAft>
+                <a:spcPts val="1000"/>
+              </a:spcAft>
+              <a:buSzPct val="100000"/>
+              <a:buChar char="•"/>
+            </a:pPr>
+            <a:r>
+              <a:rPr lang="en-US" sz="1500" dirty="0">
+                <a:solidFill>
+                  <a:srgbClr val="011676"/>
+                </a:solidFill>
+                <a:latin typeface="Arial" pitchFamily="34" charset="0"/>
+                <a:ea typeface="Arial" pitchFamily="34" charset="-122"/>
+                <a:cs typeface="Arial" pitchFamily="34" charset="-120"/>
+              </a:rPr>
+              <a:t>...a menos que você tenha pensado nisso antes.</a:t>
             </a:r>
             <a:endParaRPr lang="en-US" sz="1500" dirty="0"/>
           </a:p>
@@ -8083,7 +10580,7 @@
                 <a:ea typeface="Arial" pitchFamily="34" charset="-122"/>
                 <a:cs typeface="Arial" pitchFamily="34" charset="-120"/>
               </a:rPr>
-              <a:t>VÍDEO 4.2 — EPISÓDIO A</a:t>
+              <a:t>VÍDEO 4.2 — FALHA 1</a:t>
             </a:r>
             <a:endParaRPr lang="en-US" sz="1100" dirty="0"/>
           </a:p>
@@ -8122,7 +10619,7 @@
                 <a:ea typeface="Arial" pitchFamily="34" charset="-122"/>
                 <a:cs typeface="Arial" pitchFamily="34" charset="-120"/>
               </a:rPr>
-              <a:t>O tratamento de erro apagou a evidência</a:t>
+              <a:t>Uma linha, e o comentário entrega tudo</a:t>
             </a:r>
             <a:endParaRPr lang="en-US" sz="2600" dirty="0"/>
           </a:p>
@@ -8191,7 +10688,7 @@
                 <a:ea typeface="Arial" pitchFamily="34" charset="-122"/>
                 <a:cs typeface="Arial" pitchFamily="34" charset="-120"/>
               </a:rPr>
-              <a:t>Dois "fetch failed" no log, com 8 microssegundos de diferença.</a:t>
+              <a:t>if (!message || !message.text) return;</a:t>
             </a:r>
             <a:endParaRPr lang="en-US" sz="1500" dirty="0"/>
           </a:p>
@@ -8215,7 +10712,7 @@
                 <a:ea typeface="Arial" pitchFamily="34" charset="-122"/>
                 <a:cs typeface="Arial" pitchFamily="34" charset="-120"/>
               </a:rPr>
-              <a:t>Nenhuma chamada de rede real acontece nesse tempo.</a:t>
+              <a:t>"// foto/audio: fora do escopo desta fase" — estava documentado. Eu sabia.</a:t>
             </a:r>
             <a:endParaRPr lang="en-US" sz="1500" dirty="0"/>
           </a:p>
@@ -8239,7 +10736,7 @@
                 <a:ea typeface="Arial" pitchFamily="34" charset="-122"/>
                 <a:cs typeface="Arial" pitchFamily="34" charset="-120"/>
               </a:rPr>
-              <a:t>A segunda linha não é uma nova falha: é o próprio aviso de erro falhando dentro do catch, engolindo o erro original.</a:t>
+              <a:t>Sem log, sem resposta, sem rastro: o único caminho do código que termina em silêncio absoluto.</a:t>
             </a:r>
             <a:endParaRPr lang="en-US" sz="1500" dirty="0"/>
           </a:p>
@@ -8255,7 +10752,7 @@
               <a:buChar char="•"/>
             </a:pPr>
             <a:r>
-              <a:rPr lang="en-US" sz="1500" dirty="0">
+              <a:rPr lang="en-US" sz="1500" b="1" dirty="0">
                 <a:solidFill>
                   <a:srgbClr val="011676"/>
                 </a:solidFill>
@@ -8263,7 +10760,7 @@
                 <a:ea typeface="Arial" pitchFamily="34" charset="-122"/>
                 <a:cs typeface="Arial" pitchFamily="34" charset="-120"/>
               </a:rPr>
-              <a:t>O tratamento de erro apagou a evidência do próprio erro.</a:t>
+              <a:t>O pecado não é não saber ler foto. É não dizer que não sabe.</a:t>
             </a:r>
             <a:endParaRPr lang="en-US" sz="1500" dirty="0"/>
           </a:p>
@@ -8375,7 +10872,7 @@
                 <a:ea typeface="Arial" pitchFamily="34" charset="-122"/>
                 <a:cs typeface="Arial" pitchFamily="34" charset="-120"/>
               </a:rPr>
-              <a:t>VÍDEO 4.2 — EPISÓDIO B</a:t>
+              <a:t>VÍDEO 4.2 — FALHA 2</a:t>
             </a:r>
             <a:endParaRPr lang="en-US" sz="1100" dirty="0"/>
           </a:p>
@@ -8414,7 +10911,7 @@
                 <a:ea typeface="Arial" pitchFamily="34" charset="-122"/>
                 <a:cs typeface="Arial" pitchFamily="34" charset="-120"/>
               </a:rPr>
-              <a:t>A falha perfeitamente silenciosa</a:t>
+              <a:t>Oito microssegundos</a:t>
             </a:r>
             <a:endParaRPr lang="en-US" sz="2600" dirty="0"/>
           </a:p>
@@ -8483,7 +10980,7 @@
                 <a:ea typeface="Arial" pitchFamily="34" charset="-122"/>
                 <a:cs typeface="Arial" pitchFamily="34" charset="-120"/>
               </a:rPr>
-              <a:t>Foto do cupom enviada: nenhum log, nenhum trace, nenhuma escrita, nenhuma resposta.</a:t>
+              <a:t>Dois erros quase idênticos no log, com 8 µs de diferença entre eles.</a:t>
             </a:r>
             <a:endParaRPr lang="en-US" sz="1500" dirty="0"/>
           </a:p>
@@ -8499,7 +10996,7 @@
               <a:buChar char="•"/>
             </a:pPr>
             <a:r>
-              <a:rPr lang="en-US" sz="1500" b="1" dirty="0">
+              <a:rPr lang="en-US" sz="1500" dirty="0">
                 <a:solidFill>
                   <a:srgbClr val="011676"/>
                 </a:solidFill>
@@ -8507,7 +11004,7 @@
                 <a:ea typeface="Arial" pitchFamily="34" charset="-122"/>
                 <a:cs typeface="Arial" pitchFamily="34" charset="-120"/>
               </a:rPr>
-              <a:t>getWebhookInfo do Telegram confirma entrega — 0 pendentes, sem erros.</a:t>
+              <a:t>Nenhuma chamada de rede acontece em 8 microssegundos — é fisicamente impossível.</a:t>
             </a:r>
             <a:endParaRPr lang="en-US" sz="1500" dirty="0"/>
           </a:p>
@@ -8531,7 +11028,7 @@
                 <a:ea typeface="Arial" pitchFamily="34" charset="-122"/>
                 <a:cs typeface="Arial" pitchFamily="34" charset="-120"/>
               </a:rPr>
-              <a:t>Por eliminação: um return mudo para mensagens sem .text (foto/áudio).</a:t>
+              <a:t>Logo, o segundo não é uma nova tentativa: é o aviso de erro falhando dentro do catch do primeiro.</a:t>
             </a:r>
             <a:endParaRPr lang="en-US" sz="1500" dirty="0"/>
           </a:p>
@@ -8547,7 +11044,7 @@
               <a:buChar char="•"/>
             </a:pPr>
             <a:r>
-              <a:rPr lang="en-US" sz="1500" dirty="0">
+              <a:rPr lang="en-US" sz="1500" b="1" dirty="0">
                 <a:solidFill>
                   <a:srgbClr val="011676"/>
                 </a:solidFill>
@@ -8555,7 +11052,7 @@
                 <a:ea typeface="Arial" pitchFamily="34" charset="-122"/>
                 <a:cs typeface="Arial" pitchFamily="34" charset="-120"/>
               </a:rPr>
-              <a:t>Se o canal confirma a entrega e o sistema não registra nada, onde está a mensagem?</a:t>
+              <a:t>O tratamento de erro apagou a evidência do erro.</a:t>
             </a:r>
             <a:endParaRPr lang="en-US" sz="1500" dirty="0"/>
           </a:p>
@@ -8667,7 +11164,7 @@
                 <a:ea typeface="Arial" pitchFamily="34" charset="-122"/>
                 <a:cs typeface="Arial" pitchFamily="34" charset="-120"/>
               </a:rPr>
-              <a:t>VÍDEO 4.2 — EPISÓDIO C</a:t>
+              <a:t>VÍDEO 4.2 — FALHA 3</a:t>
             </a:r>
             <a:endParaRPr lang="en-US" sz="1100" dirty="0"/>
           </a:p>
@@ -8706,156 +11203,459 @@
                 <a:ea typeface="Arial" pitchFamily="34" charset="-122"/>
                 <a:cs typeface="Arial" pitchFamily="34" charset="-120"/>
               </a:rPr>
-              <a:t>O modelo acertou, o código errou</a:t>
+              <a:t>Truncamento: a assinatura</a:t>
             </a:r>
             <a:endParaRPr lang="en-US" sz="2600" dirty="0"/>
           </a:p>
         </p:txBody>
       </p:sp>
-      <p:sp>
-        <p:nvSpPr>
-          <p:cNvPr id="4" name="Shape 2"/>
-          <p:cNvSpPr/>
-          <p:nvPr/>
-        </p:nvSpPr>
-        <p:spPr>
-          <a:xfrm>
-            <a:off x="502920" y="1371600"/>
-            <a:ext cx="8138160" cy="0"/>
-          </a:xfrm>
-          <a:prstGeom prst="line">
-            <a:avLst/>
-          </a:prstGeom>
-          <a:noFill/>
-          <a:ln w="19050">
-            <a:solidFill>
-              <a:srgbClr val="010C53"/>
-            </a:solidFill>
-            <a:prstDash val="solid"/>
-          </a:ln>
-        </p:spPr>
-      </p:sp>
-      <p:sp>
-        <p:nvSpPr>
-          <p:cNvPr id="5" name="Text 3"/>
-          <p:cNvSpPr/>
-          <p:nvPr/>
-        </p:nvSpPr>
-        <p:spPr>
-          <a:xfrm>
-            <a:off x="502920" y="1600200"/>
-            <a:ext cx="8138160" cy="3044952"/>
-          </a:xfrm>
-          <a:prstGeom prst="rect">
-            <a:avLst/>
-          </a:prstGeom>
-          <a:noFill/>
-          <a:ln/>
-        </p:spPr>
-        <p:txBody>
-          <a:bodyPr wrap="square" rtlCol="0" anchor="t"/>
-          <a:lstStyle/>
-          <a:p>
-            <a:pPr marL="342900" indent="-342900">
-              <a:lnSpc>
-                <a:spcPct val="115000"/>
-              </a:lnSpc>
-              <a:spcAft>
-                <a:spcPts val="1000"/>
-              </a:spcAft>
-              <a:buSzPct val="100000"/>
-              <a:buChar char="•"/>
-            </a:pPr>
-            <a:r>
-              <a:rPr lang="en-US" sz="1500" b="1" dirty="0">
-                <a:solidFill>
-                  <a:srgbClr val="011676"/>
-                </a:solidFill>
-                <a:latin typeface="Arial" pitchFamily="34" charset="0"/>
-                <a:ea typeface="Arial" pitchFamily="34" charset="-122"/>
-                <a:cs typeface="Arial" pitchFamily="34" charset="-120"/>
-              </a:rPr>
-              <a:t>"Comemos 3 porções de lasagna, 1 e 1/2 para cada!" — classificado perfeitamente pelo agente.</a:t>
-            </a:r>
-            <a:endParaRPr lang="en-US" sz="1500" dirty="0"/>
-          </a:p>
-          <a:p>
-            <a:pPr marL="342900" indent="-342900">
-              <a:lnSpc>
-                <a:spcPct val="115000"/>
-              </a:lnSpc>
-              <a:spcAft>
-                <a:spcPts val="1000"/>
-              </a:spcAft>
-              <a:buSzPct val="100000"/>
-              <a:buChar char="•"/>
-            </a:pPr>
-            <a:r>
-              <a:rPr lang="en-US" sz="1500" dirty="0">
-                <a:solidFill>
-                  <a:srgbClr val="011676"/>
-                </a:solidFill>
-                <a:latin typeface="Arial" pitchFamily="34" charset="0"/>
-                <a:ea typeface="Arial" pitchFamily="34" charset="-122"/>
-                <a:cs typeface="Arial" pitchFamily="34" charset="-120"/>
-              </a:rPr>
-              <a:t>item_nome: lasagna, quantidade: 3 (com a aritmética implícita já resolvida).</a:t>
-            </a:r>
-            <a:endParaRPr lang="en-US" sz="1500" dirty="0"/>
-          </a:p>
-          <a:p>
-            <a:pPr marL="342900" indent="-342900">
-              <a:lnSpc>
-                <a:spcPct val="115000"/>
-              </a:lnSpc>
-              <a:spcAft>
-                <a:spcPts val="1000"/>
-              </a:spcAft>
-              <a:buSzPct val="100000"/>
-              <a:buChar char="•"/>
-            </a:pPr>
-            <a:r>
-              <a:rPr lang="en-US" sz="1500" dirty="0">
-                <a:solidFill>
-                  <a:srgbClr val="011676"/>
-                </a:solidFill>
-                <a:latin typeface="Arial" pitchFamily="34" charset="0"/>
-                <a:ea typeface="Arial" pitchFamily="34" charset="-122"/>
-                <a:cs typeface="Arial" pitchFamily="34" charset="-120"/>
-              </a:rPr>
-              <a:t>E o estoque continuou 5/5 — o prato está gravado como lasanha; ilike '%lasagna%' não casa (gn × nh, não é acento).</a:t>
-            </a:r>
-            <a:endParaRPr lang="en-US" sz="1500" dirty="0"/>
-          </a:p>
-          <a:p>
-            <a:pPr marL="342900" indent="-342900">
-              <a:lnSpc>
-                <a:spcPct val="115000"/>
-              </a:lnSpc>
-              <a:spcAft>
-                <a:spcPts val="1000"/>
-              </a:spcAft>
-              <a:buSzPct val="100000"/>
-              <a:buChar char="•"/>
-            </a:pPr>
-            <a:r>
-              <a:rPr lang="en-US" sz="1500" dirty="0">
-                <a:solidFill>
-                  <a:srgbClr val="011676"/>
-                </a:solidFill>
-                <a:latin typeface="Arial" pitchFamily="34" charset="0"/>
-                <a:ea typeface="Arial" pitchFamily="34" charset="-122"/>
-                <a:cs typeface="Arial" pitchFamily="34" charset="-120"/>
-              </a:rPr>
-              <a:t>Preservado de propósito: é falha de estado, não de canal — só detectável cruzando trace com estado resultante.</a:t>
-            </a:r>
-            <a:endParaRPr lang="en-US" sz="1500" dirty="0"/>
-          </a:p>
-        </p:txBody>
-      </p:sp>
-      <p:sp>
-        <p:nvSpPr>
-          <p:cNvPr id="6" name="Text 4"/>
+      <p:graphicFrame>
+        <p:nvGraphicFramePr>
+          <p:cNvPr id="10" name="Table 0"/>
+          <p:cNvGraphicFramePr>
+            <a:graphicFrameLocks noGrp="1"/>
+          </p:cNvGraphicFramePr>
+          <p:nvPr>
+            <p:extLst>
+              <p:ext uri="{D42A27DB-BD31-4B8C-83A1-F6EECF244321}">
+                <p14:modId xmlns:p14="http://schemas.microsoft.com/office/powerpoint/2010/main" val="1579011935"/>
+              </p:ext>
+            </p:extLst>
+          </p:nvPr>
+        </p:nvGraphicFramePr>
+        <p:xfrm>
+          <a:off x="502920" y="1463040"/>
+          <a:ext cx="8138160" cy="914400"/>
+        </p:xfrm>
+        <a:graphic>
+          <a:graphicData uri="http://schemas.openxmlformats.org/drawingml/2006/table">
+            <a:tbl>
+              <a:tblPr/>
+              <a:tblGrid>
+                <a:gridCol w="3840480"/>
+                <a:gridCol w="4572000"/>
+              </a:tblGrid>
+              <a:tr h="0">
+                <a:tc>
+                  <a:txBody>
+                    <a:bodyPr/>
+                    <a:lstStyle/>
+                    <a:p>
+                      <a:pPr indent="0" marL="0">
+                        <a:buNone/>
+                      </a:pPr>
+                      <a:r>
+                        <a:rPr lang="en-US" sz="1100" b="1" dirty="0">
+                          <a:solidFill>
+                            <a:srgbClr val="F4F5F6"/>
+                          </a:solidFill>
+                          <a:latin typeface="Arial" pitchFamily="34" charset="0"/>
+                          <a:ea typeface="Arial" pitchFamily="34" charset="-122"/>
+                          <a:cs typeface="Arial" pitchFamily="34" charset="-120"/>
+                        </a:rPr>
+                        <a:t>Tokens</a:t>
+                      </a:r>
+                      <a:endParaRPr lang="en-US" sz="1100" dirty="0">
+                        <a:latin typeface="Arial" charset="0"/>
+                        <a:ea typeface="Arial" charset="0"/>
+                        <a:cs typeface="Arial" charset="0"/>
+                      </a:endParaRPr>
+                    </a:p>
+                  </a:txBody>
+                  <a:tcPr marL="91440" marR="91440" marT="45720" marB="45720" anchor="ctr">
+                    <a:lnL w="6350" cap="flat" cmpd="sng" algn="ctr">
+                      <a:solidFill>
+                        <a:srgbClr val="D8DCEA"/>
+                      </a:solidFill>
+                      <a:prstDash val="solid"/>
+                      <a:round/>
+                      <a:headEnd type="none" w="med" len="med"/>
+                      <a:tailEnd type="none" w="med" len="med"/>
+                    </a:lnL>
+                    <a:lnR w="6350" cap="flat" cmpd="sng" algn="ctr">
+                      <a:solidFill>
+                        <a:srgbClr val="D8DCEA"/>
+                      </a:solidFill>
+                      <a:prstDash val="solid"/>
+                      <a:round/>
+                      <a:headEnd type="none" w="med" len="med"/>
+                      <a:tailEnd type="none" w="med" len="med"/>
+                    </a:lnR>
+                    <a:lnT w="6350" cap="flat" cmpd="sng" algn="ctr">
+                      <a:solidFill>
+                        <a:srgbClr val="D8DCEA"/>
+                      </a:solidFill>
+                      <a:prstDash val="solid"/>
+                      <a:round/>
+                      <a:headEnd type="none" w="med" len="med"/>
+                      <a:tailEnd type="none" w="med" len="med"/>
+                    </a:lnT>
+                    <a:lnB w="6350" cap="flat" cmpd="sng" algn="ctr">
+                      <a:solidFill>
+                        <a:srgbClr val="D8DCEA"/>
+                      </a:solidFill>
+                      <a:prstDash val="solid"/>
+                      <a:round/>
+                      <a:headEnd type="none" w="med" len="med"/>
+                      <a:tailEnd type="none" w="med" len="med"/>
+                    </a:lnB>
+                    <a:solidFill>
+                      <a:srgbClr val="010C53"/>
+                    </a:solidFill>
+                  </a:tcPr>
+                </a:tc>
+                <a:tc>
+                  <a:txBody>
+                    <a:bodyPr/>
+                    <a:lstStyle/>
+                    <a:p>
+                      <a:pPr indent="0" marL="0">
+                        <a:buNone/>
+                      </a:pPr>
+                      <a:r>
+                        <a:rPr lang="en-US" sz="1100" b="1" dirty="0">
+                          <a:solidFill>
+                            <a:srgbClr val="F4F5F6"/>
+                          </a:solidFill>
+                          <a:latin typeface="Arial" pitchFamily="34" charset="0"/>
+                          <a:ea typeface="Arial" pitchFamily="34" charset="-122"/>
+                          <a:cs typeface="Arial" pitchFamily="34" charset="-120"/>
+                        </a:rPr>
+                        <a:t>Valor</a:t>
+                      </a:r>
+                      <a:endParaRPr lang="en-US" sz="1100" dirty="0">
+                        <a:latin typeface="Arial" charset="0"/>
+                        <a:ea typeface="Arial" charset="0"/>
+                        <a:cs typeface="Arial" charset="0"/>
+                      </a:endParaRPr>
+                    </a:p>
+                  </a:txBody>
+                  <a:tcPr marL="91440" marR="91440" marT="45720" marB="45720" anchor="ctr">
+                    <a:lnL w="6350" cap="flat" cmpd="sng" algn="ctr">
+                      <a:solidFill>
+                        <a:srgbClr val="D8DCEA"/>
+                      </a:solidFill>
+                      <a:prstDash val="solid"/>
+                      <a:round/>
+                      <a:headEnd type="none" w="med" len="med"/>
+                      <a:tailEnd type="none" w="med" len="med"/>
+                    </a:lnL>
+                    <a:lnR w="6350" cap="flat" cmpd="sng" algn="ctr">
+                      <a:solidFill>
+                        <a:srgbClr val="D8DCEA"/>
+                      </a:solidFill>
+                      <a:prstDash val="solid"/>
+                      <a:round/>
+                      <a:headEnd type="none" w="med" len="med"/>
+                      <a:tailEnd type="none" w="med" len="med"/>
+                    </a:lnR>
+                    <a:lnT w="6350" cap="flat" cmpd="sng" algn="ctr">
+                      <a:solidFill>
+                        <a:srgbClr val="D8DCEA"/>
+                      </a:solidFill>
+                      <a:prstDash val="solid"/>
+                      <a:round/>
+                      <a:headEnd type="none" w="med" len="med"/>
+                      <a:tailEnd type="none" w="med" len="med"/>
+                    </a:lnT>
+                    <a:lnB w="6350" cap="flat" cmpd="sng" algn="ctr">
+                      <a:solidFill>
+                        <a:srgbClr val="D8DCEA"/>
+                      </a:solidFill>
+                      <a:prstDash val="solid"/>
+                      <a:round/>
+                      <a:headEnd type="none" w="med" len="med"/>
+                      <a:tailEnd type="none" w="med" len="med"/>
+                    </a:lnB>
+                    <a:solidFill>
+                      <a:srgbClr val="010C53"/>
+                    </a:solidFill>
+                  </a:tcPr>
+                </a:tc>
+              </a:tr>
+              <a:tr h="0">
+                <a:tc>
+                  <a:txBody>
+                    <a:bodyPr/>
+                    <a:lstStyle/>
+                    <a:p>
+                      <a:pPr indent="0" marL="0">
+                        <a:buNone/>
+                      </a:pPr>
+                      <a:r>
+                        <a:rPr lang="en-US" sz="1100" dirty="0">
+                          <a:solidFill>
+                            <a:srgbClr val="011676"/>
+                          </a:solidFill>
+                          <a:latin typeface="Arial" pitchFamily="34" charset="0"/>
+                          <a:ea typeface="Arial" pitchFamily="34" charset="-122"/>
+                          <a:cs typeface="Arial" pitchFamily="34" charset="-120"/>
+                        </a:rPr>
+                        <a:t>entrada</a:t>
+                      </a:r>
+                      <a:endParaRPr lang="en-US" sz="1100" dirty="0">
+                        <a:latin typeface="Arial" charset="0"/>
+                        <a:ea typeface="Arial" charset="0"/>
+                        <a:cs typeface="Arial" charset="0"/>
+                      </a:endParaRPr>
+                    </a:p>
+                  </a:txBody>
+                  <a:tcPr marL="91440" marR="91440" marT="45720" marB="45720" anchor="t">
+                    <a:lnL w="6350" cap="flat" cmpd="sng" algn="ctr">
+                      <a:solidFill>
+                        <a:srgbClr val="D8DCEA"/>
+                      </a:solidFill>
+                      <a:prstDash val="solid"/>
+                      <a:round/>
+                      <a:headEnd type="none" w="med" len="med"/>
+                      <a:tailEnd type="none" w="med" len="med"/>
+                    </a:lnL>
+                    <a:lnR w="6350" cap="flat" cmpd="sng" algn="ctr">
+                      <a:solidFill>
+                        <a:srgbClr val="D8DCEA"/>
+                      </a:solidFill>
+                      <a:prstDash val="solid"/>
+                      <a:round/>
+                      <a:headEnd type="none" w="med" len="med"/>
+                      <a:tailEnd type="none" w="med" len="med"/>
+                    </a:lnR>
+                    <a:lnT w="6350" cap="flat" cmpd="sng" algn="ctr">
+                      <a:solidFill>
+                        <a:srgbClr val="D8DCEA"/>
+                      </a:solidFill>
+                      <a:prstDash val="solid"/>
+                      <a:round/>
+                      <a:headEnd type="none" w="med" len="med"/>
+                      <a:tailEnd type="none" w="med" len="med"/>
+                    </a:lnT>
+                    <a:lnB w="6350" cap="flat" cmpd="sng" algn="ctr">
+                      <a:solidFill>
+                        <a:srgbClr val="D8DCEA"/>
+                      </a:solidFill>
+                      <a:prstDash val="solid"/>
+                      <a:round/>
+                      <a:headEnd type="none" w="med" len="med"/>
+                      <a:tailEnd type="none" w="med" len="med"/>
+                    </a:lnB>
+                    <a:solidFill>
+                      <a:srgbClr val="FFFFFF"/>
+                    </a:solidFill>
+                  </a:tcPr>
+                </a:tc>
+                <a:tc>
+                  <a:txBody>
+                    <a:bodyPr/>
+                    <a:lstStyle/>
+                    <a:p>
+                      <a:pPr indent="0" marL="0">
+                        <a:buNone/>
+                      </a:pPr>
+                      <a:r>
+                        <a:rPr lang="en-US" sz="1100" dirty="0">
+                          <a:solidFill>
+                            <a:srgbClr val="011676"/>
+                          </a:solidFill>
+                          <a:latin typeface="Arial" pitchFamily="34" charset="0"/>
+                          <a:ea typeface="Arial" pitchFamily="34" charset="-122"/>
+                          <a:cs typeface="Arial" pitchFamily="34" charset="-120"/>
+                        </a:rPr>
+                        <a:t>7.448</a:t>
+                      </a:r>
+                      <a:endParaRPr lang="en-US" sz="1100" dirty="0">
+                        <a:latin typeface="Arial" charset="0"/>
+                        <a:ea typeface="Arial" charset="0"/>
+                        <a:cs typeface="Arial" charset="0"/>
+                      </a:endParaRPr>
+                    </a:p>
+                  </a:txBody>
+                  <a:tcPr marL="91440" marR="91440" marT="45720" marB="45720" anchor="t">
+                    <a:lnL w="6350" cap="flat" cmpd="sng" algn="ctr">
+                      <a:solidFill>
+                        <a:srgbClr val="D8DCEA"/>
+                      </a:solidFill>
+                      <a:prstDash val="solid"/>
+                      <a:round/>
+                      <a:headEnd type="none" w="med" len="med"/>
+                      <a:tailEnd type="none" w="med" len="med"/>
+                    </a:lnL>
+                    <a:lnR w="6350" cap="flat" cmpd="sng" algn="ctr">
+                      <a:solidFill>
+                        <a:srgbClr val="D8DCEA"/>
+                      </a:solidFill>
+                      <a:prstDash val="solid"/>
+                      <a:round/>
+                      <a:headEnd type="none" w="med" len="med"/>
+                      <a:tailEnd type="none" w="med" len="med"/>
+                    </a:lnR>
+                    <a:lnT w="6350" cap="flat" cmpd="sng" algn="ctr">
+                      <a:solidFill>
+                        <a:srgbClr val="D8DCEA"/>
+                      </a:solidFill>
+                      <a:prstDash val="solid"/>
+                      <a:round/>
+                      <a:headEnd type="none" w="med" len="med"/>
+                      <a:tailEnd type="none" w="med" len="med"/>
+                    </a:lnT>
+                    <a:lnB w="6350" cap="flat" cmpd="sng" algn="ctr">
+                      <a:solidFill>
+                        <a:srgbClr val="D8DCEA"/>
+                      </a:solidFill>
+                      <a:prstDash val="solid"/>
+                      <a:round/>
+                      <a:headEnd type="none" w="med" len="med"/>
+                      <a:tailEnd type="none" w="med" len="med"/>
+                    </a:lnB>
+                    <a:solidFill>
+                      <a:srgbClr val="FFFFFF"/>
+                    </a:solidFill>
+                  </a:tcPr>
+                </a:tc>
+              </a:tr>
+              <a:tr h="0">
+                <a:tc>
+                  <a:txBody>
+                    <a:bodyPr/>
+                    <a:lstStyle/>
+                    <a:p>
+                      <a:pPr indent="0" marL="0">
+                        <a:buNone/>
+                      </a:pPr>
+                      <a:r>
+                        <a:rPr lang="en-US" sz="1100" dirty="0">
+                          <a:solidFill>
+                            <a:srgbClr val="011676"/>
+                          </a:solidFill>
+                          <a:latin typeface="Arial" pitchFamily="34" charset="0"/>
+                          <a:ea typeface="Arial" pitchFamily="34" charset="-122"/>
+                          <a:cs typeface="Arial" pitchFamily="34" charset="-120"/>
+                        </a:rPr>
+                        <a:t>saída</a:t>
+                      </a:r>
+                      <a:endParaRPr lang="en-US" sz="1100" dirty="0">
+                        <a:latin typeface="Arial" charset="0"/>
+                        <a:ea typeface="Arial" charset="0"/>
+                        <a:cs typeface="Arial" charset="0"/>
+                      </a:endParaRPr>
+                    </a:p>
+                  </a:txBody>
+                  <a:tcPr marL="91440" marR="91440" marT="45720" marB="45720" anchor="t">
+                    <a:lnL w="6350" cap="flat" cmpd="sng" algn="ctr">
+                      <a:solidFill>
+                        <a:srgbClr val="D8DCEA"/>
+                      </a:solidFill>
+                      <a:prstDash val="solid"/>
+                      <a:round/>
+                      <a:headEnd type="none" w="med" len="med"/>
+                      <a:tailEnd type="none" w="med" len="med"/>
+                    </a:lnL>
+                    <a:lnR w="6350" cap="flat" cmpd="sng" algn="ctr">
+                      <a:solidFill>
+                        <a:srgbClr val="D8DCEA"/>
+                      </a:solidFill>
+                      <a:prstDash val="solid"/>
+                      <a:round/>
+                      <a:headEnd type="none" w="med" len="med"/>
+                      <a:tailEnd type="none" w="med" len="med"/>
+                    </a:lnR>
+                    <a:lnT w="6350" cap="flat" cmpd="sng" algn="ctr">
+                      <a:solidFill>
+                        <a:srgbClr val="D8DCEA"/>
+                      </a:solidFill>
+                      <a:prstDash val="solid"/>
+                      <a:round/>
+                      <a:headEnd type="none" w="med" len="med"/>
+                      <a:tailEnd type="none" w="med" len="med"/>
+                    </a:lnT>
+                    <a:lnB w="6350" cap="flat" cmpd="sng" algn="ctr">
+                      <a:solidFill>
+                        <a:srgbClr val="D8DCEA"/>
+                      </a:solidFill>
+                      <a:prstDash val="solid"/>
+                      <a:round/>
+                      <a:headEnd type="none" w="med" len="med"/>
+                      <a:tailEnd type="none" w="med" len="med"/>
+                    </a:lnB>
+                    <a:solidFill>
+                      <a:srgbClr val="F4F5F6"/>
+                    </a:solidFill>
+                  </a:tcPr>
+                </a:tc>
+                <a:tc>
+                  <a:txBody>
+                    <a:bodyPr/>
+                    <a:lstStyle/>
+                    <a:p>
+                      <a:pPr indent="0" marL="0">
+                        <a:buNone/>
+                      </a:pPr>
+                      <a:r>
+                        <a:rPr lang="en-US" sz="1100" dirty="0">
+                          <a:solidFill>
+                            <a:srgbClr val="011676"/>
+                          </a:solidFill>
+                          <a:latin typeface="Arial" pitchFamily="34" charset="0"/>
+                          <a:ea typeface="Arial" pitchFamily="34" charset="-122"/>
+                          <a:cs typeface="Arial" pitchFamily="34" charset="-120"/>
+                        </a:rPr>
+                        <a:t>1.024 — o teto configurado, na mosca</a:t>
+                      </a:r>
+                      <a:endParaRPr lang="en-US" sz="1100" dirty="0">
+                        <a:latin typeface="Arial" charset="0"/>
+                        <a:ea typeface="Arial" charset="0"/>
+                        <a:cs typeface="Arial" charset="0"/>
+                      </a:endParaRPr>
+                    </a:p>
+                  </a:txBody>
+                  <a:tcPr marL="91440" marR="91440" marT="45720" marB="45720" anchor="t">
+                    <a:lnL w="6350" cap="flat" cmpd="sng" algn="ctr">
+                      <a:solidFill>
+                        <a:srgbClr val="D8DCEA"/>
+                      </a:solidFill>
+                      <a:prstDash val="solid"/>
+                      <a:round/>
+                      <a:headEnd type="none" w="med" len="med"/>
+                      <a:tailEnd type="none" w="med" len="med"/>
+                    </a:lnL>
+                    <a:lnR w="6350" cap="flat" cmpd="sng" algn="ctr">
+                      <a:solidFill>
+                        <a:srgbClr val="D8DCEA"/>
+                      </a:solidFill>
+                      <a:prstDash val="solid"/>
+                      <a:round/>
+                      <a:headEnd type="none" w="med" len="med"/>
+                      <a:tailEnd type="none" w="med" len="med"/>
+                    </a:lnR>
+                    <a:lnT w="6350" cap="flat" cmpd="sng" algn="ctr">
+                      <a:solidFill>
+                        <a:srgbClr val="D8DCEA"/>
+                      </a:solidFill>
+                      <a:prstDash val="solid"/>
+                      <a:round/>
+                      <a:headEnd type="none" w="med" len="med"/>
+                      <a:tailEnd type="none" w="med" len="med"/>
+                    </a:lnT>
+                    <a:lnB w="6350" cap="flat" cmpd="sng" algn="ctr">
+                      <a:solidFill>
+                        <a:srgbClr val="D8DCEA"/>
+                      </a:solidFill>
+                      <a:prstDash val="solid"/>
+                      <a:round/>
+                      <a:headEnd type="none" w="med" len="med"/>
+                      <a:tailEnd type="none" w="med" len="med"/>
+                    </a:lnB>
+                    <a:solidFill>
+                      <a:srgbClr val="F4F5F6"/>
+                    </a:solidFill>
+                  </a:tcPr>
+                </a:tc>
+              </a:tr>
+            </a:tbl>
+          </a:graphicData>
+        </a:graphic>
+      </p:graphicFrame>
+      <p:sp>
+        <p:nvSpPr>
+          <p:cNvPr id="5" name="Text 2"/>
           <p:cNvSpPr/>
           <p:nvPr/>
         </p:nvSpPr>
